--- a/outputs/submission_package_development_only/slides/education_ai_evidence_roadshow_final.pptx
+++ b/outputs/submission_package_development_only/slides/education_ai_evidence_roadshow_final.pptx
@@ -5,7 +5,7 @@
     <p:sldMasterId id="2147483648" r:id="rId0"/>
   </p:sldMasterIdLst>
   <p:notesMasterIdLst>
-    <p:notesMasterId r:id="rId20"/>
+    <p:notesMasterId r:id="rId11"/>
   </p:notesMasterIdLst>
   <p:sldIdLst>
     <p:sldId id="256" r:id="rId1"/>
@@ -18,15 +18,6 @@
     <p:sldId id="263" r:id="rId8"/>
     <p:sldId id="264" r:id="rId9"/>
     <p:sldId id="265" r:id="rId10"/>
-    <p:sldId id="266" r:id="rId11"/>
-    <p:sldId id="267" r:id="rId12"/>
-    <p:sldId id="268" r:id="rId13"/>
-    <p:sldId id="269" r:id="rId14"/>
-    <p:sldId id="270" r:id="rId15"/>
-    <p:sldId id="271" r:id="rId16"/>
-    <p:sldId id="272" r:id="rId17"/>
-    <p:sldId id="273" r:id="rId18"/>
-    <p:sldId id="274" r:id="rId19"/>
   </p:sldIdLst>
   <p:sldSz cx="12192000" cy="6858000"/>
   <p:notesSz cx="6858000" cy="12192000"/>
@@ -558,11 +549,11 @@
 </file>
 
 <file path=ppt/slides/slide1.xml><?xml version="1.0" encoding="utf-8"?>
-<p:sld xmlns:p="http://schemas.openxmlformats.org/presentationml/2006/main" xmlns:a="http://schemas.openxmlformats.org/drawingml/2006/main">
+<p:sld xmlns:p="http://schemas.openxmlformats.org/presentationml/2006/main" xmlns:r="http://schemas.openxmlformats.org/officeDocument/2006/relationships" xmlns:a="http://schemas.openxmlformats.org/drawingml/2006/main" xmlns:asvg="http://schemas.microsoft.com/office/drawing/2016/SVG/main" xmlns:mc="http://schemas.openxmlformats.org/markup-compatibility/2006" mc:Ignorable="asvg">
   <p:cSld>
     <p:spTree>
       <p:nvGrpSpPr>
-        <p:cNvPr id="1" name="" descr="&lt;Slide style={{ width: 1280, height: 720, background: '#F7F9FC', padding: 40 }}&gt;&#10;  &lt;Box style={{ height: 72, background: '#0E3F8C', padding: 18, justifyContent: 'center' }}&gt;&#10;    &lt;Text style={{ fontSize: 22, color: '#FFFFFF', fontWeight: 'bold' }}&gt;教育 AI 增量价值评价｜现场答辩&lt;/Text&gt;&#10;  &lt;/Box&gt;&#10;  &lt;Box style={{ height: 500, padding: 54, justifyContent: 'center', gap: 24 }}&gt;&#10;    &lt;Text style={{ fontSize: 42, color: '#0E3F8C', fontWeight: 'bold', lineHeight: 1.2 }}&gt;观察到的结果，不等于可靠证据&lt;/Text&gt;&#10;    &lt;Text style={{ fontSize: 25, color: '#4A5568', lineHeight: 1.45 }}&gt;当证据缺失、冲突或可信度不同，如何避免把 Raw Signal 直接当成可信结论？&lt;/Text&gt;&#10;    &lt;Box style={{ background: '#E8EFF8', border: '2px solid #1E4FA8', padding: 28, width: 900 }}&gt;&#10;      &lt;Text style={{ fontSize: 34, color: '#1E4FA8', fontWeight: 'bold' }}&gt;Score Stability ≠ Evidence Support Stability&lt;/Text&gt;&#10;      &lt;Text style={{ fontSize: 22, color: '#1A2230', marginTop: 12 }}&gt;分数稳定，不等于证据支撑稳定&lt;/Text&gt;&#10;    &lt;/Box&gt;&#10;    &lt;Text style={{ fontSize: 18, color: '#8B97A8' }}&gt;AI_PROVISIONAL · DEVELOPMENT_ONLY · NOT_HUMAN_VALIDATED&lt;/Text&gt;&#10;  &lt;/Box&gt;&#10;  &lt;Box style={{ height: 40, flexDirection: 'row', justifyContent: 'space-between', alignItems: 'center' }}&gt;&#10;    &lt;Text style={{ fontSize: 14, color: '#8B97A8' }}&gt;PPT_FINAL_CONVERGENCE&lt;/Text&gt;&lt;Text style={{ fontSize: 14, color: '#0E3F8C' }}&gt;01 / 10&lt;/Text&gt;&#10;  &lt;/Box&gt;&#10;&lt;/Slide&gt;"/>
+        <p:cNvPr id="1" name=""/>
         <p:cNvGrpSpPr/>
         <p:nvPr/>
       </p:nvGrpSpPr>
@@ -589,437 +580,21 @@
             <a:avLst/>
           </a:prstGeom>
           <a:solidFill>
-            <a:srgbClr val="F7F9FC"/>
-          </a:solidFill>
-          <a:ln/>
-        </p:spPr>
-        <p:txBody>
-          <a:bodyPr/>
-          <a:p/>
-        </p:txBody>
-      </p:sp>
-      <p:sp>
-        <p:nvSpPr>
-          <p:cNvPr id="3" name=""/>
-          <p:cNvSpPr/>
-          <p:nvPr/>
-        </p:nvSpPr>
-        <p:spPr>
-          <a:xfrm rot="0" flipH="0" flipV="0">
-            <a:off x="381000" y="381000"/>
-            <a:ext cx="11430000" cy="685800"/>
-          </a:xfrm>
-          <a:prstGeom prst="rect">
-            <a:avLst/>
-          </a:prstGeom>
-          <a:solidFill>
-            <a:srgbClr val="0E3F8C"/>
-          </a:solidFill>
-          <a:ln/>
-        </p:spPr>
-        <p:txBody>
-          <a:bodyPr/>
-          <a:p/>
-        </p:txBody>
-      </p:sp>
-      <p:sp>
-        <p:nvSpPr>
-          <p:cNvPr id="4" name="" descr="{&quot;isTemplate&quot;:true,&quot;type&quot;:&quot;text&quot;}"/>
-          <p:cNvSpPr txBox="1"/>
-          <p:nvPr/>
-        </p:nvSpPr>
-        <p:spPr>
-          <a:xfrm rot="0" flipH="0" flipV="0">
-            <a:off x="552450" y="600075"/>
-            <a:ext cx="11087100" cy="257175"/>
-          </a:xfrm>
-          <a:prstGeom prst="rect"/>
-        </p:spPr>
-        <p:txBody>
-          <a:bodyPr wrap="none" lIns="0" tIns="0" rIns="0" bIns="0"/>
-          <a:p>
-            <a:pPr>
-              <a:lnSpc>
-                <a:spcPct val="100000"/>
-              </a:lnSpc>
-            </a:pPr>
-            <a:r>
-              <a:rPr lang="zh-CN" sz="1650" b="1">
-                <a:solidFill>
-                  <a:srgbClr val="FFFFFF"/>
-                </a:solidFill>
-                <a:latin typeface="Microsoft YaHei"/>
-                <a:ea typeface="Microsoft YaHei"/>
-              </a:rPr>
-              <a:t>教育</a:t>
-            </a:r>
-            <a:r>
-              <a:rPr lang="en-US" sz="1650" b="1">
-                <a:solidFill>
-                  <a:srgbClr val="FFFFFF"/>
-                </a:solidFill>
-                <a:latin typeface="Microsoft YaHei"/>
-                <a:ea typeface="Microsoft YaHei"/>
-              </a:rPr>
-              <a:t> AI </a:t>
-            </a:r>
-            <a:r>
-              <a:rPr lang="zh-CN" sz="1650" b="1">
-                <a:solidFill>
-                  <a:srgbClr val="FFFFFF"/>
-                </a:solidFill>
-                <a:latin typeface="Microsoft YaHei"/>
-                <a:ea typeface="Microsoft YaHei"/>
-              </a:rPr>
-              <a:t>增量价值评价｜现场答辩</a:t>
-            </a:r>
-            <a:endParaRPr/>
-          </a:p>
-        </p:txBody>
-      </p:sp>
-      <p:sp>
-        <p:nvSpPr>
-          <p:cNvPr id="5" name="" descr="{&quot;isTemplate&quot;:true,&quot;type&quot;:&quot;text&quot;}"/>
-          <p:cNvSpPr txBox="1"/>
-          <p:nvPr/>
-        </p:nvSpPr>
-        <p:spPr>
-          <a:xfrm rot="0" flipH="0" flipV="0">
-            <a:off x="895350" y="1857375"/>
-            <a:ext cx="10401300" cy="581025"/>
-          </a:xfrm>
-          <a:prstGeom prst="rect"/>
-        </p:spPr>
-        <p:txBody>
-          <a:bodyPr wrap="none" lIns="0" tIns="0" rIns="0" bIns="0"/>
-          <a:p>
-            <a:pPr>
-              <a:lnSpc>
-                <a:spcPct val="120000"/>
-              </a:lnSpc>
-            </a:pPr>
-            <a:r>
-              <a:rPr lang="zh-CN" sz="3150" b="1">
-                <a:solidFill>
-                  <a:srgbClr val="0E3F8C"/>
-                </a:solidFill>
-                <a:latin typeface="Microsoft YaHei"/>
-                <a:ea typeface="Microsoft YaHei"/>
-              </a:rPr>
-              <a:t>观察到的结果，不等于可靠证据</a:t>
-            </a:r>
-            <a:endParaRPr/>
-          </a:p>
-        </p:txBody>
-      </p:sp>
-      <p:sp>
-        <p:nvSpPr>
-          <p:cNvPr id="6" name="" descr="{&quot;isTemplate&quot;:true,&quot;type&quot;:&quot;text&quot;}"/>
-          <p:cNvSpPr txBox="1"/>
-          <p:nvPr/>
-        </p:nvSpPr>
-        <p:spPr>
-          <a:xfrm rot="0" flipH="0" flipV="0">
-            <a:off x="895350" y="2667000"/>
-            <a:ext cx="10401300" cy="419100"/>
-          </a:xfrm>
-          <a:prstGeom prst="rect"/>
-        </p:spPr>
-        <p:txBody>
-          <a:bodyPr wrap="none" lIns="0" tIns="0" rIns="0" bIns="0"/>
-          <a:p>
-            <a:pPr>
-              <a:lnSpc>
-                <a:spcPct val="145000"/>
-              </a:lnSpc>
-            </a:pPr>
-            <a:r>
-              <a:rPr lang="zh-CN" sz="1875">
-                <a:solidFill>
-                  <a:srgbClr val="4A5568"/>
-                </a:solidFill>
-                <a:latin typeface="Microsoft YaHei"/>
-                <a:ea typeface="Microsoft YaHei"/>
-              </a:rPr>
-              <a:t>当证据缺失、冲突或可信度不同，如何避免把</a:t>
-            </a:r>
-            <a:r>
-              <a:rPr lang="en-US" sz="1875">
-                <a:solidFill>
-                  <a:srgbClr val="4A5568"/>
-                </a:solidFill>
-                <a:latin typeface="Microsoft YaHei"/>
-                <a:ea typeface="Microsoft YaHei"/>
-              </a:rPr>
-              <a:t> Raw Signal </a:t>
-            </a:r>
-            <a:r>
-              <a:rPr lang="zh-CN" sz="1875">
-                <a:solidFill>
-                  <a:srgbClr val="4A5568"/>
-                </a:solidFill>
-                <a:latin typeface="Microsoft YaHei"/>
-                <a:ea typeface="Microsoft YaHei"/>
-              </a:rPr>
-              <a:t>直接当成可信结论？</a:t>
-            </a:r>
-            <a:endParaRPr/>
-          </a:p>
-        </p:txBody>
-      </p:sp>
-      <p:sp>
-        <p:nvSpPr>
-          <p:cNvPr id="7" name=""/>
-          <p:cNvSpPr/>
-          <p:nvPr/>
-        </p:nvSpPr>
-        <p:spPr>
-          <a:xfrm rot="0" flipH="0" flipV="0">
-            <a:off x="895350" y="3314700"/>
-            <a:ext cx="8572500" cy="1295400"/>
-          </a:xfrm>
-          <a:prstGeom prst="rect">
-            <a:avLst/>
-          </a:prstGeom>
-          <a:solidFill>
-            <a:srgbClr val="E8EFF8"/>
-          </a:solidFill>
-          <a:ln w="25400">
-            <a:solidFill>
-              <a:srgbClr val="1E4FA8"/>
-            </a:solidFill>
-            <a:prstDash val="solid"/>
-          </a:ln>
-        </p:spPr>
-        <p:txBody>
-          <a:bodyPr/>
-          <a:p/>
-        </p:txBody>
-      </p:sp>
-      <p:sp>
-        <p:nvSpPr>
-          <p:cNvPr id="8" name="" descr="{&quot;isTemplate&quot;:true,&quot;type&quot;:&quot;text&quot;}"/>
-          <p:cNvSpPr txBox="1"/>
-          <p:nvPr/>
-        </p:nvSpPr>
-        <p:spPr>
-          <a:xfrm rot="0" flipH="0" flipV="0">
-            <a:off x="1162050" y="3581400"/>
-            <a:ext cx="8039100" cy="390525"/>
-          </a:xfrm>
-          <a:prstGeom prst="rect"/>
-        </p:spPr>
-        <p:txBody>
-          <a:bodyPr wrap="none" lIns="0" tIns="0" rIns="0" bIns="0"/>
-          <a:p>
-            <a:pPr>
-              <a:lnSpc>
-                <a:spcPct val="100000"/>
-              </a:lnSpc>
-            </a:pPr>
-            <a:r>
-              <a:rPr lang="en-US" sz="2550" b="1">
-                <a:solidFill>
-                  <a:srgbClr val="1E4FA8"/>
-                </a:solidFill>
-                <a:latin typeface="Microsoft YaHei"/>
-                <a:ea typeface="Microsoft YaHei"/>
-              </a:rPr>
-              <a:t>Score Stability ≠ Evidence Support Stability</a:t>
-            </a:r>
-            <a:endParaRPr/>
-          </a:p>
-        </p:txBody>
-      </p:sp>
-      <p:sp>
-        <p:nvSpPr>
-          <p:cNvPr id="9" name="" descr="{&quot;isTemplate&quot;:true,&quot;type&quot;:&quot;text&quot;}"/>
-          <p:cNvSpPr txBox="1"/>
-          <p:nvPr/>
-        </p:nvSpPr>
-        <p:spPr>
-          <a:xfrm rot="0" flipH="0" flipV="0">
-            <a:off x="1162050" y="4086225"/>
-            <a:ext cx="8039100" cy="257175"/>
-          </a:xfrm>
-          <a:prstGeom prst="rect"/>
-        </p:spPr>
-        <p:txBody>
-          <a:bodyPr wrap="none" lIns="0" tIns="0" rIns="0" bIns="0"/>
-          <a:p>
-            <a:pPr>
-              <a:lnSpc>
-                <a:spcPct val="100000"/>
-              </a:lnSpc>
-            </a:pPr>
-            <a:r>
-              <a:rPr lang="zh-CN" sz="1650">
-                <a:solidFill>
-                  <a:srgbClr val="1A2230"/>
-                </a:solidFill>
-                <a:latin typeface="Microsoft YaHei"/>
-                <a:ea typeface="Microsoft YaHei"/>
-              </a:rPr>
-              <a:t>分数稳定，不等于证据支撑稳定</a:t>
-            </a:r>
-            <a:endParaRPr/>
-          </a:p>
-        </p:txBody>
-      </p:sp>
-      <p:sp>
-        <p:nvSpPr>
-          <p:cNvPr id="10" name="" descr="{&quot;isTemplate&quot;:true,&quot;type&quot;:&quot;text&quot;}"/>
-          <p:cNvSpPr txBox="1"/>
-          <p:nvPr/>
-        </p:nvSpPr>
-        <p:spPr>
-          <a:xfrm rot="0" flipH="0" flipV="0">
-            <a:off x="895350" y="4838700"/>
-            <a:ext cx="10401300" cy="209550"/>
-          </a:xfrm>
-          <a:prstGeom prst="rect"/>
-        </p:spPr>
-        <p:txBody>
-          <a:bodyPr wrap="none" lIns="0" tIns="0" rIns="0" bIns="0"/>
-          <a:p>
-            <a:pPr>
-              <a:lnSpc>
-                <a:spcPct val="100000"/>
-              </a:lnSpc>
-            </a:pPr>
-            <a:r>
-              <a:rPr lang="en-US" sz="1350">
-                <a:solidFill>
-                  <a:srgbClr val="8B97A8"/>
-                </a:solidFill>
-                <a:latin typeface="Microsoft YaHei"/>
-                <a:ea typeface="Microsoft YaHei"/>
-              </a:rPr>
-              <a:t>AI_PROVISIONAL · DEVELOPMENT_ONLY · NOT_HUMAN_VALIDATED</a:t>
-            </a:r>
-            <a:endParaRPr/>
-          </a:p>
-        </p:txBody>
-      </p:sp>
-      <p:sp>
-        <p:nvSpPr>
-          <p:cNvPr id="11" name="" descr="{&quot;isTemplate&quot;:true,&quot;type&quot;:&quot;text&quot;}"/>
-          <p:cNvSpPr txBox="1"/>
-          <p:nvPr/>
-        </p:nvSpPr>
-        <p:spPr>
-          <a:xfrm rot="0" flipH="0" flipV="0">
-            <a:off x="381000" y="5943600"/>
-            <a:ext cx="1743075" cy="161925"/>
-          </a:xfrm>
-          <a:prstGeom prst="rect"/>
-        </p:spPr>
-        <p:txBody>
-          <a:bodyPr wrap="none" lIns="0" tIns="0" rIns="0" bIns="0"/>
-          <a:p>
-            <a:pPr>
-              <a:lnSpc>
-                <a:spcPct val="100000"/>
-              </a:lnSpc>
-            </a:pPr>
-            <a:r>
-              <a:rPr lang="en-US" sz="1050">
-                <a:solidFill>
-                  <a:srgbClr val="8B97A8"/>
-                </a:solidFill>
-                <a:latin typeface="Microsoft YaHei"/>
-                <a:ea typeface="Microsoft YaHei"/>
-              </a:rPr>
-              <a:t>PPT_FINAL_CONVERGENCE</a:t>
-            </a:r>
-            <a:endParaRPr/>
-          </a:p>
-        </p:txBody>
-      </p:sp>
-      <p:sp>
-        <p:nvSpPr>
-          <p:cNvPr id="12" name="" descr="{&quot;isTemplate&quot;:true,&quot;type&quot;:&quot;text&quot;}"/>
-          <p:cNvSpPr txBox="1"/>
-          <p:nvPr/>
-        </p:nvSpPr>
-        <p:spPr>
-          <a:xfrm rot="0" flipH="0" flipV="0">
-            <a:off x="11353800" y="5943600"/>
-            <a:ext cx="457200" cy="161925"/>
-          </a:xfrm>
-          <a:prstGeom prst="rect"/>
-        </p:spPr>
-        <p:txBody>
-          <a:bodyPr wrap="none" lIns="0" tIns="0" rIns="0" bIns="0"/>
-          <a:p>
-            <a:pPr>
-              <a:lnSpc>
-                <a:spcPct val="100000"/>
-              </a:lnSpc>
-            </a:pPr>
-            <a:r>
-              <a:rPr lang="en-US" sz="1050">
-                <a:solidFill>
-                  <a:srgbClr val="0E3F8C"/>
-                </a:solidFill>
-                <a:latin typeface="Microsoft YaHei"/>
-                <a:ea typeface="Microsoft YaHei"/>
-              </a:rPr>
-              <a:t>01 / 10</a:t>
-            </a:r>
-            <a:endParaRPr/>
-          </a:p>
-        </p:txBody>
-      </p:sp>
-    </p:spTree>
-  </p:cSld>
-</p:sld>
-</file>
-
-<file path=ppt/slides/slide10.xml><?xml version="1.0" encoding="utf-8"?>
-<p:sld xmlns:p="http://schemas.openxmlformats.org/presentationml/2006/main" xmlns:r="http://schemas.openxmlformats.org/officeDocument/2006/relationships" xmlns:a="http://schemas.openxmlformats.org/drawingml/2006/main" xmlns:asvg="http://schemas.microsoft.com/office/drawing/2016/SVG/main" xmlns:mc="http://schemas.openxmlformats.org/markup-compatibility/2006" mc:Ignorable="asvg">
-  <p:cSld>
-    <p:spTree>
-      <p:nvGrpSpPr>
-        <p:cNvPr id="13" name="" descr="&lt;Slide style={{ width: 1280, height: 720, background: '#FFFFFF', padding: 40 }}&gt;&#10;  &lt;Box style={{ height: 88, borderBottom: '3px solid #1E4FA8', justifyContent: 'center' }}&gt;&lt;Text style={{ fontSize: 36, color: '#0E3F8C', fontWeight: 'bold' }}&gt;公共缩放退化：分数不动，但支持下降&lt;/Text&gt;&lt;Text style={{ fontSize: 18, color: '#4A5568', marginTop: 6 }}&gt;稳定的归一化 score 不能替代稳定的 evidence support&lt;/Text&gt;&lt;/Box&gt;&#10;  &lt;Box style={{ height: 500, flexDirection: 'row', gap: 28, paddingTop: 18 }}&gt;&#10;    &lt;Box style={{ width: 770, height: 470, border: '1px solid #D6DCE5', padding: 12, background: '#F7F9FC' }}&gt;&lt;Image src=&quot;assets/F4_parameter_perturbation.svg&quot; style={{ width: 744, height: 444, objectFit: 'contain' }} /&gt;&lt;/Box&gt;&#10;    &lt;Box style={{ width: 402, height: 470, padding: 24, gap: 18, background: '#F0F5FC' }}&gt;&lt;Text style={{ fontSize: 25, color: '#0E3F8C', fontWeight: 'bold' }}&gt;锁定机制&lt;/Text&gt;&lt;Text style={{ fontSize: 21, color: '#1A2230', lineHeight: 1.4 }}&gt;16 条可判读记录共享：&lt;/Text&gt;&lt;Text style={{ fontSize: 21, color: '#1A2230', lineHeight: 1.4 }}&gt;prompt=true&lt;br /&gt;context=false&lt;br /&gt;confidence=medium&lt;br /&gt;R = 0.375&lt;/Text&gt;&lt;Box style={{ borderTop: '2px solid #1E4FA8', paddingTop: 14 }}&gt;&lt;Text style={{ fontSize: 21, color: '#1E4FA8', fontWeight: 'bold' }}&gt;weight：16 → 12 → 6 → 6&lt;/Text&gt;&lt;Text style={{ fontSize: 21, color: '#1E4FA8', fontWeight: 'bold', marginTop: 8 }}&gt;coverage：0.228571 → 0.085714&lt;/Text&gt;&lt;/Box&gt;&lt;/Box&gt;&#10;  &lt;/Box&gt;&#10;  &lt;Box style={{ height: 50, flexDirection: 'row', justifyContent: 'space-between', alignItems: 'center' }}&gt;&lt;Text style={{ fontSize: 17, color: '#4A5568' }}&gt;ABL / HOT / Gap = 3.5625 / 0.375 / 1.125（Raw=Adjusted，不是提升）&lt;/Text&gt;&lt;Text style={{ fontSize: 14, color: '#0E3F8C' }}&gt;05 / 10&lt;/Text&gt;&lt;/Box&gt;&#10;&lt;/Slide&gt;"/>
-        <p:cNvGrpSpPr/>
-        <p:nvPr/>
-      </p:nvGrpSpPr>
-      <p:grpSpPr>
-        <a:xfrm>
-          <a:off x="0" y="0"/>
-          <a:ext cx="0" cy="0"/>
-          <a:chOff x="0" y="0"/>
-          <a:chExt cx="0" cy="0"/>
-        </a:xfrm>
-      </p:grpSpPr>
-      <p:sp>
-        <p:nvSpPr>
-          <p:cNvPr id="14" name=""/>
-          <p:cNvSpPr/>
-          <p:nvPr/>
-        </p:nvSpPr>
-        <p:spPr>
-          <a:xfrm rot="0" flipH="0" flipV="0">
-            <a:off x="0" y="0"/>
-            <a:ext cx="12192000" cy="6858000"/>
-          </a:xfrm>
-          <a:prstGeom prst="rect">
-            <a:avLst/>
-          </a:prstGeom>
-          <a:solidFill>
             <a:srgbClr val="FFFFFF"/>
           </a:solidFill>
           <a:ln/>
         </p:spPr>
         <p:txBody>
           <a:bodyPr/>
-          <a:p/>
-        </p:txBody>
-      </p:sp>
-      <p:sp>
-        <p:nvSpPr>
-          <p:cNvPr id="15" name=""/>
+          <a:p>
+            <a:pPr/>
+            <a:endParaRPr/>
+          </a:p>
+        </p:txBody>
+      </p:sp>
+      <p:sp>
+        <p:nvSpPr>
+          <p:cNvPr id="3" name=""/>
           <p:cNvSpPr/>
           <p:nvPr/>
         </p:nvSpPr>
@@ -1054,12 +629,15 @@
         </p:spPr>
         <p:txBody>
           <a:bodyPr/>
-          <a:p/>
-        </p:txBody>
-      </p:sp>
-      <p:sp>
-        <p:nvSpPr>
-          <p:cNvPr id="16" name="" descr="{&quot;isTemplate&quot;:true,&quot;type&quot;:&quot;text&quot;}"/>
+          <a:p>
+            <a:pPr/>
+            <a:endParaRPr/>
+          </a:p>
+        </p:txBody>
+      </p:sp>
+      <p:sp>
+        <p:nvSpPr>
+          <p:cNvPr id="4" name="" descr="{&quot;isTemplate&quot;:true,&quot;type&quot;:&quot;text&quot;}"/>
           <p:cNvSpPr txBox="1"/>
           <p:nvPr/>
         </p:nvSpPr>
@@ -1094,7 +672,7 @@
       </p:sp>
       <p:sp>
         <p:nvSpPr>
-          <p:cNvPr id="17" name="" descr="{&quot;isTemplate&quot;:true,&quot;type&quot;:&quot;text&quot;}"/>
+          <p:cNvPr id="5" name="" descr="{&quot;isTemplate&quot;:true,&quot;type&quot;:&quot;text&quot;}"/>
           <p:cNvSpPr txBox="1"/>
           <p:nvPr/>
         </p:nvSpPr>
@@ -1159,7 +737,7 @@
       </p:sp>
       <p:sp>
         <p:nvSpPr>
-          <p:cNvPr id="18" name=""/>
+          <p:cNvPr id="6" name=""/>
           <p:cNvSpPr/>
           <p:nvPr/>
         </p:nvSpPr>
@@ -1183,12 +761,15 @@
         </p:spPr>
         <p:txBody>
           <a:bodyPr/>
-          <a:p/>
+          <a:p>
+            <a:pPr/>
+            <a:endParaRPr/>
+          </a:p>
         </p:txBody>
       </p:sp>
       <p:pic>
         <p:nvPicPr>
-          <p:cNvPr id="19" name=""/>
+          <p:cNvPr id="7" name=""/>
           <p:cNvPicPr>
             <a:picLocks noChangeAspect="1"/>
           </p:cNvPicPr>
@@ -1220,7 +801,7 @@
       </p:pic>
       <p:sp>
         <p:nvSpPr>
-          <p:cNvPr id="20" name=""/>
+          <p:cNvPr id="8" name=""/>
           <p:cNvSpPr/>
           <p:nvPr/>
         </p:nvSpPr>
@@ -1239,12 +820,15 @@
         </p:spPr>
         <p:txBody>
           <a:bodyPr/>
-          <a:p/>
-        </p:txBody>
-      </p:sp>
-      <p:sp>
-        <p:nvSpPr>
-          <p:cNvPr id="21" name="" descr="{&quot;isTemplate&quot;:true,&quot;type&quot;:&quot;text&quot;}"/>
+          <a:p>
+            <a:pPr/>
+            <a:endParaRPr/>
+          </a:p>
+        </p:txBody>
+      </p:sp>
+      <p:sp>
+        <p:nvSpPr>
+          <p:cNvPr id="9" name="" descr="{&quot;isTemplate&quot;:true,&quot;type&quot;:&quot;text&quot;}"/>
           <p:cNvSpPr txBox="1"/>
           <p:nvPr/>
         </p:nvSpPr>
@@ -1279,7 +863,7 @@
       </p:sp>
       <p:sp>
         <p:nvSpPr>
-          <p:cNvPr id="22" name="" descr="{&quot;isTemplate&quot;:true,&quot;type&quot;:&quot;text&quot;}"/>
+          <p:cNvPr id="10" name="" descr="{&quot;isTemplate&quot;:true,&quot;type&quot;:&quot;text&quot;}"/>
           <p:cNvSpPr txBox="1"/>
           <p:nvPr/>
         </p:nvSpPr>
@@ -1324,7 +908,7 @@
       </p:sp>
       <p:sp>
         <p:nvSpPr>
-          <p:cNvPr id="23" name="" descr="{&quot;isTemplate&quot;:true,&quot;type&quot;:&quot;text&quot;}"/>
+          <p:cNvPr id="11" name="" descr="{&quot;isTemplate&quot;:true,&quot;type&quot;:&quot;text&quot;}"/>
           <p:cNvSpPr txBox="1"/>
           <p:nvPr/>
         </p:nvSpPr>
@@ -1413,7 +997,7 @@
       </p:sp>
       <p:sp>
         <p:nvSpPr>
-          <p:cNvPr id="24" name=""/>
+          <p:cNvPr id="12" name=""/>
           <p:cNvSpPr/>
           <p:nvPr/>
         </p:nvSpPr>
@@ -1448,12 +1032,15 @@
         </p:spPr>
         <p:txBody>
           <a:bodyPr/>
-          <a:p/>
-        </p:txBody>
-      </p:sp>
-      <p:sp>
-        <p:nvSpPr>
-          <p:cNvPr id="25" name="" descr="{&quot;isTemplate&quot;:true,&quot;type&quot;:&quot;text&quot;}"/>
+          <a:p>
+            <a:pPr/>
+            <a:endParaRPr/>
+          </a:p>
+        </p:txBody>
+      </p:sp>
+      <p:sp>
+        <p:nvSpPr>
+          <p:cNvPr id="13" name="" descr="{&quot;isTemplate&quot;:true,&quot;type&quot;:&quot;text&quot;}"/>
           <p:cNvSpPr txBox="1"/>
           <p:nvPr/>
         </p:nvSpPr>
@@ -1508,7 +1095,7 @@
       </p:sp>
       <p:sp>
         <p:nvSpPr>
-          <p:cNvPr id="26" name="" descr="{&quot;isTemplate&quot;:true,&quot;type&quot;:&quot;text&quot;}"/>
+          <p:cNvPr id="14" name="" descr="{&quot;isTemplate&quot;:true,&quot;type&quot;:&quot;text&quot;}"/>
           <p:cNvSpPr txBox="1"/>
           <p:nvPr/>
         </p:nvSpPr>
@@ -1563,7 +1150,7 @@
       </p:sp>
       <p:sp>
         <p:nvSpPr>
-          <p:cNvPr id="27" name="" descr="{&quot;isTemplate&quot;:true,&quot;type&quot;:&quot;text&quot;}"/>
+          <p:cNvPr id="15" name="" descr="{&quot;isTemplate&quot;:true,&quot;type&quot;:&quot;text&quot;}"/>
           <p:cNvSpPr txBox="1"/>
           <p:nvPr/>
         </p:nvSpPr>
@@ -1628,7 +1215,7 @@
       </p:sp>
       <p:sp>
         <p:nvSpPr>
-          <p:cNvPr id="28" name="" descr="{&quot;isTemplate&quot;:true,&quot;type&quot;:&quot;text&quot;}"/>
+          <p:cNvPr id="16" name="" descr="{&quot;isTemplate&quot;:true,&quot;type&quot;:&quot;text&quot;}"/>
           <p:cNvSpPr txBox="1"/>
           <p:nvPr/>
         </p:nvSpPr>
@@ -1666,12 +1253,12 @@
 </p:sld>
 </file>
 
-<file path=ppt/slides/slide11.xml><?xml version="1.0" encoding="utf-8"?>
-<p:sld xmlns:p="http://schemas.openxmlformats.org/presentationml/2006/main" xmlns:r="http://schemas.openxmlformats.org/officeDocument/2006/relationships" xmlns:a="http://schemas.openxmlformats.org/drawingml/2006/main" xmlns:asvg="http://schemas.microsoft.com/office/drawing/2016/SVG/main" xmlns:mc="http://schemas.openxmlformats.org/markup-compatibility/2006" mc:Ignorable="asvg">
+<file path=ppt/slides/slide10.xml><?xml version="1.0" encoding="utf-8"?>
+<p:sld xmlns:p="http://schemas.openxmlformats.org/presentationml/2006/main" xmlns:a="http://schemas.openxmlformats.org/drawingml/2006/main">
   <p:cSld>
     <p:spTree>
       <p:nvGrpSpPr>
-        <p:cNvPr id="29" name="" descr="&lt;Slide style={{ width: 1280, height: 720, background: '#FFFFFF', padding: 40 }}&gt;&#10;  &lt;Box style={{ height: 88, borderBottom: '3px solid #1E4FA8', justifyContent: 'center' }}&gt;&lt;Text style={{ fontSize: 36, color: '#0E3F8C', fontWeight: 'bold' }}&gt;为什么 Raw Signal 不够&lt;/Text&gt;&lt;Text style={{ fontSize: 18, color: '#4A5568', marginTop: 6 }}&gt;表现水平与证据支持必须分开报告&lt;/Text&gt;&lt;/Box&gt;&#10;  &lt;Box style={{ height: 510, flexDirection: 'row', gap: 28, paddingTop: 18 }}&gt;&#10;    &lt;Box style={{ width: 700, height: 480, border: '1px solid #D6DCE5', padding: 12, background: '#F7F9FC' }}&gt;&lt;Image src=&quot;assets/F2_raw_vs_adjusted.svg&quot; style={{ width: 676, height: 456, objectFit: 'contain' }} /&gt;&lt;/Box&gt;&#10;    &lt;Box style={{ width: 460, height: 480, padding: 22, gap: 20, background: '#F0F5FC' }}&gt;&#10;      &lt;Text style={{ fontSize: 27, color: '#0E3F8C', fontWeight: 'bold' }}&gt;两个独立问题&lt;/Text&gt;&#10;      &lt;Text style={{ fontSize: 23, color: '#1A2230', lineHeight: 1.45 }}&gt;Raw Signal：观察到的表现水平&lt;/Text&gt;&#10;      &lt;Text style={{ fontSize: 23, color: '#1A2230', lineHeight: 1.45 }}&gt;Evidence Reliability：这些观察能否支撑结论&lt;/Text&gt;&#10;      &lt;Box style={{ borderLeft: '5px solid #D9534F', paddingLeft: 16 }}&gt;&lt;Text style={{ fontSize: 22, color: '#D9534F', lineHeight: 1.45 }}&gt;归一化分数不变，不代表支持范围不变&lt;/Text&gt;&lt;/Box&gt;&#10;    &lt;/Box&gt;&#10;  &lt;/Box&gt;&#10;  &lt;Box style={{ height: 40, flexDirection: 'row', justifyContent: 'space-between', alignItems: 'center' }}&gt;&lt;Text style={{ fontSize: 14, color: '#8B97A8' }}&gt;冻结图 F2 · Raw vs Adjusted&lt;/Text&gt;&lt;Text style={{ fontSize: 14, color: '#0E3F8C' }}&gt;02 / 10&lt;/Text&gt;&lt;/Box&gt;&#10;&lt;/Slide&gt;"/>
+        <p:cNvPr id="17" name=""/>
         <p:cNvGrpSpPr/>
         <p:nvPr/>
       </p:nvGrpSpPr>
@@ -1685,7 +1272,869 @@
       </p:grpSpPr>
       <p:sp>
         <p:nvSpPr>
+          <p:cNvPr id="18" name=""/>
+          <p:cNvSpPr/>
+          <p:nvPr/>
+        </p:nvSpPr>
+        <p:spPr>
+          <a:xfrm rot="0" flipH="0" flipV="0">
+            <a:off x="0" y="0"/>
+            <a:ext cx="12192000" cy="6858000"/>
+          </a:xfrm>
+          <a:prstGeom prst="rect">
+            <a:avLst/>
+          </a:prstGeom>
+          <a:solidFill>
+            <a:srgbClr val="F7F9FC"/>
+          </a:solidFill>
+          <a:ln/>
+        </p:spPr>
+        <p:txBody>
+          <a:bodyPr/>
+          <a:p>
+            <a:pPr/>
+            <a:endParaRPr/>
+          </a:p>
+        </p:txBody>
+      </p:sp>
+      <p:sp>
+        <p:nvSpPr>
+          <p:cNvPr id="19" name=""/>
+          <p:cNvSpPr/>
+          <p:nvPr/>
+        </p:nvSpPr>
+        <p:spPr>
+          <a:xfrm rot="0" flipH="0" flipV="0">
+            <a:off x="381000" y="381000"/>
+            <a:ext cx="11430000" cy="952500"/>
+          </a:xfrm>
+          <a:prstGeom prst="rect">
+            <a:avLst/>
+          </a:prstGeom>
+          <a:solidFill>
+            <a:srgbClr val="0E3F8C"/>
+          </a:solidFill>
+          <a:ln/>
+        </p:spPr>
+        <p:txBody>
+          <a:bodyPr/>
+          <a:p>
+            <a:pPr/>
+            <a:endParaRPr/>
+          </a:p>
+        </p:txBody>
+      </p:sp>
+      <p:sp>
+        <p:nvSpPr>
+          <p:cNvPr id="20" name="" descr="{&quot;isTemplate&quot;:true,&quot;type&quot;:&quot;text&quot;}"/>
+          <p:cNvSpPr txBox="1"/>
+          <p:nvPr/>
+        </p:nvSpPr>
+        <p:spPr>
+          <a:xfrm rot="0" flipH="0" flipV="0">
+            <a:off x="590550" y="638175"/>
+            <a:ext cx="11010900" cy="438150"/>
+          </a:xfrm>
+          <a:prstGeom prst="rect"/>
+        </p:spPr>
+        <p:txBody>
+          <a:bodyPr wrap="none" lIns="0" tIns="0" rIns="0" bIns="0"/>
+          <a:p>
+            <a:pPr>
+              <a:lnSpc>
+                <a:spcPct val="100000"/>
+              </a:lnSpc>
+            </a:pPr>
+            <a:r>
+              <a:rPr lang="zh-CN" sz="2850" b="1">
+                <a:solidFill>
+                  <a:srgbClr val="FFFFFF"/>
+                </a:solidFill>
+                <a:latin typeface="Microsoft YaHei"/>
+                <a:ea typeface="Microsoft YaHei"/>
+              </a:rPr>
+              <a:t>结论与现场</a:t>
+            </a:r>
+            <a:r>
+              <a:rPr lang="en-US" sz="2850" b="1">
+                <a:solidFill>
+                  <a:srgbClr val="FFFFFF"/>
+                </a:solidFill>
+                <a:latin typeface="Microsoft YaHei"/>
+                <a:ea typeface="Microsoft YaHei"/>
+              </a:rPr>
+              <a:t> Demo</a:t>
+            </a:r>
+            <a:endParaRPr/>
+          </a:p>
+        </p:txBody>
+      </p:sp>
+      <p:sp>
+        <p:nvSpPr>
+          <p:cNvPr id="21" name=""/>
+          <p:cNvSpPr/>
+          <p:nvPr/>
+        </p:nvSpPr>
+        <p:spPr>
+          <a:xfrm rot="0" flipH="0" flipV="0">
+            <a:off x="381000" y="1333500"/>
+            <a:ext cx="11430000" cy="2095500"/>
+          </a:xfrm>
+          <a:prstGeom prst="rect">
+            <a:avLst/>
+          </a:prstGeom>
+          <a:solidFill>
+            <a:srgbClr val="E8EFF8"/>
+          </a:solidFill>
+          <a:ln/>
+        </p:spPr>
+        <p:txBody>
+          <a:bodyPr/>
+          <a:p>
+            <a:pPr/>
+            <a:endParaRPr/>
+          </a:p>
+        </p:txBody>
+      </p:sp>
+      <p:sp>
+        <p:nvSpPr>
+          <p:cNvPr id="22" name="" descr="{&quot;isTemplate&quot;:true,&quot;type&quot;:&quot;text&quot;}"/>
+          <p:cNvSpPr txBox="1"/>
+          <p:nvPr/>
+        </p:nvSpPr>
+        <p:spPr>
+          <a:xfrm rot="0" flipH="0" flipV="0">
+            <a:off x="685800" y="1990725"/>
+            <a:ext cx="10820400" cy="390525"/>
+          </a:xfrm>
+          <a:prstGeom prst="rect"/>
+        </p:spPr>
+        <p:txBody>
+          <a:bodyPr wrap="none" lIns="0" tIns="0" rIns="0" bIns="0"/>
+          <a:p>
+            <a:pPr>
+              <a:lnSpc>
+                <a:spcPct val="100000"/>
+              </a:lnSpc>
+            </a:pPr>
+            <a:r>
+              <a:rPr lang="en-US" sz="2550" b="1">
+                <a:solidFill>
+                  <a:srgbClr val="1E4FA8"/>
+                </a:solidFill>
+                <a:latin typeface="Microsoft YaHei"/>
+                <a:ea typeface="Microsoft YaHei"/>
+              </a:rPr>
+              <a:t>Score Stability ≠ Evidence Support Stability</a:t>
+            </a:r>
+            <a:endParaRPr/>
+          </a:p>
+        </p:txBody>
+      </p:sp>
+      <p:sp>
+        <p:nvSpPr>
+          <p:cNvPr id="23" name="" descr="{&quot;isTemplate&quot;:true,&quot;type&quot;:&quot;text&quot;}"/>
+          <p:cNvSpPr txBox="1"/>
+          <p:nvPr/>
+        </p:nvSpPr>
+        <p:spPr>
+          <a:xfrm rot="0" flipH="0" flipV="0">
+            <a:off x="685800" y="2514600"/>
+            <a:ext cx="10820400" cy="266700"/>
+          </a:xfrm>
+          <a:prstGeom prst="rect"/>
+        </p:spPr>
+        <p:txBody>
+          <a:bodyPr wrap="none" lIns="0" tIns="0" rIns="0" bIns="0"/>
+          <a:p>
+            <a:pPr>
+              <a:lnSpc>
+                <a:spcPct val="100000"/>
+              </a:lnSpc>
+            </a:pPr>
+            <a:r>
+              <a:rPr lang="zh-CN" sz="1725">
+                <a:solidFill>
+                  <a:srgbClr val="1A2230"/>
+                </a:solidFill>
+                <a:latin typeface="Microsoft YaHei"/>
+                <a:ea typeface="Microsoft YaHei"/>
+              </a:rPr>
+              <a:t>稳定的</a:t>
+            </a:r>
+            <a:r>
+              <a:rPr lang="en-US" sz="1725">
+                <a:solidFill>
+                  <a:srgbClr val="1A2230"/>
+                </a:solidFill>
+                <a:latin typeface="Microsoft YaHei"/>
+                <a:ea typeface="Microsoft YaHei"/>
+              </a:rPr>
+              <a:t> score </a:t>
+            </a:r>
+            <a:r>
+              <a:rPr lang="zh-CN" sz="1725">
+                <a:solidFill>
+                  <a:srgbClr val="1A2230"/>
+                </a:solidFill>
+                <a:latin typeface="Microsoft YaHei"/>
+                <a:ea typeface="Microsoft YaHei"/>
+              </a:rPr>
+              <a:t>不能替代稳定的</a:t>
+            </a:r>
+            <a:r>
+              <a:rPr lang="en-US" sz="1725">
+                <a:solidFill>
+                  <a:srgbClr val="1A2230"/>
+                </a:solidFill>
+                <a:latin typeface="Microsoft YaHei"/>
+                <a:ea typeface="Microsoft YaHei"/>
+              </a:rPr>
+              <a:t> evidence support</a:t>
+            </a:r>
+            <a:r>
+              <a:rPr lang="zh-CN" sz="1725">
+                <a:solidFill>
+                  <a:srgbClr val="1A2230"/>
+                </a:solidFill>
+                <a:latin typeface="Microsoft YaHei"/>
+                <a:ea typeface="Microsoft YaHei"/>
+              </a:rPr>
+              <a:t>。</a:t>
+            </a:r>
+            <a:endParaRPr/>
+          </a:p>
+        </p:txBody>
+      </p:sp>
+      <p:sp>
+        <p:nvSpPr>
+          <p:cNvPr id="24" name=""/>
+          <p:cNvSpPr/>
+          <p:nvPr/>
+        </p:nvSpPr>
+        <p:spPr>
+          <a:xfrm rot="0" flipH="0" flipV="0">
+            <a:off x="381000" y="3676650"/>
+            <a:ext cx="2571750" cy="1714500"/>
+          </a:xfrm>
+          <a:prstGeom prst="rect">
+            <a:avLst/>
+          </a:prstGeom>
+          <a:solidFill>
+            <a:srgbClr val="FFFFFF"/>
+          </a:solidFill>
+          <a:ln w="12700">
+            <a:solidFill>
+              <a:srgbClr val="D6DCE5"/>
+            </a:solidFill>
+            <a:prstDash val="solid"/>
+          </a:ln>
+        </p:spPr>
+        <p:txBody>
+          <a:bodyPr/>
+          <a:p>
+            <a:pPr/>
+            <a:endParaRPr/>
+          </a:p>
+        </p:txBody>
+      </p:sp>
+      <p:sp>
+        <p:nvSpPr>
+          <p:cNvPr id="25" name="" descr="{&quot;isTemplate&quot;:true,&quot;type&quot;:&quot;text&quot;}"/>
+          <p:cNvSpPr txBox="1"/>
+          <p:nvPr/>
+        </p:nvSpPr>
+        <p:spPr>
+          <a:xfrm rot="0" flipH="0" flipV="0">
+            <a:off x="571500" y="3867150"/>
+            <a:ext cx="2190750" cy="247650"/>
+          </a:xfrm>
+          <a:prstGeom prst="rect"/>
+        </p:spPr>
+        <p:txBody>
+          <a:bodyPr wrap="none" lIns="0" tIns="0" rIns="0" bIns="0"/>
+          <a:p>
+            <a:pPr>
+              <a:lnSpc>
+                <a:spcPct val="100000"/>
+              </a:lnSpc>
+            </a:pPr>
+            <a:r>
+              <a:rPr lang="en-US" sz="1575" b="1">
+                <a:solidFill>
+                  <a:srgbClr val="1E4FA8"/>
+                </a:solidFill>
+                <a:latin typeface="Microsoft YaHei"/>
+                <a:ea typeface="Microsoft YaHei"/>
+              </a:rPr>
+              <a:t>01 </a:t>
+            </a:r>
+            <a:r>
+              <a:rPr lang="zh-CN" sz="1575" b="1">
+                <a:solidFill>
+                  <a:srgbClr val="1E4FA8"/>
+                </a:solidFill>
+                <a:latin typeface="Microsoft YaHei"/>
+                <a:ea typeface="Microsoft YaHei"/>
+              </a:rPr>
+              <a:t>研究问题</a:t>
+            </a:r>
+            <a:endParaRPr/>
+          </a:p>
+        </p:txBody>
+      </p:sp>
+      <p:sp>
+        <p:nvSpPr>
+          <p:cNvPr id="26" name="" descr="{&quot;isTemplate&quot;:true,&quot;type&quot;:&quot;text&quot;}"/>
+          <p:cNvSpPr txBox="1"/>
+          <p:nvPr/>
+        </p:nvSpPr>
+        <p:spPr>
+          <a:xfrm rot="0" flipH="0" flipV="0">
+            <a:off x="571500" y="4248150"/>
+            <a:ext cx="2190750" cy="581025"/>
+          </a:xfrm>
+          <a:prstGeom prst="rect"/>
+        </p:spPr>
+        <p:txBody>
+          <a:bodyPr wrap="square" lIns="0" tIns="0" rIns="0" bIns="0">
+            <a:normAutofit/>
+          </a:bodyPr>
+          <a:p>
+            <a:pPr>
+              <a:lnSpc>
+                <a:spcPct val="140000"/>
+              </a:lnSpc>
+            </a:pPr>
+            <a:r>
+              <a:rPr lang="en-US" sz="1350">
+                <a:solidFill>
+                  <a:srgbClr val="4A5568"/>
+                </a:solidFill>
+                <a:latin typeface="Microsoft YaHei"/>
+                <a:ea typeface="Microsoft YaHei"/>
+              </a:rPr>
+              <a:t>Observed result </a:t>
+            </a:r>
+            <a:r>
+              <a:rPr lang="zh-CN" sz="1350">
+                <a:solidFill>
+                  <a:srgbClr val="4A5568"/>
+                </a:solidFill>
+                <a:latin typeface="Microsoft YaHei"/>
+                <a:ea typeface="Microsoft YaHei"/>
+              </a:rPr>
+              <a:t>能否可靠解释？</a:t>
+            </a:r>
+            <a:endParaRPr/>
+          </a:p>
+        </p:txBody>
+      </p:sp>
+      <p:sp>
+        <p:nvSpPr>
+          <p:cNvPr id="27" name=""/>
+          <p:cNvSpPr/>
+          <p:nvPr/>
+        </p:nvSpPr>
+        <p:spPr>
+          <a:xfrm rot="0" flipH="0" flipV="0">
+            <a:off x="3105150" y="3676650"/>
+            <a:ext cx="2571750" cy="1714500"/>
+          </a:xfrm>
+          <a:prstGeom prst="rect">
+            <a:avLst/>
+          </a:prstGeom>
+          <a:solidFill>
+            <a:srgbClr val="FFFFFF"/>
+          </a:solidFill>
+          <a:ln w="12700">
+            <a:solidFill>
+              <a:srgbClr val="D6DCE5"/>
+            </a:solidFill>
+            <a:prstDash val="solid"/>
+          </a:ln>
+        </p:spPr>
+        <p:txBody>
+          <a:bodyPr/>
+          <a:p>
+            <a:pPr/>
+            <a:endParaRPr/>
+          </a:p>
+        </p:txBody>
+      </p:sp>
+      <p:sp>
+        <p:nvSpPr>
+          <p:cNvPr id="28" name="" descr="{&quot;isTemplate&quot;:true,&quot;type&quot;:&quot;text&quot;}"/>
+          <p:cNvSpPr txBox="1"/>
+          <p:nvPr/>
+        </p:nvSpPr>
+        <p:spPr>
+          <a:xfrm rot="0" flipH="0" flipV="0">
+            <a:off x="3295650" y="3867150"/>
+            <a:ext cx="2190750" cy="247650"/>
+          </a:xfrm>
+          <a:prstGeom prst="rect"/>
+        </p:spPr>
+        <p:txBody>
+          <a:bodyPr wrap="none" lIns="0" tIns="0" rIns="0" bIns="0"/>
+          <a:p>
+            <a:pPr>
+              <a:lnSpc>
+                <a:spcPct val="100000"/>
+              </a:lnSpc>
+            </a:pPr>
+            <a:r>
+              <a:rPr lang="en-US" sz="1575" b="1">
+                <a:solidFill>
+                  <a:srgbClr val="1E4FA8"/>
+                </a:solidFill>
+                <a:latin typeface="Microsoft YaHei"/>
+                <a:ea typeface="Microsoft YaHei"/>
+              </a:rPr>
+              <a:t>02 </a:t>
+            </a:r>
+            <a:r>
+              <a:rPr lang="zh-CN" sz="1575" b="1">
+                <a:solidFill>
+                  <a:srgbClr val="1E4FA8"/>
+                </a:solidFill>
+                <a:latin typeface="Microsoft YaHei"/>
+                <a:ea typeface="Microsoft YaHei"/>
+              </a:rPr>
+              <a:t>模型链路</a:t>
+            </a:r>
+            <a:endParaRPr/>
+          </a:p>
+        </p:txBody>
+      </p:sp>
+      <p:sp>
+        <p:nvSpPr>
+          <p:cNvPr id="29" name="" descr="{&quot;isTemplate&quot;:true,&quot;type&quot;:&quot;text&quot;}"/>
+          <p:cNvSpPr txBox="1"/>
+          <p:nvPr/>
+        </p:nvSpPr>
+        <p:spPr>
+          <a:xfrm rot="0" flipH="0" flipV="0">
+            <a:off x="3295650" y="4248150"/>
+            <a:ext cx="2190750" cy="581025"/>
+          </a:xfrm>
+          <a:prstGeom prst="rect"/>
+        </p:spPr>
+        <p:txBody>
+          <a:bodyPr wrap="square" lIns="0" tIns="0" rIns="0" bIns="0">
+            <a:normAutofit/>
+          </a:bodyPr>
+          <a:p>
+            <a:pPr>
+              <a:lnSpc>
+                <a:spcPct val="140000"/>
+              </a:lnSpc>
+            </a:pPr>
+            <a:r>
+              <a:rPr lang="en-US" sz="1350">
+                <a:solidFill>
+                  <a:srgbClr val="4A5568"/>
+                </a:solidFill>
+                <a:latin typeface="Microsoft YaHei"/>
+                <a:ea typeface="Microsoft YaHei"/>
+              </a:rPr>
+              <a:t>Raw → Reliability → Support</a:t>
+            </a:r>
+            <a:endParaRPr/>
+          </a:p>
+        </p:txBody>
+      </p:sp>
+      <p:sp>
+        <p:nvSpPr>
           <p:cNvPr id="30" name=""/>
+          <p:cNvSpPr/>
+          <p:nvPr/>
+        </p:nvSpPr>
+        <p:spPr>
+          <a:xfrm rot="0" flipH="0" flipV="0">
+            <a:off x="5829300" y="3676650"/>
+            <a:ext cx="2571750" cy="1714500"/>
+          </a:xfrm>
+          <a:prstGeom prst="rect">
+            <a:avLst/>
+          </a:prstGeom>
+          <a:solidFill>
+            <a:srgbClr val="FFFFFF"/>
+          </a:solidFill>
+          <a:ln w="12700">
+            <a:solidFill>
+              <a:srgbClr val="D6DCE5"/>
+            </a:solidFill>
+            <a:prstDash val="solid"/>
+          </a:ln>
+        </p:spPr>
+        <p:txBody>
+          <a:bodyPr/>
+          <a:p>
+            <a:pPr/>
+            <a:endParaRPr/>
+          </a:p>
+        </p:txBody>
+      </p:sp>
+      <p:sp>
+        <p:nvSpPr>
+          <p:cNvPr id="31" name="" descr="{&quot;isTemplate&quot;:true,&quot;type&quot;:&quot;text&quot;}"/>
+          <p:cNvSpPr txBox="1"/>
+          <p:nvPr/>
+        </p:nvSpPr>
+        <p:spPr>
+          <a:xfrm rot="0" flipH="0" flipV="0">
+            <a:off x="6019800" y="3867150"/>
+            <a:ext cx="2190750" cy="247650"/>
+          </a:xfrm>
+          <a:prstGeom prst="rect"/>
+        </p:spPr>
+        <p:txBody>
+          <a:bodyPr wrap="none" lIns="0" tIns="0" rIns="0" bIns="0"/>
+          <a:p>
+            <a:pPr>
+              <a:lnSpc>
+                <a:spcPct val="100000"/>
+              </a:lnSpc>
+            </a:pPr>
+            <a:r>
+              <a:rPr lang="en-US" sz="1575" b="1">
+                <a:solidFill>
+                  <a:srgbClr val="1E4FA8"/>
+                </a:solidFill>
+                <a:latin typeface="Microsoft YaHei"/>
+                <a:ea typeface="Microsoft YaHei"/>
+              </a:rPr>
+              <a:t>03 </a:t>
+            </a:r>
+            <a:r>
+              <a:rPr lang="zh-CN" sz="1575" b="1">
+                <a:solidFill>
+                  <a:srgbClr val="1E4FA8"/>
+                </a:solidFill>
+                <a:latin typeface="Microsoft YaHei"/>
+                <a:ea typeface="Microsoft YaHei"/>
+              </a:rPr>
+              <a:t>主结果</a:t>
+            </a:r>
+            <a:endParaRPr/>
+          </a:p>
+        </p:txBody>
+      </p:sp>
+      <p:sp>
+        <p:nvSpPr>
+          <p:cNvPr id="32" name="" descr="{&quot;isTemplate&quot;:true,&quot;type&quot;:&quot;text&quot;}"/>
+          <p:cNvSpPr txBox="1"/>
+          <p:nvPr/>
+        </p:nvSpPr>
+        <p:spPr>
+          <a:xfrm rot="0" flipH="0" flipV="0">
+            <a:off x="6019800" y="4248150"/>
+            <a:ext cx="2190750" cy="581025"/>
+          </a:xfrm>
+          <a:prstGeom prst="rect"/>
+        </p:spPr>
+        <p:txBody>
+          <a:bodyPr wrap="square" lIns="0" tIns="0" rIns="0" bIns="0">
+            <a:normAutofit/>
+          </a:bodyPr>
+          <a:p>
+            <a:pPr>
+              <a:lnSpc>
+                <a:spcPct val="140000"/>
+              </a:lnSpc>
+            </a:pPr>
+            <a:r>
+              <a:rPr lang="en-US" sz="1350">
+                <a:solidFill>
+                  <a:srgbClr val="4A5568"/>
+                </a:solidFill>
+                <a:latin typeface="Microsoft YaHei"/>
+                <a:ea typeface="Microsoft YaHei"/>
+              </a:rPr>
+              <a:t>70 / 16 / 54</a:t>
+            </a:r>
+            <a:r>
+              <a:rPr lang="zh-CN" sz="1350">
+                <a:solidFill>
+                  <a:srgbClr val="4A5568"/>
+                </a:solidFill>
+                <a:latin typeface="Microsoft YaHei"/>
+                <a:ea typeface="Microsoft YaHei"/>
+              </a:rPr>
+              <a:t>；</a:t>
+            </a:r>
+            <a:r>
+              <a:rPr lang="en-US" sz="1350">
+                <a:solidFill>
+                  <a:srgbClr val="4A5568"/>
+                </a:solidFill>
+                <a:latin typeface="Microsoft YaHei"/>
+                <a:ea typeface="Microsoft YaHei"/>
+              </a:rPr>
+              <a:t>coverage </a:t>
+            </a:r>
+            <a:r>
+              <a:rPr lang="zh-CN" sz="1350">
+                <a:solidFill>
+                  <a:srgbClr val="4A5568"/>
+                </a:solidFill>
+                <a:latin typeface="Microsoft YaHei"/>
+                <a:ea typeface="Microsoft YaHei"/>
+              </a:rPr>
+              <a:t>下降</a:t>
+            </a:r>
+            <a:endParaRPr/>
+          </a:p>
+        </p:txBody>
+      </p:sp>
+      <p:sp>
+        <p:nvSpPr>
+          <p:cNvPr id="33" name=""/>
+          <p:cNvSpPr/>
+          <p:nvPr/>
+        </p:nvSpPr>
+        <p:spPr>
+          <a:xfrm rot="0" flipH="0" flipV="0">
+            <a:off x="8553450" y="3676650"/>
+            <a:ext cx="2571750" cy="1714500"/>
+          </a:xfrm>
+          <a:prstGeom prst="rect">
+            <a:avLst/>
+          </a:prstGeom>
+          <a:solidFill>
+            <a:srgbClr val="FFFFFF"/>
+          </a:solidFill>
+          <a:ln w="25400">
+            <a:solidFill>
+              <a:srgbClr val="D9534F"/>
+            </a:solidFill>
+            <a:prstDash val="solid"/>
+          </a:ln>
+        </p:spPr>
+        <p:txBody>
+          <a:bodyPr/>
+          <a:p>
+            <a:pPr/>
+            <a:endParaRPr/>
+          </a:p>
+        </p:txBody>
+      </p:sp>
+      <p:sp>
+        <p:nvSpPr>
+          <p:cNvPr id="34" name="" descr="{&quot;isTemplate&quot;:true,&quot;type&quot;:&quot;text&quot;}"/>
+          <p:cNvSpPr txBox="1"/>
+          <p:nvPr/>
+        </p:nvSpPr>
+        <p:spPr>
+          <a:xfrm rot="0" flipH="0" flipV="0">
+            <a:off x="8743950" y="3867150"/>
+            <a:ext cx="2190750" cy="247650"/>
+          </a:xfrm>
+          <a:prstGeom prst="rect"/>
+        </p:spPr>
+        <p:txBody>
+          <a:bodyPr wrap="none" lIns="0" tIns="0" rIns="0" bIns="0"/>
+          <a:p>
+            <a:pPr>
+              <a:lnSpc>
+                <a:spcPct val="100000"/>
+              </a:lnSpc>
+            </a:pPr>
+            <a:r>
+              <a:rPr lang="en-US" sz="1575" b="1">
+                <a:solidFill>
+                  <a:srgbClr val="D9534F"/>
+                </a:solidFill>
+                <a:latin typeface="Microsoft YaHei"/>
+                <a:ea typeface="Microsoft YaHei"/>
+              </a:rPr>
+              <a:t>04 </a:t>
+            </a:r>
+            <a:r>
+              <a:rPr lang="zh-CN" sz="1575" b="1">
+                <a:solidFill>
+                  <a:srgbClr val="D9534F"/>
+                </a:solidFill>
+                <a:latin typeface="Microsoft YaHei"/>
+                <a:ea typeface="Microsoft YaHei"/>
+              </a:rPr>
+              <a:t>失败案例</a:t>
+            </a:r>
+            <a:endParaRPr/>
+          </a:p>
+        </p:txBody>
+      </p:sp>
+      <p:sp>
+        <p:nvSpPr>
+          <p:cNvPr id="35" name="" descr="{&quot;isTemplate&quot;:true,&quot;type&quot;:&quot;text&quot;}"/>
+          <p:cNvSpPr txBox="1"/>
+          <p:nvPr/>
+        </p:nvSpPr>
+        <p:spPr>
+          <a:xfrm rot="0" flipH="0" flipV="0">
+            <a:off x="8743950" y="4248150"/>
+            <a:ext cx="2190750" cy="295275"/>
+          </a:xfrm>
+          <a:prstGeom prst="rect"/>
+        </p:spPr>
+        <p:txBody>
+          <a:bodyPr wrap="none" lIns="0" tIns="0" rIns="0" bIns="0"/>
+          <a:p>
+            <a:pPr>
+              <a:lnSpc>
+                <a:spcPct val="140000"/>
+              </a:lnSpc>
+            </a:pPr>
+            <a:r>
+              <a:rPr lang="en-US" sz="1350">
+                <a:solidFill>
+                  <a:srgbClr val="4A5568"/>
+                </a:solidFill>
+                <a:latin typeface="Microsoft YaHei"/>
+                <a:ea typeface="Microsoft YaHei"/>
+              </a:rPr>
+              <a:t>P108 → ABSTAIN</a:t>
+            </a:r>
+            <a:endParaRPr/>
+          </a:p>
+        </p:txBody>
+      </p:sp>
+      <p:sp>
+        <p:nvSpPr>
+          <p:cNvPr id="36" name="" descr="{&quot;isTemplate&quot;:true,&quot;type&quot;:&quot;text&quot;}"/>
+          <p:cNvSpPr txBox="1"/>
+          <p:nvPr/>
+        </p:nvSpPr>
+        <p:spPr>
+          <a:xfrm rot="0" flipH="0" flipV="0">
+            <a:off x="381000" y="6048375"/>
+            <a:ext cx="2981325" cy="190500"/>
+          </a:xfrm>
+          <a:prstGeom prst="rect"/>
+        </p:spPr>
+        <p:txBody>
+          <a:bodyPr wrap="none" lIns="0" tIns="0" rIns="0" bIns="0"/>
+          <a:p>
+            <a:pPr>
+              <a:lnSpc>
+                <a:spcPct val="100000"/>
+              </a:lnSpc>
+            </a:pPr>
+            <a:r>
+              <a:rPr lang="zh-CN" sz="1200">
+                <a:solidFill>
+                  <a:srgbClr val="8B97A8"/>
+                </a:solidFill>
+                <a:latin typeface="Microsoft YaHei"/>
+                <a:ea typeface="Microsoft YaHei"/>
+              </a:rPr>
+              <a:t>现场</a:t>
+            </a:r>
+            <a:r>
+              <a:rPr lang="en-US" sz="1200">
+                <a:solidFill>
+                  <a:srgbClr val="8B97A8"/>
+                </a:solidFill>
+                <a:latin typeface="Microsoft YaHei"/>
+                <a:ea typeface="Microsoft YaHei"/>
+              </a:rPr>
+              <a:t> fallback</a:t>
+            </a:r>
+            <a:r>
+              <a:rPr lang="zh-CN" sz="1200">
+                <a:solidFill>
+                  <a:srgbClr val="8B97A8"/>
+                </a:solidFill>
+                <a:latin typeface="Microsoft YaHei"/>
+                <a:ea typeface="Microsoft YaHei"/>
+              </a:rPr>
+              <a:t>：离线</a:t>
+            </a:r>
+            <a:r>
+              <a:rPr lang="en-US" sz="1200">
+                <a:solidFill>
+                  <a:srgbClr val="8B97A8"/>
+                </a:solidFill>
+                <a:latin typeface="Microsoft YaHei"/>
+                <a:ea typeface="Microsoft YaHei"/>
+              </a:rPr>
+              <a:t> Demo + F1–F6 </a:t>
+            </a:r>
+            <a:r>
+              <a:rPr lang="zh-CN" sz="1200">
+                <a:solidFill>
+                  <a:srgbClr val="8B97A8"/>
+                </a:solidFill>
+                <a:latin typeface="Microsoft YaHei"/>
+                <a:ea typeface="Microsoft YaHei"/>
+              </a:rPr>
+              <a:t>冻结图</a:t>
+            </a:r>
+            <a:endParaRPr/>
+          </a:p>
+        </p:txBody>
+      </p:sp>
+      <p:sp>
+        <p:nvSpPr>
+          <p:cNvPr id="37" name="" descr="{&quot;isTemplate&quot;:true,&quot;type&quot;:&quot;text&quot;}"/>
+          <p:cNvSpPr txBox="1"/>
+          <p:nvPr/>
+        </p:nvSpPr>
+        <p:spPr>
+          <a:xfrm rot="0" flipH="0" flipV="0">
+            <a:off x="11353800" y="6067425"/>
+            <a:ext cx="457200" cy="161925"/>
+          </a:xfrm>
+          <a:prstGeom prst="rect"/>
+        </p:spPr>
+        <p:txBody>
+          <a:bodyPr wrap="none" lIns="0" tIns="0" rIns="0" bIns="0"/>
+          <a:p>
+            <a:pPr>
+              <a:lnSpc>
+                <a:spcPct val="100000"/>
+              </a:lnSpc>
+            </a:pPr>
+            <a:r>
+              <a:rPr lang="en-US" sz="1050">
+                <a:solidFill>
+                  <a:srgbClr val="0E3F8C"/>
+                </a:solidFill>
+                <a:latin typeface="Microsoft YaHei"/>
+                <a:ea typeface="Microsoft YaHei"/>
+              </a:rPr>
+              <a:t>10 / 10</a:t>
+            </a:r>
+            <a:endParaRPr/>
+          </a:p>
+        </p:txBody>
+      </p:sp>
+    </p:spTree>
+  </p:cSld>
+</p:sld>
+</file>
+
+<file path=ppt/slides/slide2.xml><?xml version="1.0" encoding="utf-8"?>
+<p:sld xmlns:p="http://schemas.openxmlformats.org/presentationml/2006/main" xmlns:r="http://schemas.openxmlformats.org/officeDocument/2006/relationships" xmlns:a="http://schemas.openxmlformats.org/drawingml/2006/main" xmlns:asvg="http://schemas.microsoft.com/office/drawing/2016/SVG/main" xmlns:mc="http://schemas.openxmlformats.org/markup-compatibility/2006" mc:Ignorable="asvg">
+  <p:cSld>
+    <p:spTree>
+      <p:nvGrpSpPr>
+        <p:cNvPr id="38" name=""/>
+        <p:cNvGrpSpPr/>
+        <p:nvPr/>
+      </p:nvGrpSpPr>
+      <p:grpSpPr>
+        <a:xfrm>
+          <a:off x="0" y="0"/>
+          <a:ext cx="0" cy="0"/>
+          <a:chOff x="0" y="0"/>
+          <a:chExt cx="0" cy="0"/>
+        </a:xfrm>
+      </p:grpSpPr>
+      <p:sp>
+        <p:nvSpPr>
+          <p:cNvPr id="39" name=""/>
           <p:cNvSpPr/>
           <p:nvPr/>
         </p:nvSpPr>
@@ -1704,12 +2153,15 @@
         </p:spPr>
         <p:txBody>
           <a:bodyPr/>
-          <a:p/>
-        </p:txBody>
-      </p:sp>
-      <p:sp>
-        <p:nvSpPr>
-          <p:cNvPr id="31" name=""/>
+          <a:p>
+            <a:pPr/>
+            <a:endParaRPr/>
+          </a:p>
+        </p:txBody>
+      </p:sp>
+      <p:sp>
+        <p:nvSpPr>
+          <p:cNvPr id="40" name=""/>
           <p:cNvSpPr/>
           <p:nvPr/>
         </p:nvSpPr>
@@ -1744,12 +2196,15 @@
         </p:spPr>
         <p:txBody>
           <a:bodyPr/>
-          <a:p/>
-        </p:txBody>
-      </p:sp>
-      <p:sp>
-        <p:nvSpPr>
-          <p:cNvPr id="32" name="" descr="{&quot;isTemplate&quot;:true,&quot;type&quot;:&quot;text&quot;}"/>
+          <a:p>
+            <a:pPr/>
+            <a:endParaRPr/>
+          </a:p>
+        </p:txBody>
+      </p:sp>
+      <p:sp>
+        <p:nvSpPr>
+          <p:cNvPr id="41" name="" descr="{&quot;isTemplate&quot;:true,&quot;type&quot;:&quot;text&quot;}"/>
           <p:cNvSpPr txBox="1"/>
           <p:nvPr/>
         </p:nvSpPr>
@@ -1804,7 +2259,7 @@
       </p:sp>
       <p:sp>
         <p:nvSpPr>
-          <p:cNvPr id="33" name="" descr="{&quot;isTemplate&quot;:true,&quot;type&quot;:&quot;text&quot;}"/>
+          <p:cNvPr id="42" name="" descr="{&quot;isTemplate&quot;:true,&quot;type&quot;:&quot;text&quot;}"/>
           <p:cNvSpPr txBox="1"/>
           <p:nvPr/>
         </p:nvSpPr>
@@ -1839,7 +2294,7 @@
       </p:sp>
       <p:sp>
         <p:nvSpPr>
-          <p:cNvPr id="34" name=""/>
+          <p:cNvPr id="43" name=""/>
           <p:cNvSpPr/>
           <p:nvPr/>
         </p:nvSpPr>
@@ -1863,12 +2318,15 @@
         </p:spPr>
         <p:txBody>
           <a:bodyPr/>
-          <a:p/>
+          <a:p>
+            <a:pPr/>
+            <a:endParaRPr/>
+          </a:p>
         </p:txBody>
       </p:sp>
       <p:pic>
         <p:nvPicPr>
-          <p:cNvPr id="35" name=""/>
+          <p:cNvPr id="44" name=""/>
           <p:cNvPicPr>
             <a:picLocks noChangeAspect="1"/>
           </p:cNvPicPr>
@@ -1900,7 +2358,7 @@
       </p:pic>
       <p:sp>
         <p:nvSpPr>
-          <p:cNvPr id="36" name=""/>
+          <p:cNvPr id="45" name=""/>
           <p:cNvSpPr/>
           <p:nvPr/>
         </p:nvSpPr>
@@ -1919,12 +2377,15 @@
         </p:spPr>
         <p:txBody>
           <a:bodyPr/>
-          <a:p/>
-        </p:txBody>
-      </p:sp>
-      <p:sp>
-        <p:nvSpPr>
-          <p:cNvPr id="37" name="" descr="{&quot;isTemplate&quot;:true,&quot;type&quot;:&quot;text&quot;}"/>
+          <a:p>
+            <a:pPr/>
+            <a:endParaRPr/>
+          </a:p>
+        </p:txBody>
+      </p:sp>
+      <p:sp>
+        <p:nvSpPr>
+          <p:cNvPr id="46" name="" descr="{&quot;isTemplate&quot;:true,&quot;type&quot;:&quot;text&quot;}"/>
           <p:cNvSpPr txBox="1"/>
           <p:nvPr/>
         </p:nvSpPr>
@@ -1959,7 +2420,7 @@
       </p:sp>
       <p:sp>
         <p:nvSpPr>
-          <p:cNvPr id="38" name="" descr="{&quot;isTemplate&quot;:true,&quot;type&quot;:&quot;text&quot;}"/>
+          <p:cNvPr id="47" name="" descr="{&quot;isTemplate&quot;:true,&quot;type&quot;:&quot;text&quot;}"/>
           <p:cNvSpPr txBox="1"/>
           <p:nvPr/>
         </p:nvSpPr>
@@ -2004,7 +2465,7 @@
       </p:sp>
       <p:sp>
         <p:nvSpPr>
-          <p:cNvPr id="39" name="" descr="{&quot;isTemplate&quot;:true,&quot;type&quot;:&quot;text&quot;}"/>
+          <p:cNvPr id="48" name="" descr="{&quot;isTemplate&quot;:true,&quot;type&quot;:&quot;text&quot;}"/>
           <p:cNvSpPr txBox="1"/>
           <p:nvPr/>
         </p:nvSpPr>
@@ -2051,7 +2512,7 @@
       </p:sp>
       <p:sp>
         <p:nvSpPr>
-          <p:cNvPr id="40" name=""/>
+          <p:cNvPr id="49" name=""/>
           <p:cNvSpPr/>
           <p:nvPr/>
         </p:nvSpPr>
@@ -2086,12 +2547,15 @@
         </p:spPr>
         <p:txBody>
           <a:bodyPr/>
-          <a:p/>
-        </p:txBody>
-      </p:sp>
-      <p:sp>
-        <p:nvSpPr>
-          <p:cNvPr id="41" name="" descr="{&quot;isTemplate&quot;:true,&quot;type&quot;:&quot;text&quot;}"/>
+          <a:p>
+            <a:pPr/>
+            <a:endParaRPr/>
+          </a:p>
+        </p:txBody>
+      </p:sp>
+      <p:sp>
+        <p:nvSpPr>
+          <p:cNvPr id="50" name="" descr="{&quot;isTemplate&quot;:true,&quot;type&quot;:&quot;text&quot;}"/>
           <p:cNvSpPr txBox="1"/>
           <p:nvPr/>
         </p:nvSpPr>
@@ -2126,7 +2590,7 @@
       </p:sp>
       <p:sp>
         <p:nvSpPr>
-          <p:cNvPr id="42" name="" descr="{&quot;isTemplate&quot;:true,&quot;type&quot;:&quot;text&quot;}"/>
+          <p:cNvPr id="51" name="" descr="{&quot;isTemplate&quot;:true,&quot;type&quot;:&quot;text&quot;}"/>
           <p:cNvSpPr txBox="1"/>
           <p:nvPr/>
         </p:nvSpPr>
@@ -2171,7 +2635,7 @@
       </p:sp>
       <p:sp>
         <p:nvSpPr>
-          <p:cNvPr id="43" name="" descr="{&quot;isTemplate&quot;:true,&quot;type&quot;:&quot;text&quot;}"/>
+          <p:cNvPr id="52" name="" descr="{&quot;isTemplate&quot;:true,&quot;type&quot;:&quot;text&quot;}"/>
           <p:cNvSpPr txBox="1"/>
           <p:nvPr/>
         </p:nvSpPr>
@@ -2209,12 +2673,12 @@
 </p:sld>
 </file>
 
-<file path=ppt/slides/slide12.xml><?xml version="1.0" encoding="utf-8"?>
+<file path=ppt/slides/slide3.xml><?xml version="1.0" encoding="utf-8"?>
 <p:sld xmlns:p="http://schemas.openxmlformats.org/presentationml/2006/main" xmlns:r="http://schemas.openxmlformats.org/officeDocument/2006/relationships" xmlns:a="http://schemas.openxmlformats.org/drawingml/2006/main" xmlns:asvg="http://schemas.microsoft.com/office/drawing/2016/SVG/main" xmlns:mc="http://schemas.openxmlformats.org/markup-compatibility/2006" mc:Ignorable="asvg">
   <p:cSld>
     <p:spTree>
       <p:nvGrpSpPr>
-        <p:cNvPr id="44" name="" descr="&lt;Slide style={{ width: 1280, height: 720, background: '#FFFFFF', padding: 40 }}&gt;&#10;  &lt;Box style={{ height: 88, borderBottom: '3px solid #1E4FA8', justifyContent: 'center' }}&gt;&lt;Text style={{ fontSize: 36, color: '#0E3F8C', fontWeight: 'bold' }}&gt;Reliability-aware evaluation&lt;/Text&gt;&lt;Text style={{ fontSize: 18, color: '#4A5568', marginTop: 6 }}&gt;从观察证据到可审查决策&lt;/Text&gt;&lt;/Box&gt;&#10;  &lt;Box style={{ height: 472, paddingTop: 16, background: '#F7F9FC' }}&gt;&lt;Image src=&quot;assets/F1_model_flow.svg&quot; style={{ width: 1200, height: 450, objectFit: 'contain' }} /&gt;&lt;/Box&gt;&#10;  &lt;Box style={{ height: 68, background: '#E8EFF8', padding: 14, justifyContent: 'center' }}&gt;&lt;Text style={{ fontSize: 21, color: '#0E3F8C' }}&gt;wᵢ = I(observableᵢ) · cᵢ · (1 − λprompt·pᵢ) · (1 − λcontext·tᵢ)　　Adjustedᵢ = Rawᵢ × wᵢ　　Ceff = Σwᵢ / N&lt;/Text&gt;&lt;/Box&gt;&#10;  &lt;Box style={{ height: 40, flexDirection: 'row', justifyContent: 'space-between', alignItems: 'center' }}&gt;&lt;Text style={{ fontSize: 14, color: '#8B97A8' }}&gt;R 是支持权重，不是校准概率；无证据时 fail-closed&lt;/Text&gt;&lt;Text style={{ fontSize: 14, color: '#0E3F8C' }}&gt;03 / 10&lt;/Text&gt;&lt;/Box&gt;&#10;&lt;/Slide&gt;"/>
+        <p:cNvPr id="53" name=""/>
         <p:cNvGrpSpPr/>
         <p:nvPr/>
       </p:nvGrpSpPr>
@@ -2228,7 +2692,7 @@
       </p:grpSpPr>
       <p:sp>
         <p:nvSpPr>
-          <p:cNvPr id="45" name=""/>
+          <p:cNvPr id="54" name=""/>
           <p:cNvSpPr/>
           <p:nvPr/>
         </p:nvSpPr>
@@ -2247,12 +2711,15 @@
         </p:spPr>
         <p:txBody>
           <a:bodyPr/>
-          <a:p/>
-        </p:txBody>
-      </p:sp>
-      <p:sp>
-        <p:nvSpPr>
-          <p:cNvPr id="46" name=""/>
+          <a:p>
+            <a:pPr/>
+            <a:endParaRPr/>
+          </a:p>
+        </p:txBody>
+      </p:sp>
+      <p:sp>
+        <p:nvSpPr>
+          <p:cNvPr id="55" name=""/>
           <p:cNvSpPr/>
           <p:nvPr/>
         </p:nvSpPr>
@@ -2287,12 +2754,15 @@
         </p:spPr>
         <p:txBody>
           <a:bodyPr/>
-          <a:p/>
-        </p:txBody>
-      </p:sp>
-      <p:sp>
-        <p:nvSpPr>
-          <p:cNvPr id="47" name="" descr="{&quot;isTemplate&quot;:true,&quot;type&quot;:&quot;text&quot;}"/>
+          <a:p>
+            <a:pPr/>
+            <a:endParaRPr/>
+          </a:p>
+        </p:txBody>
+      </p:sp>
+      <p:sp>
+        <p:nvSpPr>
+          <p:cNvPr id="56" name="" descr="{&quot;isTemplate&quot;:true,&quot;type&quot;:&quot;text&quot;}"/>
           <p:cNvSpPr txBox="1"/>
           <p:nvPr/>
         </p:nvSpPr>
@@ -2327,7 +2797,7 @@
       </p:sp>
       <p:sp>
         <p:nvSpPr>
-          <p:cNvPr id="48" name="" descr="{&quot;isTemplate&quot;:true,&quot;type&quot;:&quot;text&quot;}"/>
+          <p:cNvPr id="57" name="" descr="{&quot;isTemplate&quot;:true,&quot;type&quot;:&quot;text&quot;}"/>
           <p:cNvSpPr txBox="1"/>
           <p:nvPr/>
         </p:nvSpPr>
@@ -2362,7 +2832,7 @@
       </p:sp>
       <p:sp>
         <p:nvSpPr>
-          <p:cNvPr id="49" name=""/>
+          <p:cNvPr id="58" name=""/>
           <p:cNvSpPr/>
           <p:nvPr/>
         </p:nvSpPr>
@@ -2381,12 +2851,15 @@
         </p:spPr>
         <p:txBody>
           <a:bodyPr/>
-          <a:p/>
+          <a:p>
+            <a:pPr/>
+            <a:endParaRPr/>
+          </a:p>
         </p:txBody>
       </p:sp>
       <p:pic>
         <p:nvPicPr>
-          <p:cNvPr id="50" name=""/>
+          <p:cNvPr id="59" name=""/>
           <p:cNvPicPr>
             <a:picLocks noChangeAspect="1"/>
           </p:cNvPicPr>
@@ -2418,7 +2891,7 @@
       </p:pic>
       <p:sp>
         <p:nvSpPr>
-          <p:cNvPr id="51" name=""/>
+          <p:cNvPr id="60" name=""/>
           <p:cNvSpPr/>
           <p:nvPr/>
         </p:nvSpPr>
@@ -2437,12 +2910,15 @@
         </p:spPr>
         <p:txBody>
           <a:bodyPr/>
-          <a:p/>
-        </p:txBody>
-      </p:sp>
-      <p:sp>
-        <p:nvSpPr>
-          <p:cNvPr id="52" name="" descr="{&quot;isTemplate&quot;:true,&quot;type&quot;:&quot;text&quot;}"/>
+          <a:p>
+            <a:pPr/>
+            <a:endParaRPr/>
+          </a:p>
+        </p:txBody>
+      </p:sp>
+      <p:sp>
+        <p:nvSpPr>
+          <p:cNvPr id="61" name="" descr="{&quot;isTemplate&quot;:true,&quot;type&quot;:&quot;text&quot;}"/>
           <p:cNvSpPr txBox="1"/>
           <p:nvPr/>
         </p:nvSpPr>
@@ -2517,7 +2993,7 @@
       </p:sp>
       <p:sp>
         <p:nvSpPr>
-          <p:cNvPr id="53" name="" descr="{&quot;isTemplate&quot;:true,&quot;type&quot;:&quot;text&quot;}"/>
+          <p:cNvPr id="62" name="" descr="{&quot;isTemplate&quot;:true,&quot;type&quot;:&quot;text&quot;}"/>
           <p:cNvSpPr txBox="1"/>
           <p:nvPr/>
         </p:nvSpPr>
@@ -2572,7 +3048,7 @@
       </p:sp>
       <p:sp>
         <p:nvSpPr>
-          <p:cNvPr id="54" name="" descr="{&quot;isTemplate&quot;:true,&quot;type&quot;:&quot;text&quot;}"/>
+          <p:cNvPr id="63" name="" descr="{&quot;isTemplate&quot;:true,&quot;type&quot;:&quot;text&quot;}"/>
           <p:cNvSpPr txBox="1"/>
           <p:nvPr/>
         </p:nvSpPr>
@@ -2610,12 +3086,12 @@
 </p:sld>
 </file>
 
-<file path=ppt/slides/slide13.xml><?xml version="1.0" encoding="utf-8"?>
+<file path=ppt/slides/slide4.xml><?xml version="1.0" encoding="utf-8"?>
 <p:sld xmlns:p="http://schemas.openxmlformats.org/presentationml/2006/main" xmlns:r="http://schemas.openxmlformats.org/officeDocument/2006/relationships" xmlns:a="http://schemas.openxmlformats.org/drawingml/2006/main" xmlns:asvg="http://schemas.microsoft.com/office/drawing/2016/SVG/main" xmlns:mc="http://schemas.openxmlformats.org/markup-compatibility/2006" mc:Ignorable="asvg">
   <p:cSld>
     <p:spTree>
       <p:nvGrpSpPr>
-        <p:cNvPr id="55" name="" descr="&lt;Slide style={{ width: 1280, height: 720, background: '#FFFFFF', padding: 40 }}&gt;&#10;  &lt;Box style={{ height: 88, borderBottom: '3px solid #1E4FA8', justifyContent: 'center' }}&gt;&lt;Text style={{ fontSize: 36, color: '#0E3F8C', fontWeight: 'bold' }}&gt;Development slice：70 条记录，只有 16 条可判读&lt;/Text&gt;&lt;/Box&gt;&#10;  &lt;Box style={{ height: 510, flexDirection: 'row', gap: 28, paddingTop: 18 }}&gt;&#10;    &lt;Box style={{ width: 300, height: 470, background: '#0E3F8C', padding: 24, gap: 18, justifyContent: 'center' }}&gt;&lt;Text style={{ fontSize: 72, color: '#FFFFFF', fontWeight: 'bold' }}&gt;70&lt;/Text&gt;&lt;Text style={{ fontSize: 24, color: '#FFFFFF' }}&gt;AI provisional records&lt;/Text&gt;&lt;Box style={{ height: 1, background: '#8EB5F0' }} /&gt;&lt;Text style={{ fontSize: 21, color: '#DCEBFF', lineHeight: 1.4 }}&gt;16 readable&lt;br /&gt;19 NO_EVIDENCE&lt;br /&gt;35 UNDETERMINED&lt;br /&gt;54 NO_EFFECTIVE_EVIDENCE&lt;/Text&gt;&lt;/Box&gt;&#10;    &lt;Box style={{ width: 872, height: 470, border: '1px solid #D6DCE5', padding: 12, background: '#F7F9FC' }}&gt;&lt;Image src=&quot;assets/F3_evidence_degradation.svg&quot; style={{ width: 846, height: 446, objectFit: 'contain' }} /&gt;&lt;/Box&gt;&#10;  &lt;/Box&gt;&#10;  &lt;Box style={{ height: 40, flexDirection: 'row', justifyContent: 'space-between', alignItems: 'center' }}&gt;&lt;Text style={{ fontSize: 14, color: '#D9534F' }}&gt;54 不是 54 个零分，而是没有有效证据支持数值判断&lt;/Text&gt;&lt;Text style={{ fontSize: 14, color: '#0E3F8C' }}&gt;04 / 10&lt;/Text&gt;&lt;/Box&gt;&#10;&lt;/Slide&gt;"/>
+        <p:cNvPr id="64" name=""/>
         <p:cNvGrpSpPr/>
         <p:nvPr/>
       </p:nvGrpSpPr>
@@ -2629,7 +3105,7 @@
       </p:grpSpPr>
       <p:sp>
         <p:nvSpPr>
-          <p:cNvPr id="56" name=""/>
+          <p:cNvPr id="65" name=""/>
           <p:cNvSpPr/>
           <p:nvPr/>
         </p:nvSpPr>
@@ -2648,12 +3124,15 @@
         </p:spPr>
         <p:txBody>
           <a:bodyPr/>
-          <a:p/>
-        </p:txBody>
-      </p:sp>
-      <p:sp>
-        <p:nvSpPr>
-          <p:cNvPr id="57" name=""/>
+          <a:p>
+            <a:pPr/>
+            <a:endParaRPr/>
+          </a:p>
+        </p:txBody>
+      </p:sp>
+      <p:sp>
+        <p:nvSpPr>
+          <p:cNvPr id="66" name=""/>
           <p:cNvSpPr/>
           <p:nvPr/>
         </p:nvSpPr>
@@ -2688,12 +3167,15 @@
         </p:spPr>
         <p:txBody>
           <a:bodyPr/>
-          <a:p/>
-        </p:txBody>
-      </p:sp>
-      <p:sp>
-        <p:nvSpPr>
-          <p:cNvPr id="58" name="" descr="{&quot;isTemplate&quot;:true,&quot;type&quot;:&quot;text&quot;}"/>
+          <a:p>
+            <a:pPr/>
+            <a:endParaRPr/>
+          </a:p>
+        </p:txBody>
+      </p:sp>
+      <p:sp>
+        <p:nvSpPr>
+          <p:cNvPr id="67" name="" descr="{&quot;isTemplate&quot;:true,&quot;type&quot;:&quot;text&quot;}"/>
           <p:cNvSpPr txBox="1"/>
           <p:nvPr/>
         </p:nvSpPr>
@@ -2778,7 +3260,7 @@
       </p:sp>
       <p:sp>
         <p:nvSpPr>
-          <p:cNvPr id="59" name=""/>
+          <p:cNvPr id="68" name=""/>
           <p:cNvSpPr/>
           <p:nvPr/>
         </p:nvSpPr>
@@ -2797,12 +3279,15 @@
         </p:spPr>
         <p:txBody>
           <a:bodyPr/>
-          <a:p/>
-        </p:txBody>
-      </p:sp>
-      <p:sp>
-        <p:nvSpPr>
-          <p:cNvPr id="60" name="" descr="{&quot;isTemplate&quot;:true,&quot;type&quot;:&quot;text&quot;}"/>
+          <a:p>
+            <a:pPr/>
+            <a:endParaRPr/>
+          </a:p>
+        </p:txBody>
+      </p:sp>
+      <p:sp>
+        <p:nvSpPr>
+          <p:cNvPr id="69" name="" descr="{&quot;isTemplate&quot;:true,&quot;type&quot;:&quot;text&quot;}"/>
           <p:cNvSpPr txBox="1"/>
           <p:nvPr/>
         </p:nvSpPr>
@@ -2837,7 +3322,7 @@
       </p:sp>
       <p:sp>
         <p:nvSpPr>
-          <p:cNvPr id="61" name="" descr="{&quot;isTemplate&quot;:true,&quot;type&quot;:&quot;text&quot;}"/>
+          <p:cNvPr id="70" name="" descr="{&quot;isTemplate&quot;:true,&quot;type&quot;:&quot;text&quot;}"/>
           <p:cNvSpPr txBox="1"/>
           <p:nvPr/>
         </p:nvSpPr>
@@ -2872,7 +3357,7 @@
       </p:sp>
       <p:sp>
         <p:nvSpPr>
-          <p:cNvPr id="62" name=""/>
+          <p:cNvPr id="71" name=""/>
           <p:cNvSpPr/>
           <p:nvPr/>
         </p:nvSpPr>
@@ -2891,12 +3376,15 @@
         </p:spPr>
         <p:txBody>
           <a:bodyPr/>
-          <a:p/>
-        </p:txBody>
-      </p:sp>
-      <p:sp>
-        <p:nvSpPr>
-          <p:cNvPr id="63" name="" descr="{&quot;isTemplate&quot;:true,&quot;type&quot;:&quot;text&quot;}"/>
+          <a:p>
+            <a:pPr/>
+            <a:endParaRPr/>
+          </a:p>
+        </p:txBody>
+      </p:sp>
+      <p:sp>
+        <p:nvSpPr>
+          <p:cNvPr id="72" name="" descr="{&quot;isTemplate&quot;:true,&quot;type&quot;:&quot;text&quot;}"/>
           <p:cNvSpPr txBox="1"/>
           <p:nvPr/>
         </p:nvSpPr>
@@ -2987,7 +3475,7 @@
       </p:sp>
       <p:sp>
         <p:nvSpPr>
-          <p:cNvPr id="64" name=""/>
+          <p:cNvPr id="73" name=""/>
           <p:cNvSpPr/>
           <p:nvPr/>
         </p:nvSpPr>
@@ -3011,12 +3499,15 @@
         </p:spPr>
         <p:txBody>
           <a:bodyPr/>
-          <a:p/>
+          <a:p>
+            <a:pPr/>
+            <a:endParaRPr/>
+          </a:p>
         </p:txBody>
       </p:sp>
       <p:pic>
         <p:nvPicPr>
-          <p:cNvPr id="65" name=""/>
+          <p:cNvPr id="74" name=""/>
           <p:cNvPicPr>
             <a:picLocks noChangeAspect="1"/>
           </p:cNvPicPr>
@@ -3048,7 +3539,7 @@
       </p:pic>
       <p:sp>
         <p:nvSpPr>
-          <p:cNvPr id="66" name="" descr="{&quot;isTemplate&quot;:true,&quot;type&quot;:&quot;text&quot;}"/>
+          <p:cNvPr id="75" name="" descr="{&quot;isTemplate&quot;:true,&quot;type&quot;:&quot;text&quot;}"/>
           <p:cNvSpPr txBox="1"/>
           <p:nvPr/>
         </p:nvSpPr>
@@ -3113,7 +3604,7 @@
       </p:sp>
       <p:sp>
         <p:nvSpPr>
-          <p:cNvPr id="67" name="" descr="{&quot;isTemplate&quot;:true,&quot;type&quot;:&quot;text&quot;}"/>
+          <p:cNvPr id="76" name="" descr="{&quot;isTemplate&quot;:true,&quot;type&quot;:&quot;text&quot;}"/>
           <p:cNvSpPr txBox="1"/>
           <p:nvPr/>
         </p:nvSpPr>
@@ -3151,12 +3642,12 @@
 </p:sld>
 </file>
 
-<file path=ppt/slides/slide14.xml><?xml version="1.0" encoding="utf-8"?>
+<file path=ppt/slides/slide5.xml><?xml version="1.0" encoding="utf-8"?>
 <p:sld xmlns:p="http://schemas.openxmlformats.org/presentationml/2006/main" xmlns:r="http://schemas.openxmlformats.org/officeDocument/2006/relationships" xmlns:a="http://schemas.openxmlformats.org/drawingml/2006/main" xmlns:asvg="http://schemas.microsoft.com/office/drawing/2016/SVG/main" xmlns:mc="http://schemas.openxmlformats.org/markup-compatibility/2006" mc:Ignorable="asvg">
   <p:cSld>
     <p:spTree>
       <p:nvGrpSpPr>
-        <p:cNvPr id="68" name="" descr="&lt;Slide style={{ width: 1280, height: 720, background: '#FFFFFF', padding: 40 }}&gt;&#10;  &lt;Box style={{ height: 88, borderBottom: '3px solid #1E4FA8', justifyContent: 'center' }}&gt;&lt;Text style={{ fontSize: 36, color: '#0E3F8C', fontWeight: 'bold' }}&gt;公共缩放退化：分数不动，但支持下降&lt;/Text&gt;&lt;Text style={{ fontSize: 18, color: '#4A5568', marginTop: 6 }}&gt;稳定的归一化 score 不能替代稳定的 evidence support&lt;/Text&gt;&lt;/Box&gt;&#10;  &lt;Box style={{ height: 500, flexDirection: 'row', gap: 28, paddingTop: 18 }}&gt;&#10;    &lt;Box style={{ width: 770, height: 470, border: '1px solid #D6DCE5', padding: 12, background: '#F7F9FC' }}&gt;&lt;Image src=&quot;assets/F4_parameter_perturbation.svg&quot; style={{ width: 744, height: 444, objectFit: 'contain' }} /&gt;&lt;/Box&gt;&#10;    &lt;Box style={{ width: 402, height: 470, padding: 24, gap: 18, background: '#F0F5FC' }}&gt;&lt;Text style={{ fontSize: 25, color: '#0E3F8C', fontWeight: 'bold' }}&gt;锁定机制&lt;/Text&gt;&lt;Text style={{ fontSize: 21, color: '#1A2230', lineHeight: 1.4 }}&gt;16 条可判读记录共享：&lt;/Text&gt;&lt;Text style={{ fontSize: 21, color: '#1A2230', lineHeight: 1.4 }}&gt;prompt=true&lt;br /&gt;context=false&lt;br /&gt;confidence=medium&lt;br /&gt;R = 0.375&lt;/Text&gt;&lt;Box style={{ borderTop: '2px solid #1E4FA8', paddingTop: 14 }}&gt;&lt;Text style={{ fontSize: 21, color: '#1E4FA8', fontWeight: 'bold' }}&gt;weight：16 → 12 → 6 → 6&lt;/Text&gt;&lt;Text style={{ fontSize: 21, color: '#1E4FA8', fontWeight: 'bold', marginTop: 8 }}&gt;coverage：0.228571 → 0.085714&lt;/Text&gt;&lt;/Box&gt;&lt;/Box&gt;&#10;  &lt;/Box&gt;&#10;  &lt;Box style={{ height: 50, flexDirection: 'row', justifyContent: 'space-between', alignItems: 'center' }}&gt;&lt;Text style={{ fontSize: 17, color: '#4A5568' }}&gt;ABL / HOT / Gap = 3.5625 / 0.375 / 1.125（Raw=Adjusted，不是提升）&lt;/Text&gt;&lt;Text style={{ fontSize: 14, color: '#0E3F8C' }}&gt;05 / 10&lt;/Text&gt;&lt;/Box&gt;&#10;&lt;/Slide&gt;"/>
+        <p:cNvPr id="77" name=""/>
         <p:cNvGrpSpPr/>
         <p:nvPr/>
       </p:nvGrpSpPr>
@@ -3170,7 +3661,7 @@
       </p:grpSpPr>
       <p:sp>
         <p:nvSpPr>
-          <p:cNvPr id="69" name=""/>
+          <p:cNvPr id="78" name=""/>
           <p:cNvSpPr/>
           <p:nvPr/>
         </p:nvSpPr>
@@ -3189,12 +3680,15 @@
         </p:spPr>
         <p:txBody>
           <a:bodyPr/>
-          <a:p/>
-        </p:txBody>
-      </p:sp>
-      <p:sp>
-        <p:nvSpPr>
-          <p:cNvPr id="70" name=""/>
+          <a:p>
+            <a:pPr/>
+            <a:endParaRPr/>
+          </a:p>
+        </p:txBody>
+      </p:sp>
+      <p:sp>
+        <p:nvSpPr>
+          <p:cNvPr id="79" name=""/>
           <p:cNvSpPr/>
           <p:nvPr/>
         </p:nvSpPr>
@@ -3229,12 +3723,15 @@
         </p:spPr>
         <p:txBody>
           <a:bodyPr/>
-          <a:p/>
-        </p:txBody>
-      </p:sp>
-      <p:sp>
-        <p:nvSpPr>
-          <p:cNvPr id="71" name="" descr="{&quot;isTemplate&quot;:true,&quot;type&quot;:&quot;text&quot;}"/>
+          <a:p>
+            <a:pPr/>
+            <a:endParaRPr/>
+          </a:p>
+        </p:txBody>
+      </p:sp>
+      <p:sp>
+        <p:nvSpPr>
+          <p:cNvPr id="80" name="" descr="{&quot;isTemplate&quot;:true,&quot;type&quot;:&quot;text&quot;}"/>
           <p:cNvSpPr txBox="1"/>
           <p:nvPr/>
         </p:nvSpPr>
@@ -3269,7 +3766,7 @@
       </p:sp>
       <p:sp>
         <p:nvSpPr>
-          <p:cNvPr id="72" name="" descr="{&quot;isTemplate&quot;:true,&quot;type&quot;:&quot;text&quot;}"/>
+          <p:cNvPr id="81" name="" descr="{&quot;isTemplate&quot;:true,&quot;type&quot;:&quot;text&quot;}"/>
           <p:cNvSpPr txBox="1"/>
           <p:nvPr/>
         </p:nvSpPr>
@@ -3334,7 +3831,7 @@
       </p:sp>
       <p:sp>
         <p:nvSpPr>
-          <p:cNvPr id="73" name=""/>
+          <p:cNvPr id="82" name=""/>
           <p:cNvSpPr/>
           <p:nvPr/>
         </p:nvSpPr>
@@ -3358,12 +3855,15 @@
         </p:spPr>
         <p:txBody>
           <a:bodyPr/>
-          <a:p/>
+          <a:p>
+            <a:pPr/>
+            <a:endParaRPr/>
+          </a:p>
         </p:txBody>
       </p:sp>
       <p:pic>
         <p:nvPicPr>
-          <p:cNvPr id="74" name=""/>
+          <p:cNvPr id="83" name=""/>
           <p:cNvPicPr>
             <a:picLocks noChangeAspect="1"/>
           </p:cNvPicPr>
@@ -3395,7 +3895,7 @@
       </p:pic>
       <p:sp>
         <p:nvSpPr>
-          <p:cNvPr id="75" name=""/>
+          <p:cNvPr id="84" name=""/>
           <p:cNvSpPr/>
           <p:nvPr/>
         </p:nvSpPr>
@@ -3414,12 +3914,15 @@
         </p:spPr>
         <p:txBody>
           <a:bodyPr/>
-          <a:p/>
-        </p:txBody>
-      </p:sp>
-      <p:sp>
-        <p:nvSpPr>
-          <p:cNvPr id="76" name="" descr="{&quot;isTemplate&quot;:true,&quot;type&quot;:&quot;text&quot;}"/>
+          <a:p>
+            <a:pPr/>
+            <a:endParaRPr/>
+          </a:p>
+        </p:txBody>
+      </p:sp>
+      <p:sp>
+        <p:nvSpPr>
+          <p:cNvPr id="85" name="" descr="{&quot;isTemplate&quot;:true,&quot;type&quot;:&quot;text&quot;}"/>
           <p:cNvSpPr txBox="1"/>
           <p:nvPr/>
         </p:nvSpPr>
@@ -3454,7 +3957,7 @@
       </p:sp>
       <p:sp>
         <p:nvSpPr>
-          <p:cNvPr id="77" name="" descr="{&quot;isTemplate&quot;:true,&quot;type&quot;:&quot;text&quot;}"/>
+          <p:cNvPr id="86" name="" descr="{&quot;isTemplate&quot;:true,&quot;type&quot;:&quot;text&quot;}"/>
           <p:cNvSpPr txBox="1"/>
           <p:nvPr/>
         </p:nvSpPr>
@@ -3499,7 +4002,7 @@
       </p:sp>
       <p:sp>
         <p:nvSpPr>
-          <p:cNvPr id="78" name="" descr="{&quot;isTemplate&quot;:true,&quot;type&quot;:&quot;text&quot;}"/>
+          <p:cNvPr id="87" name="" descr="{&quot;isTemplate&quot;:true,&quot;type&quot;:&quot;text&quot;}"/>
           <p:cNvSpPr txBox="1"/>
           <p:nvPr/>
         </p:nvSpPr>
@@ -3588,7 +4091,7 @@
       </p:sp>
       <p:sp>
         <p:nvSpPr>
-          <p:cNvPr id="79" name=""/>
+          <p:cNvPr id="88" name=""/>
           <p:cNvSpPr/>
           <p:nvPr/>
         </p:nvSpPr>
@@ -3623,12 +4126,15 @@
         </p:spPr>
         <p:txBody>
           <a:bodyPr/>
-          <a:p/>
-        </p:txBody>
-      </p:sp>
-      <p:sp>
-        <p:nvSpPr>
-          <p:cNvPr id="80" name="" descr="{&quot;isTemplate&quot;:true,&quot;type&quot;:&quot;text&quot;}"/>
+          <a:p>
+            <a:pPr/>
+            <a:endParaRPr/>
+          </a:p>
+        </p:txBody>
+      </p:sp>
+      <p:sp>
+        <p:nvSpPr>
+          <p:cNvPr id="89" name="" descr="{&quot;isTemplate&quot;:true,&quot;type&quot;:&quot;text&quot;}"/>
           <p:cNvSpPr txBox="1"/>
           <p:nvPr/>
         </p:nvSpPr>
@@ -3683,7 +4189,7 @@
       </p:sp>
       <p:sp>
         <p:nvSpPr>
-          <p:cNvPr id="81" name="" descr="{&quot;isTemplate&quot;:true,&quot;type&quot;:&quot;text&quot;}"/>
+          <p:cNvPr id="90" name="" descr="{&quot;isTemplate&quot;:true,&quot;type&quot;:&quot;text&quot;}"/>
           <p:cNvSpPr txBox="1"/>
           <p:nvPr/>
         </p:nvSpPr>
@@ -3738,7 +4244,7 @@
       </p:sp>
       <p:sp>
         <p:nvSpPr>
-          <p:cNvPr id="82" name="" descr="{&quot;isTemplate&quot;:true,&quot;type&quot;:&quot;text&quot;}"/>
+          <p:cNvPr id="91" name="" descr="{&quot;isTemplate&quot;:true,&quot;type&quot;:&quot;text&quot;}"/>
           <p:cNvSpPr txBox="1"/>
           <p:nvPr/>
         </p:nvSpPr>
@@ -3803,7 +4309,7 @@
       </p:sp>
       <p:sp>
         <p:nvSpPr>
-          <p:cNvPr id="83" name="" descr="{&quot;isTemplate&quot;:true,&quot;type&quot;:&quot;text&quot;}"/>
+          <p:cNvPr id="92" name="" descr="{&quot;isTemplate&quot;:true,&quot;type&quot;:&quot;text&quot;}"/>
           <p:cNvSpPr txBox="1"/>
           <p:nvPr/>
         </p:nvSpPr>
@@ -3841,12 +4347,12 @@
 </p:sld>
 </file>
 
-<file path=ppt/slides/slide15.xml><?xml version="1.0" encoding="utf-8"?>
+<file path=ppt/slides/slide6.xml><?xml version="1.0" encoding="utf-8"?>
 <p:sld xmlns:p="http://schemas.openxmlformats.org/presentationml/2006/main" xmlns:a="http://schemas.openxmlformats.org/drawingml/2006/main">
   <p:cSld>
     <p:spTree>
       <p:nvGrpSpPr>
-        <p:cNvPr id="84" name="" descr="&lt;Slide style={{ width: 1280, height: 720, background: '#F7F9FC', padding: 40 }}&gt;&#10;  &lt;Box style={{ height: 88, borderBottom: '3px solid #1E4FA8', justifyContent: 'center' }}&gt;&lt;Text style={{ fontSize: 36, color: '#0E3F8C', fontWeight: 'bold' }}&gt;五条验证路径，回答同一个问题&lt;/Text&gt;&lt;Text style={{ fontSize: 18, color: '#4A5568', marginTop: 6 }}&gt;当 score 看似稳定时，evidence support 是否也稳定？&lt;/Text&gt;&lt;/Box&gt;&#10;  &lt;Box style={{ height: 420, flexDirection: 'row', gap: 16, paddingTop: 24 }}&gt;&#10;    &lt;Box style={{ width: 224, height: 360, background: '#FFFFFF', border: '1px solid #D6DCE5', padding: 18, gap: 12 }}&gt;&lt;Text style={{ fontSize: 22, color: '#1E4FA8', fontWeight: 'bold' }}&gt;01 Robustness&lt;/Text&gt;&lt;Text style={{ fontSize: 19, color: '#1A2230', lineHeight: 1.4 }}&gt;693 = 21×11×3&lt;br /&gt;660 defined&lt;br /&gt;33 undefined&lt;/Text&gt;&lt;/Box&gt;&#10;    &lt;Box style={{ width: 224, height: 360, background: '#FFFFFF', border: '1px solid #D6DCE5', padding: 18, gap: 12 }}&gt;&lt;Text style={{ fontSize: 22, color: '#1E4FA8', fontWeight: 'bold' }}&gt;02 Perturbation&lt;/Text&gt;&lt;Text style={{ fontSize: 19, color: '#1A2230', lineHeight: 1.4 }}&gt;±10% / ±20%&lt;br /&gt;&lt;span style={{ color: '#D9534F', fontWeight: 'bold' }}&gt;0 flips&lt;/span&gt;&lt;br /&gt;ranking N/A&lt;/Text&gt;&lt;/Box&gt;&#10;    &lt;Box style={{ width: 224, height: 360, background: '#FFFFFF', border: '1px solid #D6DCE5', padding: 18, gap: 12 }}&gt;&lt;Text style={{ fontSize: 22, color: '#1E4FA8', fontWeight: 'bold' }}&gt;03 Ablation&lt;/Text&gt;&lt;Text style={{ fontSize: 19, color: '#1A2230', lineHeight: 1.4 }}&gt;support falls&lt;br /&gt;coverage falls&lt;br /&gt;score can persist&lt;/Text&gt;&lt;/Box&gt;&#10;    &lt;Box style={{ width: 224, height: 360, background: '#FFFFFF', border: '1px solid #D6DCE5', padding: 18, gap: 12 }}&gt;&lt;Text style={{ fontSize: 22, color: '#1E4FA8', fontWeight: 'bold' }}&gt;04 Failure&lt;/Text&gt;&lt;Text style={{ fontSize: 19, color: '#1A2230', lineHeight: 1.4 }}&gt;ABSTAIN&lt;br /&gt;NO_EFFECTIVE_EVIDENCE&lt;br /&gt;not zero&lt;/Text&gt;&lt;/Box&gt;&#10;    &lt;Box style={{ width: 224, height: 360, background: '#FFFFFF', border: '1px solid #D6DCE5', padding: 18, gap: 12 }}&gt;&lt;Text style={{ fontSize: 22, color: '#1E4FA8', fontWeight: 'bold' }}&gt;05 Transfer / ML&lt;/Text&gt;&lt;Text style={{ fontSize: 19, color: '#1A2230', lineHeight: 1.4 }}&gt;constraint&lt;br /&gt;not superiority&lt;br /&gt;not generalization&lt;/Text&gt;&lt;/Box&gt;&#10;  &lt;/Box&gt;&#10;  &lt;Box style={{ height: 90, background: '#0E3F8C', padding: 20, justifyContent: 'center' }}&gt;&lt;Text style={{ fontSize: 27, color: '#FFFFFF', fontWeight: 'bold' }}&gt;五条路径不是五个新主张，而是同一个可审查问题的五种压力测试&lt;/Text&gt;&lt;/Box&gt;&#10;  &lt;Box style={{ height: 40, flexDirection: 'row', justifyContent: 'space-between', alignItems: 'center' }}&gt;&lt;Text style={{ fontSize: 14, color: '#8B97A8' }}&gt;不新增实验解释，只收束既有冻结证据&lt;/Text&gt;&lt;Text style={{ fontSize: 14, color: '#0E3F8C' }}&gt;06 / 10&lt;/Text&gt;&lt;/Box&gt;&#10;&lt;/Slide&gt;"/>
+        <p:cNvPr id="93" name=""/>
         <p:cNvGrpSpPr/>
         <p:nvPr/>
       </p:nvGrpSpPr>
@@ -3860,7 +4366,7 @@
       </p:grpSpPr>
       <p:sp>
         <p:nvSpPr>
-          <p:cNvPr id="85" name=""/>
+          <p:cNvPr id="94" name=""/>
           <p:cNvSpPr/>
           <p:nvPr/>
         </p:nvSpPr>
@@ -3879,12 +4385,15 @@
         </p:spPr>
         <p:txBody>
           <a:bodyPr/>
-          <a:p/>
-        </p:txBody>
-      </p:sp>
-      <p:sp>
-        <p:nvSpPr>
-          <p:cNvPr id="86" name=""/>
+          <a:p>
+            <a:pPr/>
+            <a:endParaRPr/>
+          </a:p>
+        </p:txBody>
+      </p:sp>
+      <p:sp>
+        <p:nvSpPr>
+          <p:cNvPr id="95" name=""/>
           <p:cNvSpPr/>
           <p:nvPr/>
         </p:nvSpPr>
@@ -3919,12 +4428,15 @@
         </p:spPr>
         <p:txBody>
           <a:bodyPr/>
-          <a:p/>
-        </p:txBody>
-      </p:sp>
-      <p:sp>
-        <p:nvSpPr>
-          <p:cNvPr id="87" name="" descr="{&quot;isTemplate&quot;:true,&quot;type&quot;:&quot;text&quot;}"/>
+          <a:p>
+            <a:pPr/>
+            <a:endParaRPr/>
+          </a:p>
+        </p:txBody>
+      </p:sp>
+      <p:sp>
+        <p:nvSpPr>
+          <p:cNvPr id="96" name="" descr="{&quot;isTemplate&quot;:true,&quot;type&quot;:&quot;text&quot;}"/>
           <p:cNvSpPr txBox="1"/>
           <p:nvPr/>
         </p:nvSpPr>
@@ -3959,7 +4471,7 @@
       </p:sp>
       <p:sp>
         <p:nvSpPr>
-          <p:cNvPr id="88" name="" descr="{&quot;isTemplate&quot;:true,&quot;type&quot;:&quot;text&quot;}"/>
+          <p:cNvPr id="97" name="" descr="{&quot;isTemplate&quot;:true,&quot;type&quot;:&quot;text&quot;}"/>
           <p:cNvSpPr txBox="1"/>
           <p:nvPr/>
         </p:nvSpPr>
@@ -4034,7 +4546,7 @@
       </p:sp>
       <p:sp>
         <p:nvSpPr>
-          <p:cNvPr id="89" name=""/>
+          <p:cNvPr id="98" name=""/>
           <p:cNvSpPr/>
           <p:nvPr/>
         </p:nvSpPr>
@@ -4058,12 +4570,15 @@
         </p:spPr>
         <p:txBody>
           <a:bodyPr/>
-          <a:p/>
-        </p:txBody>
-      </p:sp>
-      <p:sp>
-        <p:nvSpPr>
-          <p:cNvPr id="90" name="" descr="{&quot;isTemplate&quot;:true,&quot;type&quot;:&quot;text&quot;}"/>
+          <a:p>
+            <a:pPr/>
+            <a:endParaRPr/>
+          </a:p>
+        </p:txBody>
+      </p:sp>
+      <p:sp>
+        <p:nvSpPr>
+          <p:cNvPr id="99" name="" descr="{&quot;isTemplate&quot;:true,&quot;type&quot;:&quot;text&quot;}"/>
           <p:cNvSpPr txBox="1"/>
           <p:nvPr/>
         </p:nvSpPr>
@@ -4098,7 +4613,7 @@
       </p:sp>
       <p:sp>
         <p:nvSpPr>
-          <p:cNvPr id="91" name="" descr="{&quot;isTemplate&quot;:true,&quot;type&quot;:&quot;text&quot;}"/>
+          <p:cNvPr id="100" name="" descr="{&quot;isTemplate&quot;:true,&quot;type&quot;:&quot;text&quot;}"/>
           <p:cNvSpPr txBox="1"/>
           <p:nvPr/>
         </p:nvSpPr>
@@ -4169,7 +4684,7 @@
       </p:sp>
       <p:sp>
         <p:nvSpPr>
-          <p:cNvPr id="92" name=""/>
+          <p:cNvPr id="101" name=""/>
           <p:cNvSpPr/>
           <p:nvPr/>
         </p:nvSpPr>
@@ -4193,12 +4708,15 @@
         </p:spPr>
         <p:txBody>
           <a:bodyPr/>
-          <a:p/>
-        </p:txBody>
-      </p:sp>
-      <p:sp>
-        <p:nvSpPr>
-          <p:cNvPr id="93" name="" descr="{&quot;isTemplate&quot;:true,&quot;type&quot;:&quot;text&quot;}"/>
+          <a:p>
+            <a:pPr/>
+            <a:endParaRPr/>
+          </a:p>
+        </p:txBody>
+      </p:sp>
+      <p:sp>
+        <p:nvSpPr>
+          <p:cNvPr id="102" name="" descr="{&quot;isTemplate&quot;:true,&quot;type&quot;:&quot;text&quot;}"/>
           <p:cNvSpPr txBox="1"/>
           <p:nvPr/>
         </p:nvSpPr>
@@ -4233,7 +4751,7 @@
       </p:sp>
       <p:sp>
         <p:nvSpPr>
-          <p:cNvPr id="94" name="" descr="{&quot;isTemplate&quot;:true,&quot;type&quot;:&quot;text&quot;}"/>
+          <p:cNvPr id="103" name="" descr="{&quot;isTemplate&quot;:true,&quot;type&quot;:&quot;text&quot;}"/>
           <p:cNvSpPr txBox="1"/>
           <p:nvPr/>
         </p:nvSpPr>
@@ -4304,7 +4822,7 @@
       </p:sp>
       <p:sp>
         <p:nvSpPr>
-          <p:cNvPr id="95" name=""/>
+          <p:cNvPr id="104" name=""/>
           <p:cNvSpPr/>
           <p:nvPr/>
         </p:nvSpPr>
@@ -4328,12 +4846,15 @@
         </p:spPr>
         <p:txBody>
           <a:bodyPr/>
-          <a:p/>
-        </p:txBody>
-      </p:sp>
-      <p:sp>
-        <p:nvSpPr>
-          <p:cNvPr id="96" name="" descr="{&quot;isTemplate&quot;:true,&quot;type&quot;:&quot;text&quot;}"/>
+          <a:p>
+            <a:pPr/>
+            <a:endParaRPr/>
+          </a:p>
+        </p:txBody>
+      </p:sp>
+      <p:sp>
+        <p:nvSpPr>
+          <p:cNvPr id="105" name="" descr="{&quot;isTemplate&quot;:true,&quot;type&quot;:&quot;text&quot;}"/>
           <p:cNvSpPr txBox="1"/>
           <p:nvPr/>
         </p:nvSpPr>
@@ -4368,7 +4889,7 @@
       </p:sp>
       <p:sp>
         <p:nvSpPr>
-          <p:cNvPr id="97" name="" descr="{&quot;isTemplate&quot;:true,&quot;type&quot;:&quot;text&quot;}"/>
+          <p:cNvPr id="106" name="" descr="{&quot;isTemplate&quot;:true,&quot;type&quot;:&quot;text&quot;}"/>
           <p:cNvSpPr txBox="1"/>
           <p:nvPr/>
         </p:nvSpPr>
@@ -4439,7 +4960,7 @@
       </p:sp>
       <p:sp>
         <p:nvSpPr>
-          <p:cNvPr id="98" name=""/>
+          <p:cNvPr id="107" name=""/>
           <p:cNvSpPr/>
           <p:nvPr/>
         </p:nvSpPr>
@@ -4463,12 +4984,15 @@
         </p:spPr>
         <p:txBody>
           <a:bodyPr/>
-          <a:p/>
-        </p:txBody>
-      </p:sp>
-      <p:sp>
-        <p:nvSpPr>
-          <p:cNvPr id="99" name="" descr="{&quot;isTemplate&quot;:true,&quot;type&quot;:&quot;text&quot;}"/>
+          <a:p>
+            <a:pPr/>
+            <a:endParaRPr/>
+          </a:p>
+        </p:txBody>
+      </p:sp>
+      <p:sp>
+        <p:nvSpPr>
+          <p:cNvPr id="108" name="" descr="{&quot;isTemplate&quot;:true,&quot;type&quot;:&quot;text&quot;}"/>
           <p:cNvSpPr txBox="1"/>
           <p:nvPr/>
         </p:nvSpPr>
@@ -4503,7 +5027,7 @@
       </p:sp>
       <p:sp>
         <p:nvSpPr>
-          <p:cNvPr id="100" name="" descr="{&quot;isTemplate&quot;:true,&quot;type&quot;:&quot;text&quot;}"/>
+          <p:cNvPr id="109" name="" descr="{&quot;isTemplate&quot;:true,&quot;type&quot;:&quot;text&quot;}"/>
           <p:cNvSpPr txBox="1"/>
           <p:nvPr/>
         </p:nvSpPr>
@@ -4574,7 +5098,7 @@
       </p:sp>
       <p:sp>
         <p:nvSpPr>
-          <p:cNvPr id="101" name=""/>
+          <p:cNvPr id="110" name=""/>
           <p:cNvSpPr/>
           <p:nvPr/>
         </p:nvSpPr>
@@ -4598,12 +5122,15 @@
         </p:spPr>
         <p:txBody>
           <a:bodyPr/>
-          <a:p/>
-        </p:txBody>
-      </p:sp>
-      <p:sp>
-        <p:nvSpPr>
-          <p:cNvPr id="102" name="" descr="{&quot;isTemplate&quot;:true,&quot;type&quot;:&quot;text&quot;}"/>
+          <a:p>
+            <a:pPr/>
+            <a:endParaRPr/>
+          </a:p>
+        </p:txBody>
+      </p:sp>
+      <p:sp>
+        <p:nvSpPr>
+          <p:cNvPr id="111" name="" descr="{&quot;isTemplate&quot;:true,&quot;type&quot;:&quot;text&quot;}"/>
           <p:cNvSpPr txBox="1"/>
           <p:nvPr/>
         </p:nvSpPr>
@@ -4638,7 +5165,7 @@
       </p:sp>
       <p:sp>
         <p:nvSpPr>
-          <p:cNvPr id="103" name="" descr="{&quot;isTemplate&quot;:true,&quot;type&quot;:&quot;text&quot;}"/>
+          <p:cNvPr id="112" name="" descr="{&quot;isTemplate&quot;:true,&quot;type&quot;:&quot;text&quot;}"/>
           <p:cNvSpPr txBox="1"/>
           <p:nvPr/>
         </p:nvSpPr>
@@ -4709,7 +5236,7 @@
       </p:sp>
       <p:sp>
         <p:nvSpPr>
-          <p:cNvPr id="104" name=""/>
+          <p:cNvPr id="113" name=""/>
           <p:cNvSpPr/>
           <p:nvPr/>
         </p:nvSpPr>
@@ -4728,12 +5255,15 @@
         </p:spPr>
         <p:txBody>
           <a:bodyPr/>
-          <a:p/>
-        </p:txBody>
-      </p:sp>
-      <p:sp>
-        <p:nvSpPr>
-          <p:cNvPr id="105" name="" descr="{&quot;isTemplate&quot;:true,&quot;type&quot;:&quot;text&quot;}"/>
+          <a:p>
+            <a:pPr/>
+            <a:endParaRPr/>
+          </a:p>
+        </p:txBody>
+      </p:sp>
+      <p:sp>
+        <p:nvSpPr>
+          <p:cNvPr id="114" name="" descr="{&quot;isTemplate&quot;:true,&quot;type&quot;:&quot;text&quot;}"/>
           <p:cNvSpPr txBox="1"/>
           <p:nvPr/>
         </p:nvSpPr>
@@ -4768,7 +5298,7 @@
       </p:sp>
       <p:sp>
         <p:nvSpPr>
-          <p:cNvPr id="106" name="" descr="{&quot;isTemplate&quot;:true,&quot;type&quot;:&quot;text&quot;}"/>
+          <p:cNvPr id="115" name="" descr="{&quot;isTemplate&quot;:true,&quot;type&quot;:&quot;text&quot;}"/>
           <p:cNvSpPr txBox="1"/>
           <p:nvPr/>
         </p:nvSpPr>
@@ -4803,7 +5333,7 @@
       </p:sp>
       <p:sp>
         <p:nvSpPr>
-          <p:cNvPr id="107" name="" descr="{&quot;isTemplate&quot;:true,&quot;type&quot;:&quot;text&quot;}"/>
+          <p:cNvPr id="116" name="" descr="{&quot;isTemplate&quot;:true,&quot;type&quot;:&quot;text&quot;}"/>
           <p:cNvSpPr txBox="1"/>
           <p:nvPr/>
         </p:nvSpPr>
@@ -4841,12 +5371,12 @@
 </p:sld>
 </file>
 
-<file path=ppt/slides/slide16.xml><?xml version="1.0" encoding="utf-8"?>
+<file path=ppt/slides/slide7.xml><?xml version="1.0" encoding="utf-8"?>
 <p:sld xmlns:p="http://schemas.openxmlformats.org/presentationml/2006/main" xmlns:r="http://schemas.openxmlformats.org/officeDocument/2006/relationships" xmlns:a="http://schemas.openxmlformats.org/drawingml/2006/main" xmlns:asvg="http://schemas.microsoft.com/office/drawing/2016/SVG/main" xmlns:mc="http://schemas.openxmlformats.org/markup-compatibility/2006" mc:Ignorable="asvg">
   <p:cSld>
     <p:spTree>
       <p:nvGrpSpPr>
-        <p:cNvPr id="108" name="" descr="&lt;Slide style={{ width: 1280, height: 720, background: '#FFFFFF', padding: 40 }}&gt;&#10;  &lt;Box style={{ height: 88, borderBottom: '3px solid #1E4FA8', justifyContent: 'center' }}&gt;&lt;Text style={{ fontSize: 36, color: '#0E3F8C', fontWeight: 'bold' }}&gt;失败不是 0 分：ABSTAIN 与 NO_EFFECTIVE_EVIDENCE&lt;/Text&gt;&lt;/Box&gt;&#10;  &lt;Box style={{ height: 500, flexDirection: 'row', gap: 28, paddingTop: 18 }}&gt;&#10;    &lt;Box style={{ width: 690, height: 470, border: '1px solid #D6DCE5', padding: 12, background: '#F7F9FC' }}&gt;&lt;Image src=&quot;assets/F5_ablation_refusal.svg&quot; style={{ width: 664, height: 444, objectFit: 'contain' }} /&gt;&lt;/Box&gt;&#10;    &lt;Box style={{ width: 460, height: 470, padding: 22, gap: 17 }}&gt;&lt;Text style={{ fontSize: 25, color: '#0E3F8C', fontWeight: 'bold' }}&gt;三个反例&lt;/Text&gt;&lt;Box style={{ background: '#E8EFF8', padding: 14 }}&gt;&lt;Text style={{ fontSize: 20, color: '#1A2230', lineHeight: 1.35 }}&gt;P108：L6 · R=0.375 · Adj=2.25&lt;/Text&gt;&lt;Text style={{ fontSize: 20, color: '#D9534F', fontWeight: 'bold', marginTop: 6 }}&gt;LOW_SUPPORT / ABSTAIN&lt;/Text&gt;&lt;/Box&gt;&lt;Box style={{ background: '#F0F5FC', padding: 14 }}&gt;&lt;Text style={{ fontSize: 20, color: '#1A2230', lineHeight: 1.35 }}&gt;P105：L2 · R=0.375 · Adj=0.75&lt;/Text&gt;&lt;Text style={{ fontSize: 20, color: '#D9534F', fontWeight: 'bold', marginTop: 6 }}&gt;LOW_SUPPORT&lt;/Text&gt;&lt;/Box&gt;&lt;Box style={{ border: '2px solid #D9534F', padding: 14 }}&gt;&lt;Text style={{ fontSize: 20, color: '#1A2230', lineHeight: 1.35 }}&gt;P072 / P035：Adjusted=null&lt;/Text&gt;&lt;Text style={{ fontSize: 20, color: '#D9534F', fontWeight: 'bold', marginTop: 6 }}&gt;NO_EFFECTIVE_EVIDENCE&lt;/Text&gt;&lt;/Box&gt;&lt;Text style={{ fontSize: 20, color: '#4A5568', lineHeight: 1.4 }}&gt;ABSTAIN 是合理输出，不是模型失败。&lt;/Text&gt;&lt;/Box&gt;&#10;  &lt;/Box&gt;&#10;  &lt;Box style={{ height: 40, flexDirection: 'row', justifyContent: 'space-between', alignItems: 'center' }}&gt;&lt;Text style={{ fontSize: 14, color: '#D9534F' }}&gt;无有效证据时不填 0，避免制造虚假的确定性&lt;/Text&gt;&lt;Text style={{ fontSize: 14, color: '#0E3F8C' }}&gt;07 / 10&lt;/Text&gt;&lt;/Box&gt;&#10;&lt;/Slide&gt;"/>
+        <p:cNvPr id="117" name=""/>
         <p:cNvGrpSpPr/>
         <p:nvPr/>
       </p:nvGrpSpPr>
@@ -4860,7 +5390,7 @@
       </p:grpSpPr>
       <p:sp>
         <p:nvSpPr>
-          <p:cNvPr id="109" name=""/>
+          <p:cNvPr id="118" name=""/>
           <p:cNvSpPr/>
           <p:nvPr/>
         </p:nvSpPr>
@@ -4879,12 +5409,15 @@
         </p:spPr>
         <p:txBody>
           <a:bodyPr/>
-          <a:p/>
-        </p:txBody>
-      </p:sp>
-      <p:sp>
-        <p:nvSpPr>
-          <p:cNvPr id="110" name=""/>
+          <a:p>
+            <a:pPr/>
+            <a:endParaRPr/>
+          </a:p>
+        </p:txBody>
+      </p:sp>
+      <p:sp>
+        <p:nvSpPr>
+          <p:cNvPr id="119" name=""/>
           <p:cNvSpPr/>
           <p:nvPr/>
         </p:nvSpPr>
@@ -4919,12 +5452,15 @@
         </p:spPr>
         <p:txBody>
           <a:bodyPr/>
-          <a:p/>
-        </p:txBody>
-      </p:sp>
-      <p:sp>
-        <p:nvSpPr>
-          <p:cNvPr id="111" name="" descr="{&quot;isTemplate&quot;:true,&quot;type&quot;:&quot;text&quot;}"/>
+          <a:p>
+            <a:pPr/>
+            <a:endParaRPr/>
+          </a:p>
+        </p:txBody>
+      </p:sp>
+      <p:sp>
+        <p:nvSpPr>
+          <p:cNvPr id="120" name="" descr="{&quot;isTemplate&quot;:true,&quot;type&quot;:&quot;text&quot;}"/>
           <p:cNvSpPr txBox="1"/>
           <p:nvPr/>
         </p:nvSpPr>
@@ -5009,7 +5545,7 @@
       </p:sp>
       <p:sp>
         <p:nvSpPr>
-          <p:cNvPr id="112" name=""/>
+          <p:cNvPr id="121" name=""/>
           <p:cNvSpPr/>
           <p:nvPr/>
         </p:nvSpPr>
@@ -5033,12 +5569,15 @@
         </p:spPr>
         <p:txBody>
           <a:bodyPr/>
-          <a:p/>
+          <a:p>
+            <a:pPr/>
+            <a:endParaRPr/>
+          </a:p>
         </p:txBody>
       </p:sp>
       <p:pic>
         <p:nvPicPr>
-          <p:cNvPr id="113" name=""/>
+          <p:cNvPr id="122" name=""/>
           <p:cNvPicPr>
             <a:picLocks noChangeAspect="1"/>
           </p:cNvPicPr>
@@ -5070,7 +5609,7 @@
       </p:pic>
       <p:sp>
         <p:nvSpPr>
-          <p:cNvPr id="114" name="" descr="{&quot;isTemplate&quot;:true,&quot;type&quot;:&quot;text&quot;}"/>
+          <p:cNvPr id="123" name="" descr="{&quot;isTemplate&quot;:true,&quot;type&quot;:&quot;text&quot;}"/>
           <p:cNvSpPr txBox="1"/>
           <p:nvPr/>
         </p:nvSpPr>
@@ -5105,7 +5644,7 @@
       </p:sp>
       <p:sp>
         <p:nvSpPr>
-          <p:cNvPr id="115" name=""/>
+          <p:cNvPr id="124" name=""/>
           <p:cNvSpPr/>
           <p:nvPr/>
         </p:nvSpPr>
@@ -5124,12 +5663,15 @@
         </p:spPr>
         <p:txBody>
           <a:bodyPr/>
-          <a:p/>
-        </p:txBody>
-      </p:sp>
-      <p:sp>
-        <p:nvSpPr>
-          <p:cNvPr id="116" name="" descr="{&quot;isTemplate&quot;:true,&quot;type&quot;:&quot;text&quot;}"/>
+          <a:p>
+            <a:pPr/>
+            <a:endParaRPr/>
+          </a:p>
+        </p:txBody>
+      </p:sp>
+      <p:sp>
+        <p:nvSpPr>
+          <p:cNvPr id="125" name="" descr="{&quot;isTemplate&quot;:true,&quot;type&quot;:&quot;text&quot;}"/>
           <p:cNvSpPr txBox="1"/>
           <p:nvPr/>
         </p:nvSpPr>
@@ -5184,7 +5726,7 @@
       </p:sp>
       <p:sp>
         <p:nvSpPr>
-          <p:cNvPr id="117" name="" descr="{&quot;isTemplate&quot;:true,&quot;type&quot;:&quot;text&quot;}"/>
+          <p:cNvPr id="126" name="" descr="{&quot;isTemplate&quot;:true,&quot;type&quot;:&quot;text&quot;}"/>
           <p:cNvSpPr txBox="1"/>
           <p:nvPr/>
         </p:nvSpPr>
@@ -5219,7 +5761,7 @@
       </p:sp>
       <p:sp>
         <p:nvSpPr>
-          <p:cNvPr id="118" name=""/>
+          <p:cNvPr id="127" name=""/>
           <p:cNvSpPr/>
           <p:nvPr/>
         </p:nvSpPr>
@@ -5238,12 +5780,15 @@
         </p:spPr>
         <p:txBody>
           <a:bodyPr/>
-          <a:p/>
-        </p:txBody>
-      </p:sp>
-      <p:sp>
-        <p:nvSpPr>
-          <p:cNvPr id="119" name="" descr="{&quot;isTemplate&quot;:true,&quot;type&quot;:&quot;text&quot;}"/>
+          <a:p>
+            <a:pPr/>
+            <a:endParaRPr/>
+          </a:p>
+        </p:txBody>
+      </p:sp>
+      <p:sp>
+        <p:nvSpPr>
+          <p:cNvPr id="128" name="" descr="{&quot;isTemplate&quot;:true,&quot;type&quot;:&quot;text&quot;}"/>
           <p:cNvSpPr txBox="1"/>
           <p:nvPr/>
         </p:nvSpPr>
@@ -5298,7 +5843,7 @@
       </p:sp>
       <p:sp>
         <p:nvSpPr>
-          <p:cNvPr id="120" name="" descr="{&quot;isTemplate&quot;:true,&quot;type&quot;:&quot;text&quot;}"/>
+          <p:cNvPr id="129" name="" descr="{&quot;isTemplate&quot;:true,&quot;type&quot;:&quot;text&quot;}"/>
           <p:cNvSpPr txBox="1"/>
           <p:nvPr/>
         </p:nvSpPr>
@@ -5333,7 +5878,7 @@
       </p:sp>
       <p:sp>
         <p:nvSpPr>
-          <p:cNvPr id="121" name=""/>
+          <p:cNvPr id="130" name=""/>
           <p:cNvSpPr/>
           <p:nvPr/>
         </p:nvSpPr>
@@ -5354,12 +5899,15 @@
         </p:spPr>
         <p:txBody>
           <a:bodyPr/>
-          <a:p/>
-        </p:txBody>
-      </p:sp>
-      <p:sp>
-        <p:nvSpPr>
-          <p:cNvPr id="122" name="" descr="{&quot;isTemplate&quot;:true,&quot;type&quot;:&quot;text&quot;}"/>
+          <a:p>
+            <a:pPr/>
+            <a:endParaRPr/>
+          </a:p>
+        </p:txBody>
+      </p:sp>
+      <p:sp>
+        <p:nvSpPr>
+          <p:cNvPr id="131" name="" descr="{&quot;isTemplate&quot;:true,&quot;type&quot;:&quot;text&quot;}"/>
           <p:cNvSpPr txBox="1"/>
           <p:nvPr/>
         </p:nvSpPr>
@@ -5414,7 +5962,7 @@
       </p:sp>
       <p:sp>
         <p:nvSpPr>
-          <p:cNvPr id="123" name="" descr="{&quot;isTemplate&quot;:true,&quot;type&quot;:&quot;text&quot;}"/>
+          <p:cNvPr id="132" name="" descr="{&quot;isTemplate&quot;:true,&quot;type&quot;:&quot;text&quot;}"/>
           <p:cNvSpPr txBox="1"/>
           <p:nvPr/>
         </p:nvSpPr>
@@ -5449,7 +5997,7 @@
       </p:sp>
       <p:sp>
         <p:nvSpPr>
-          <p:cNvPr id="124" name="" descr="{&quot;isTemplate&quot;:true,&quot;type&quot;:&quot;text&quot;}"/>
+          <p:cNvPr id="133" name="" descr="{&quot;isTemplate&quot;:true,&quot;type&quot;:&quot;text&quot;}"/>
           <p:cNvSpPr txBox="1"/>
           <p:nvPr/>
         </p:nvSpPr>
@@ -5494,7 +6042,7 @@
       </p:sp>
       <p:sp>
         <p:nvSpPr>
-          <p:cNvPr id="125" name="" descr="{&quot;isTemplate&quot;:true,&quot;type&quot;:&quot;text&quot;}"/>
+          <p:cNvPr id="134" name="" descr="{&quot;isTemplate&quot;:true,&quot;type&quot;:&quot;text&quot;}"/>
           <p:cNvSpPr txBox="1"/>
           <p:nvPr/>
         </p:nvSpPr>
@@ -5549,7 +6097,7 @@
       </p:sp>
       <p:sp>
         <p:nvSpPr>
-          <p:cNvPr id="126" name="" descr="{&quot;isTemplate&quot;:true,&quot;type&quot;:&quot;text&quot;}"/>
+          <p:cNvPr id="135" name="" descr="{&quot;isTemplate&quot;:true,&quot;type&quot;:&quot;text&quot;}"/>
           <p:cNvSpPr txBox="1"/>
           <p:nvPr/>
         </p:nvSpPr>
@@ -5587,12 +6135,12 @@
 </p:sld>
 </file>
 
-<file path=ppt/slides/slide17.xml><?xml version="1.0" encoding="utf-8"?>
+<file path=ppt/slides/slide8.xml><?xml version="1.0" encoding="utf-8"?>
 <p:sld xmlns:p="http://schemas.openxmlformats.org/presentationml/2006/main" xmlns:r="http://schemas.openxmlformats.org/officeDocument/2006/relationships" xmlns:a="http://schemas.openxmlformats.org/drawingml/2006/main" xmlns:asvg="http://schemas.microsoft.com/office/drawing/2016/SVG/main" xmlns:mc="http://schemas.openxmlformats.org/markup-compatibility/2006" mc:Ignorable="asvg">
   <p:cSld>
     <p:spTree>
       <p:nvGrpSpPr>
-        <p:cNvPr id="127" name="" descr="&lt;Slide style={{ width: 1280, height: 720, background: '#FFFFFF', padding: 40 }}&gt;&#10;  &lt;Box style={{ height: 88, borderBottom: '3px solid #1E4FA8', justifyContent: 'center' }}&gt;&lt;Text style={{ fontSize: 36, color: '#0E3F8C', fontWeight: 'bold' }}&gt;Challenger 与外部迁移：支持边界同样重要&lt;/Text&gt;&lt;/Box&gt;&#10;  &lt;Box style={{ height: 500, flexDirection: 'row', gap: 24, paddingTop: 18 }}&gt;&#10;    &lt;Box style={{ width: 440, height: 470, padding: 22, background: '#F0F5FC', gap: 15 }}&gt;&lt;Text style={{ fontSize: 26, color: '#0E3F8C', fontWeight: 'bold' }}&gt;ML Challenger&lt;/Text&gt;&lt;Text style={{ fontSize: 21, color: '#1A2230', lineHeight: 1.45 }}&gt;LogReg ≈ 0.876&lt;br /&gt;Tree ≈ 0.919&lt;br /&gt;RF ≈ 0.922&lt;/Text&gt;&lt;Box style={{ borderTop: '2px solid #1E4FA8', paddingTop: 14 }}&gt;&lt;Text style={{ fontSize: 21, color: '#1A2230', lineHeight: 1.45 }}&gt;RF 跨学期：0.588&lt;br /&gt;缺失后：0.71–0.81&lt;/Text&gt;&lt;/Box&gt;&lt;Text style={{ fontSize: 20, color: '#D9534F', fontWeight: 'bold', lineHeight: 1.35 }}&gt;INSUFFICIENT_FOR_STRONG_ML_CLAIM&lt;/Text&gt;&lt;/Box&gt;&#10;    &lt;Box style={{ width: 720, height: 470, border: '1px solid #D6DCE5', padding: 12, background: '#F7F9FC' }}&gt;&lt;Image src=&quot;assets/F6_external_structural_transfer.svg&quot; style={{ width: 694, height: 444, objectFit: 'contain' }} /&gt;&lt;/Box&gt;&#10;  &lt;/Box&gt;&#10;  &lt;Box style={{ height: 40, flexDirection: 'row', justifyContent: 'space-between', alignItems: 'center' }}&gt;&lt;Text style={{ fontSize: 14, color: '#D9534F' }}&gt;BTC n=1698：Gate1/2 SUPPORTED；Gate3 NOT SUPPORTED；risk-coverage improvement=false&lt;/Text&gt;&lt;Text style={{ fontSize: 14, color: '#0E3F8C' }}&gt;08 / 10&lt;/Text&gt;&lt;/Box&gt;&#10;&lt;/Slide&gt;"/>
+        <p:cNvPr id="136" name=""/>
         <p:cNvGrpSpPr/>
         <p:nvPr/>
       </p:nvGrpSpPr>
@@ -5606,7 +6154,7 @@
       </p:grpSpPr>
       <p:sp>
         <p:nvSpPr>
-          <p:cNvPr id="128" name=""/>
+          <p:cNvPr id="137" name=""/>
           <p:cNvSpPr/>
           <p:nvPr/>
         </p:nvSpPr>
@@ -5625,12 +6173,15 @@
         </p:spPr>
         <p:txBody>
           <a:bodyPr/>
-          <a:p/>
-        </p:txBody>
-      </p:sp>
-      <p:sp>
-        <p:nvSpPr>
-          <p:cNvPr id="129" name=""/>
+          <a:p>
+            <a:pPr/>
+            <a:endParaRPr/>
+          </a:p>
+        </p:txBody>
+      </p:sp>
+      <p:sp>
+        <p:nvSpPr>
+          <p:cNvPr id="138" name=""/>
           <p:cNvSpPr/>
           <p:nvPr/>
         </p:nvSpPr>
@@ -5665,12 +6216,15 @@
         </p:spPr>
         <p:txBody>
           <a:bodyPr/>
-          <a:p/>
-        </p:txBody>
-      </p:sp>
-      <p:sp>
-        <p:nvSpPr>
-          <p:cNvPr id="130" name="" descr="{&quot;isTemplate&quot;:true,&quot;type&quot;:&quot;text&quot;}"/>
+          <a:p>
+            <a:pPr/>
+            <a:endParaRPr/>
+          </a:p>
+        </p:txBody>
+      </p:sp>
+      <p:sp>
+        <p:nvSpPr>
+          <p:cNvPr id="139" name="" descr="{&quot;isTemplate&quot;:true,&quot;type&quot;:&quot;text&quot;}"/>
           <p:cNvSpPr txBox="1"/>
           <p:nvPr/>
         </p:nvSpPr>
@@ -5715,7 +6269,7 @@
       </p:sp>
       <p:sp>
         <p:nvSpPr>
-          <p:cNvPr id="131" name=""/>
+          <p:cNvPr id="140" name=""/>
           <p:cNvSpPr/>
           <p:nvPr/>
         </p:nvSpPr>
@@ -5734,12 +6288,15 @@
         </p:spPr>
         <p:txBody>
           <a:bodyPr/>
-          <a:p/>
-        </p:txBody>
-      </p:sp>
-      <p:sp>
-        <p:nvSpPr>
-          <p:cNvPr id="132" name="" descr="{&quot;isTemplate&quot;:true,&quot;type&quot;:&quot;text&quot;}"/>
+          <a:p>
+            <a:pPr/>
+            <a:endParaRPr/>
+          </a:p>
+        </p:txBody>
+      </p:sp>
+      <p:sp>
+        <p:nvSpPr>
+          <p:cNvPr id="141" name="" descr="{&quot;isTemplate&quot;:true,&quot;type&quot;:&quot;text&quot;}"/>
           <p:cNvSpPr txBox="1"/>
           <p:nvPr/>
         </p:nvSpPr>
@@ -5774,7 +6331,7 @@
       </p:sp>
       <p:sp>
         <p:nvSpPr>
-          <p:cNvPr id="133" name="" descr="{&quot;isTemplate&quot;:true,&quot;type&quot;:&quot;text&quot;}"/>
+          <p:cNvPr id="142" name="" descr="{&quot;isTemplate&quot;:true,&quot;type&quot;:&quot;text&quot;}"/>
           <p:cNvSpPr txBox="1"/>
           <p:nvPr/>
         </p:nvSpPr>
@@ -5845,7 +6402,7 @@
       </p:sp>
       <p:sp>
         <p:nvSpPr>
-          <p:cNvPr id="134" name=""/>
+          <p:cNvPr id="143" name=""/>
           <p:cNvSpPr/>
           <p:nvPr/>
         </p:nvSpPr>
@@ -5880,12 +6437,15 @@
         </p:spPr>
         <p:txBody>
           <a:bodyPr/>
-          <a:p/>
-        </p:txBody>
-      </p:sp>
-      <p:sp>
-        <p:nvSpPr>
-          <p:cNvPr id="135" name="" descr="{&quot;isTemplate&quot;:true,&quot;type&quot;:&quot;text&quot;}"/>
+          <a:p>
+            <a:pPr/>
+            <a:endParaRPr/>
+          </a:p>
+        </p:txBody>
+      </p:sp>
+      <p:sp>
+        <p:nvSpPr>
+          <p:cNvPr id="144" name="" descr="{&quot;isTemplate&quot;:true,&quot;type&quot;:&quot;text&quot;}"/>
           <p:cNvSpPr txBox="1"/>
           <p:nvPr/>
         </p:nvSpPr>
@@ -5968,7 +6528,7 @@
       </p:sp>
       <p:sp>
         <p:nvSpPr>
-          <p:cNvPr id="136" name="" descr="{&quot;isTemplate&quot;:true,&quot;type&quot;:&quot;text&quot;}"/>
+          <p:cNvPr id="145" name="" descr="{&quot;isTemplate&quot;:true,&quot;type&quot;:&quot;text&quot;}"/>
           <p:cNvSpPr txBox="1"/>
           <p:nvPr/>
         </p:nvSpPr>
@@ -6003,7 +6563,7 @@
       </p:sp>
       <p:sp>
         <p:nvSpPr>
-          <p:cNvPr id="137" name=""/>
+          <p:cNvPr id="146" name=""/>
           <p:cNvSpPr/>
           <p:nvPr/>
         </p:nvSpPr>
@@ -6027,12 +6587,15 @@
         </p:spPr>
         <p:txBody>
           <a:bodyPr/>
-          <a:p/>
+          <a:p>
+            <a:pPr/>
+            <a:endParaRPr/>
+          </a:p>
         </p:txBody>
       </p:sp>
       <p:pic>
         <p:nvPicPr>
-          <p:cNvPr id="138" name=""/>
+          <p:cNvPr id="147" name=""/>
           <p:cNvPicPr>
             <a:picLocks noChangeAspect="1"/>
           </p:cNvPicPr>
@@ -6064,7 +6627,7 @@
       </p:pic>
       <p:sp>
         <p:nvSpPr>
-          <p:cNvPr id="139" name="" descr="{&quot;isTemplate&quot;:true,&quot;type&quot;:&quot;text&quot;}"/>
+          <p:cNvPr id="148" name="" descr="{&quot;isTemplate&quot;:true,&quot;type&quot;:&quot;text&quot;}"/>
           <p:cNvSpPr txBox="1"/>
           <p:nvPr/>
         </p:nvSpPr>
@@ -6159,7 +6722,7 @@
       </p:sp>
       <p:sp>
         <p:nvSpPr>
-          <p:cNvPr id="140" name="" descr="{&quot;isTemplate&quot;:true,&quot;type&quot;:&quot;text&quot;}"/>
+          <p:cNvPr id="149" name="" descr="{&quot;isTemplate&quot;:true,&quot;type&quot;:&quot;text&quot;}"/>
           <p:cNvSpPr txBox="1"/>
           <p:nvPr/>
         </p:nvSpPr>
@@ -6197,12 +6760,12 @@
 </p:sld>
 </file>
 
-<file path=ppt/slides/slide18.xml><?xml version="1.0" encoding="utf-8"?>
+<file path=ppt/slides/slide9.xml><?xml version="1.0" encoding="utf-8"?>
 <p:sld xmlns:p="http://schemas.openxmlformats.org/presentationml/2006/main" xmlns:a="http://schemas.openxmlformats.org/drawingml/2006/main">
   <p:cSld>
     <p:spTree>
       <p:nvGrpSpPr>
-        <p:cNvPr id="141" name="" descr="&lt;Slide style={{ width: 1280, height: 720, background: '#FFFFFF', padding: 40 }}&gt;&#10;  &lt;Box style={{ height: 88, borderBottom: '3px solid #1E4FA8', justifyContent: 'center' }}&gt;&lt;Text style={{ fontSize: 36, color: '#0E3F8C', fontWeight: 'bold' }}&gt;研究边界：现在能说什么，不能说什么&lt;/Text&gt;&lt;/Box&gt;&#10;  &lt;Box style={{ height: 500, paddingTop: 18, gap: 18 }}&gt;&#10;    &lt;Box style={{ height: 108, background: '#0E3F8C', padding: 20, flexDirection: 'row', alignItems: 'center', gap: 52 }}&gt;&lt;Text style={{ fontSize: 25, color: '#FFFFFF', fontWeight: 'bold' }}&gt;状态&lt;/Text&gt;&lt;Text style={{ fontSize: 21, color: '#FFFFFF' }}&gt;AI_PROVISIONAL · DEVELOPMENT_ONLY · NOT_HUMAN_VALIDATED&lt;/Text&gt;&lt;/Box&gt;&#10;    &lt;Box style={{ height: 150, flexDirection: 'row', gap: 18 }}&gt;&lt;Box style={{ width: 284, background: '#F0F5FC', padding: 18 }}&gt;&lt;Text style={{ fontSize: 20, color: '#0E3F8C', fontWeight: 'bold' }}&gt;Human Gate&lt;/Text&gt;&lt;Text style={{ fontSize: 20, color: '#1A2230', marginTop: 12, lineHeight: 1.4 }}&gt;R1 = 0/70&lt;br /&gt;R2 = 0/70&lt;br /&gt;Formal Gate = NOT_RUN&lt;/Text&gt;&lt;/Box&gt;&lt;Box style={{ width: 284, background: '#F0F5FC', padding: 18 }}&gt;&lt;Text style={{ fontSize: 20, color: '#0E3F8C', fontWeight: 'bold' }}&gt;AI Increment&lt;/Text&gt;&lt;Text style={{ fontSize: 20, color: '#D9534F', fontWeight: 'bold', marginTop: 12 }}&gt;NOT_SUPPORTED&lt;/Text&gt;&lt;Text style={{ fontSize: 18, color: '#4A5568', marginTop: 8 }}&gt;无合法 paired outcome&lt;/Text&gt;&lt;/Box&gt;&lt;Box style={{ width: 584, background: '#F0F5FC', padding: 18 }}&gt;&lt;Text style={{ fontSize: 20, color: '#0E3F8C', fontWeight: 'bold' }}&gt;可支持的结论级别&lt;/Text&gt;&lt;Text style={{ fontSize: 21, color: '#1A2230', marginTop: 12 }}&gt;descriptive / structural · Evidence Level 1&lt;/Text&gt;&lt;/Box&gt;&lt;/Box&gt;&#10;    &lt;Box style={{ height: 178, border: '2px solid #D9534F', padding: 18 }}&gt;&lt;Text style={{ fontSize: 22, color: '#D9534F', fontWeight: 'bold' }}&gt;不可声称&lt;/Text&gt;&lt;Text style={{ fontSize: 20, color: '#1A2230', marginTop: 10, lineHeight: 1.45 }}&gt;AI 提高学习效果 · causal learning gain · 准确率提升 · 交易优势 · 通用泛化 · ML winner&lt;/Text&gt;&lt;/Box&gt;&#10;  &lt;/Box&gt;&#10;  &lt;Box style={{ height: 40, flexDirection: 'row', justifyContent: 'space-between', alignItems: 'center' }}&gt;&lt;Text style={{ fontSize: 14, color: '#8B97A8' }}&gt;边界不是附注，而是结果可信度的一部分&lt;/Text&gt;&lt;Text style={{ fontSize: 14, color: '#0E3F8C' }}&gt;09 / 10&lt;/Text&gt;&lt;/Box&gt;&#10;&lt;/Slide&gt;"/>
+        <p:cNvPr id="150" name=""/>
         <p:cNvGrpSpPr/>
         <p:nvPr/>
       </p:nvGrpSpPr>
@@ -6216,7 +6779,7 @@
       </p:grpSpPr>
       <p:sp>
         <p:nvSpPr>
-          <p:cNvPr id="142" name=""/>
+          <p:cNvPr id="151" name=""/>
           <p:cNvSpPr/>
           <p:nvPr/>
         </p:nvSpPr>
@@ -6235,12 +6798,15 @@
         </p:spPr>
         <p:txBody>
           <a:bodyPr/>
-          <a:p/>
-        </p:txBody>
-      </p:sp>
-      <p:sp>
-        <p:nvSpPr>
-          <p:cNvPr id="143" name=""/>
+          <a:p>
+            <a:pPr/>
+            <a:endParaRPr/>
+          </a:p>
+        </p:txBody>
+      </p:sp>
+      <p:sp>
+        <p:nvSpPr>
+          <p:cNvPr id="152" name=""/>
           <p:cNvSpPr/>
           <p:nvPr/>
         </p:nvSpPr>
@@ -6275,12 +6841,15 @@
         </p:spPr>
         <p:txBody>
           <a:bodyPr/>
-          <a:p/>
-        </p:txBody>
-      </p:sp>
-      <p:sp>
-        <p:nvSpPr>
-          <p:cNvPr id="144" name="" descr="{&quot;isTemplate&quot;:true,&quot;type&quot;:&quot;text&quot;}"/>
+          <a:p>
+            <a:pPr/>
+            <a:endParaRPr/>
+          </a:p>
+        </p:txBody>
+      </p:sp>
+      <p:sp>
+        <p:nvSpPr>
+          <p:cNvPr id="153" name="" descr="{&quot;isTemplate&quot;:true,&quot;type&quot;:&quot;text&quot;}"/>
           <p:cNvSpPr txBox="1"/>
           <p:nvPr/>
         </p:nvSpPr>
@@ -6315,7 +6884,7 @@
       </p:sp>
       <p:sp>
         <p:nvSpPr>
-          <p:cNvPr id="145" name=""/>
+          <p:cNvPr id="154" name=""/>
           <p:cNvSpPr/>
           <p:nvPr/>
         </p:nvSpPr>
@@ -6334,12 +6903,15 @@
         </p:spPr>
         <p:txBody>
           <a:bodyPr/>
-          <a:p/>
-        </p:txBody>
-      </p:sp>
-      <p:sp>
-        <p:nvSpPr>
-          <p:cNvPr id="146" name="" descr="{&quot;isTemplate&quot;:true,&quot;type&quot;:&quot;text&quot;}"/>
+          <a:p>
+            <a:pPr/>
+            <a:endParaRPr/>
+          </a:p>
+        </p:txBody>
+      </p:sp>
+      <p:sp>
+        <p:nvSpPr>
+          <p:cNvPr id="155" name="" descr="{&quot;isTemplate&quot;:true,&quot;type&quot;:&quot;text&quot;}"/>
           <p:cNvSpPr txBox="1"/>
           <p:nvPr/>
         </p:nvSpPr>
@@ -6374,7 +6946,7 @@
       </p:sp>
       <p:sp>
         <p:nvSpPr>
-          <p:cNvPr id="147" name="" descr="{&quot;isTemplate&quot;:true,&quot;type&quot;:&quot;text&quot;}"/>
+          <p:cNvPr id="156" name="" descr="{&quot;isTemplate&quot;:true,&quot;type&quot;:&quot;text&quot;}"/>
           <p:cNvSpPr txBox="1"/>
           <p:nvPr/>
         </p:nvSpPr>
@@ -6409,7 +6981,7 @@
       </p:sp>
       <p:sp>
         <p:nvSpPr>
-          <p:cNvPr id="148" name=""/>
+          <p:cNvPr id="157" name=""/>
           <p:cNvSpPr/>
           <p:nvPr/>
         </p:nvSpPr>
@@ -6428,12 +7000,15 @@
         </p:spPr>
         <p:txBody>
           <a:bodyPr/>
-          <a:p/>
-        </p:txBody>
-      </p:sp>
-      <p:sp>
-        <p:nvSpPr>
-          <p:cNvPr id="149" name="" descr="{&quot;isTemplate&quot;:true,&quot;type&quot;:&quot;text&quot;}"/>
+          <a:p>
+            <a:pPr/>
+            <a:endParaRPr/>
+          </a:p>
+        </p:txBody>
+      </p:sp>
+      <p:sp>
+        <p:nvSpPr>
+          <p:cNvPr id="158" name="" descr="{&quot;isTemplate&quot;:true,&quot;type&quot;:&quot;text&quot;}"/>
           <p:cNvSpPr txBox="1"/>
           <p:nvPr/>
         </p:nvSpPr>
@@ -6468,7 +7043,7 @@
       </p:sp>
       <p:sp>
         <p:nvSpPr>
-          <p:cNvPr id="150" name="" descr="{&quot;isTemplate&quot;:true,&quot;type&quot;:&quot;text&quot;}"/>
+          <p:cNvPr id="159" name="" descr="{&quot;isTemplate&quot;:true,&quot;type&quot;:&quot;text&quot;}"/>
           <p:cNvSpPr txBox="1"/>
           <p:nvPr/>
         </p:nvSpPr>
@@ -6539,7 +7114,7 @@
       </p:sp>
       <p:sp>
         <p:nvSpPr>
-          <p:cNvPr id="151" name=""/>
+          <p:cNvPr id="160" name=""/>
           <p:cNvSpPr/>
           <p:nvPr/>
         </p:nvSpPr>
@@ -6558,12 +7133,15 @@
         </p:spPr>
         <p:txBody>
           <a:bodyPr/>
-          <a:p/>
-        </p:txBody>
-      </p:sp>
-      <p:sp>
-        <p:nvSpPr>
-          <p:cNvPr id="152" name="" descr="{&quot;isTemplate&quot;:true,&quot;type&quot;:&quot;text&quot;}"/>
+          <a:p>
+            <a:pPr/>
+            <a:endParaRPr/>
+          </a:p>
+        </p:txBody>
+      </p:sp>
+      <p:sp>
+        <p:nvSpPr>
+          <p:cNvPr id="161" name="" descr="{&quot;isTemplate&quot;:true,&quot;type&quot;:&quot;text&quot;}"/>
           <p:cNvSpPr txBox="1"/>
           <p:nvPr/>
         </p:nvSpPr>
@@ -6598,7 +7176,7 @@
       </p:sp>
       <p:sp>
         <p:nvSpPr>
-          <p:cNvPr id="153" name="" descr="{&quot;isTemplate&quot;:true,&quot;type&quot;:&quot;text&quot;}"/>
+          <p:cNvPr id="162" name="" descr="{&quot;isTemplate&quot;:true,&quot;type&quot;:&quot;text&quot;}"/>
           <p:cNvSpPr txBox="1"/>
           <p:nvPr/>
         </p:nvSpPr>
@@ -6633,7 +7211,7 @@
       </p:sp>
       <p:sp>
         <p:nvSpPr>
-          <p:cNvPr id="154" name="" descr="{&quot;isTemplate&quot;:true,&quot;type&quot;:&quot;text&quot;}"/>
+          <p:cNvPr id="163" name="" descr="{&quot;isTemplate&quot;:true,&quot;type&quot;:&quot;text&quot;}"/>
           <p:cNvSpPr txBox="1"/>
           <p:nvPr/>
         </p:nvSpPr>
@@ -6678,7 +7256,7 @@
       </p:sp>
       <p:sp>
         <p:nvSpPr>
-          <p:cNvPr id="155" name=""/>
+          <p:cNvPr id="164" name=""/>
           <p:cNvSpPr/>
           <p:nvPr/>
         </p:nvSpPr>
@@ -6697,12 +7275,15 @@
         </p:spPr>
         <p:txBody>
           <a:bodyPr/>
-          <a:p/>
-        </p:txBody>
-      </p:sp>
-      <p:sp>
-        <p:nvSpPr>
-          <p:cNvPr id="156" name="" descr="{&quot;isTemplate&quot;:true,&quot;type&quot;:&quot;text&quot;}"/>
+          <a:p>
+            <a:pPr/>
+            <a:endParaRPr/>
+          </a:p>
+        </p:txBody>
+      </p:sp>
+      <p:sp>
+        <p:nvSpPr>
+          <p:cNvPr id="165" name="" descr="{&quot;isTemplate&quot;:true,&quot;type&quot;:&quot;text&quot;}"/>
           <p:cNvSpPr txBox="1"/>
           <p:nvPr/>
         </p:nvSpPr>
@@ -6737,7 +7318,7 @@
       </p:sp>
       <p:sp>
         <p:nvSpPr>
-          <p:cNvPr id="157" name="" descr="{&quot;isTemplate&quot;:true,&quot;type&quot;:&quot;text&quot;}"/>
+          <p:cNvPr id="166" name="" descr="{&quot;isTemplate&quot;:true,&quot;type&quot;:&quot;text&quot;}"/>
           <p:cNvSpPr txBox="1"/>
           <p:nvPr/>
         </p:nvSpPr>
@@ -6772,7 +7353,7 @@
       </p:sp>
       <p:sp>
         <p:nvSpPr>
-          <p:cNvPr id="158" name=""/>
+          <p:cNvPr id="167" name=""/>
           <p:cNvSpPr/>
           <p:nvPr/>
         </p:nvSpPr>
@@ -6793,12 +7374,15 @@
         </p:spPr>
         <p:txBody>
           <a:bodyPr/>
-          <a:p/>
-        </p:txBody>
-      </p:sp>
-      <p:sp>
-        <p:nvSpPr>
-          <p:cNvPr id="159" name="" descr="{&quot;isTemplate&quot;:true,&quot;type&quot;:&quot;text&quot;}"/>
+          <a:p>
+            <a:pPr/>
+            <a:endParaRPr/>
+          </a:p>
+        </p:txBody>
+      </p:sp>
+      <p:sp>
+        <p:nvSpPr>
+          <p:cNvPr id="168" name="" descr="{&quot;isTemplate&quot;:true,&quot;type&quot;:&quot;text&quot;}"/>
           <p:cNvSpPr txBox="1"/>
           <p:nvPr/>
         </p:nvSpPr>
@@ -6833,7 +7417,7 @@
       </p:sp>
       <p:sp>
         <p:nvSpPr>
-          <p:cNvPr id="160" name="" descr="{&quot;isTemplate&quot;:true,&quot;type&quot;:&quot;text&quot;}"/>
+          <p:cNvPr id="169" name="" descr="{&quot;isTemplate&quot;:true,&quot;type&quot;:&quot;text&quot;}"/>
           <p:cNvSpPr txBox="1"/>
           <p:nvPr/>
         </p:nvSpPr>
@@ -6948,7 +7532,7 @@
       </p:sp>
       <p:sp>
         <p:nvSpPr>
-          <p:cNvPr id="161" name="" descr="{&quot;isTemplate&quot;:true,&quot;type&quot;:&quot;text&quot;}"/>
+          <p:cNvPr id="170" name="" descr="{&quot;isTemplate&quot;:true,&quot;type&quot;:&quot;text&quot;}"/>
           <p:cNvSpPr txBox="1"/>
           <p:nvPr/>
         </p:nvSpPr>
@@ -6983,7 +7567,7 @@
       </p:sp>
       <p:sp>
         <p:nvSpPr>
-          <p:cNvPr id="162" name="" descr="{&quot;isTemplate&quot;:true,&quot;type&quot;:&quot;text&quot;}"/>
+          <p:cNvPr id="171" name="" descr="{&quot;isTemplate&quot;:true,&quot;type&quot;:&quot;text&quot;}"/>
           <p:cNvSpPr txBox="1"/>
           <p:nvPr/>
         </p:nvSpPr>
@@ -7011,4926 +7595,6 @@
                 <a:ea typeface="Microsoft YaHei"/>
               </a:rPr>
               <a:t>09 / 10</a:t>
-            </a:r>
-            <a:endParaRPr/>
-          </a:p>
-        </p:txBody>
-      </p:sp>
-    </p:spTree>
-  </p:cSld>
-</p:sld>
-</file>
-
-<file path=ppt/slides/slide19.xml><?xml version="1.0" encoding="utf-8"?>
-<p:sld xmlns:p="http://schemas.openxmlformats.org/presentationml/2006/main" xmlns:a="http://schemas.openxmlformats.org/drawingml/2006/main">
-  <p:cSld>
-    <p:spTree>
-      <p:nvGrpSpPr>
-        <p:cNvPr id="163" name="" descr="&lt;Slide style={{ width: 1280, height: 720, background: '#F7F9FC', padding: 40 }}&gt;&#10;  &lt;Box style={{ height: 100, background: '#0E3F8C', padding: 22, justifyContent: 'center' }}&gt;&lt;Text style={{ fontSize: 38, color: '#FFFFFF', fontWeight: 'bold' }}&gt;结论与现场 Demo&lt;/Text&gt;&lt;/Box&gt;&#10;  &lt;Box style={{ height: 220, padding: 32, justifyContent: 'center', background: '#E8EFF8' }}&gt;&lt;Text style={{ fontSize: 34, color: '#1E4FA8', fontWeight: 'bold' }}&gt;Score Stability ≠ Evidence Support Stability&lt;/Text&gt;&lt;Text style={{ fontSize: 23, color: '#1A2230', marginTop: 14 }}&gt;稳定的 score 不能替代稳定的 evidence support。&lt;/Text&gt;&lt;/Box&gt;&#10;  &lt;Box style={{ height: 260, paddingTop: 26, flexDirection: 'row', gap: 16 }}&gt;&lt;Box style={{ width: 270, height: 180, background: '#FFFFFF', border: '1px solid #D6DCE5', padding: 20 }}&gt;&lt;Text style={{ fontSize: 21, color: '#1E4FA8', fontWeight: 'bold' }}&gt;01 研究问题&lt;/Text&gt;&lt;Text style={{ fontSize: 18, color: '#4A5568', marginTop: 14, lineHeight: 1.4 }}&gt;Observed result 能否可靠解释？&lt;/Text&gt;&lt;/Box&gt;&lt;Box style={{ width: 270, height: 180, background: '#FFFFFF', border: '1px solid #D6DCE5', padding: 20 }}&gt;&lt;Text style={{ fontSize: 21, color: '#1E4FA8', fontWeight: 'bold' }}&gt;02 模型链路&lt;/Text&gt;&lt;Text style={{ fontSize: 18, color: '#4A5568', marginTop: 14, lineHeight: 1.4 }}&gt;Raw → Reliability → Support&lt;/Text&gt;&lt;/Box&gt;&lt;Box style={{ width: 270, height: 180, background: '#FFFFFF', border: '1px solid #D6DCE5', padding: 20 }}&gt;&lt;Text style={{ fontSize: 21, color: '#1E4FA8', fontWeight: 'bold' }}&gt;03 主结果&lt;/Text&gt;&lt;Text style={{ fontSize: 18, color: '#4A5568', marginTop: 14, lineHeight: 1.4 }}&gt;70 / 16 / 54；coverage 下降&lt;/Text&gt;&lt;/Box&gt;&lt;Box style={{ width: 270, height: 180, background: '#FFFFFF', border: '2px solid #D9534F', padding: 20 }}&gt;&lt;Text style={{ fontSize: 21, color: '#D9534F', fontWeight: 'bold' }}&gt;04 失败案例&lt;/Text&gt;&lt;Text style={{ fontSize: 18, color: '#4A5568', marginTop: 14, lineHeight: 1.4 }}&gt;P108 → ABSTAIN&lt;/Text&gt;&lt;/Box&gt;&lt;/Box&gt;&#10;  &lt;Box style={{ height: 50, flexDirection: 'row', justifyContent: 'space-between', alignItems: 'center' }}&gt;&lt;Text style={{ fontSize: 16, color: '#8B97A8' }}&gt;现场 fallback：离线 Demo + F1–F6 冻结图&lt;/Text&gt;&lt;Text style={{ fontSize: 14, color: '#0E3F8C' }}&gt;10 / 10&lt;/Text&gt;&lt;/Box&gt;&#10;&lt;/Slide&gt;"/>
-        <p:cNvGrpSpPr/>
-        <p:nvPr/>
-      </p:nvGrpSpPr>
-      <p:grpSpPr>
-        <a:xfrm>
-          <a:off x="0" y="0"/>
-          <a:ext cx="0" cy="0"/>
-          <a:chOff x="0" y="0"/>
-          <a:chExt cx="0" cy="0"/>
-        </a:xfrm>
-      </p:grpSpPr>
-      <p:sp>
-        <p:nvSpPr>
-          <p:cNvPr id="164" name=""/>
-          <p:cNvSpPr/>
-          <p:nvPr/>
-        </p:nvSpPr>
-        <p:spPr>
-          <a:xfrm rot="0" flipH="0" flipV="0">
-            <a:off x="0" y="0"/>
-            <a:ext cx="12192000" cy="6858000"/>
-          </a:xfrm>
-          <a:prstGeom prst="rect">
-            <a:avLst/>
-          </a:prstGeom>
-          <a:solidFill>
-            <a:srgbClr val="F7F9FC"/>
-          </a:solidFill>
-          <a:ln/>
-        </p:spPr>
-        <p:txBody>
-          <a:bodyPr/>
-          <a:p/>
-        </p:txBody>
-      </p:sp>
-      <p:sp>
-        <p:nvSpPr>
-          <p:cNvPr id="165" name=""/>
-          <p:cNvSpPr/>
-          <p:nvPr/>
-        </p:nvSpPr>
-        <p:spPr>
-          <a:xfrm rot="0" flipH="0" flipV="0">
-            <a:off x="381000" y="381000"/>
-            <a:ext cx="11430000" cy="952500"/>
-          </a:xfrm>
-          <a:prstGeom prst="rect">
-            <a:avLst/>
-          </a:prstGeom>
-          <a:solidFill>
-            <a:srgbClr val="0E3F8C"/>
-          </a:solidFill>
-          <a:ln/>
-        </p:spPr>
-        <p:txBody>
-          <a:bodyPr/>
-          <a:p/>
-        </p:txBody>
-      </p:sp>
-      <p:sp>
-        <p:nvSpPr>
-          <p:cNvPr id="166" name="" descr="{&quot;isTemplate&quot;:true,&quot;type&quot;:&quot;text&quot;}"/>
-          <p:cNvSpPr txBox="1"/>
-          <p:nvPr/>
-        </p:nvSpPr>
-        <p:spPr>
-          <a:xfrm rot="0" flipH="0" flipV="0">
-            <a:off x="590550" y="638175"/>
-            <a:ext cx="11010900" cy="438150"/>
-          </a:xfrm>
-          <a:prstGeom prst="rect"/>
-        </p:spPr>
-        <p:txBody>
-          <a:bodyPr wrap="none" lIns="0" tIns="0" rIns="0" bIns="0"/>
-          <a:p>
-            <a:pPr>
-              <a:lnSpc>
-                <a:spcPct val="100000"/>
-              </a:lnSpc>
-            </a:pPr>
-            <a:r>
-              <a:rPr lang="zh-CN" sz="2850" b="1">
-                <a:solidFill>
-                  <a:srgbClr val="FFFFFF"/>
-                </a:solidFill>
-                <a:latin typeface="Microsoft YaHei"/>
-                <a:ea typeface="Microsoft YaHei"/>
-              </a:rPr>
-              <a:t>结论与现场</a:t>
-            </a:r>
-            <a:r>
-              <a:rPr lang="en-US" sz="2850" b="1">
-                <a:solidFill>
-                  <a:srgbClr val="FFFFFF"/>
-                </a:solidFill>
-                <a:latin typeface="Microsoft YaHei"/>
-                <a:ea typeface="Microsoft YaHei"/>
-              </a:rPr>
-              <a:t> Demo</a:t>
-            </a:r>
-            <a:endParaRPr/>
-          </a:p>
-        </p:txBody>
-      </p:sp>
-      <p:sp>
-        <p:nvSpPr>
-          <p:cNvPr id="167" name=""/>
-          <p:cNvSpPr/>
-          <p:nvPr/>
-        </p:nvSpPr>
-        <p:spPr>
-          <a:xfrm rot="0" flipH="0" flipV="0">
-            <a:off x="381000" y="1333500"/>
-            <a:ext cx="11430000" cy="2095500"/>
-          </a:xfrm>
-          <a:prstGeom prst="rect">
-            <a:avLst/>
-          </a:prstGeom>
-          <a:solidFill>
-            <a:srgbClr val="E8EFF8"/>
-          </a:solidFill>
-          <a:ln/>
-        </p:spPr>
-        <p:txBody>
-          <a:bodyPr/>
-          <a:p/>
-        </p:txBody>
-      </p:sp>
-      <p:sp>
-        <p:nvSpPr>
-          <p:cNvPr id="168" name="" descr="{&quot;isTemplate&quot;:true,&quot;type&quot;:&quot;text&quot;}"/>
-          <p:cNvSpPr txBox="1"/>
-          <p:nvPr/>
-        </p:nvSpPr>
-        <p:spPr>
-          <a:xfrm rot="0" flipH="0" flipV="0">
-            <a:off x="685800" y="1990725"/>
-            <a:ext cx="10820400" cy="390525"/>
-          </a:xfrm>
-          <a:prstGeom prst="rect"/>
-        </p:spPr>
-        <p:txBody>
-          <a:bodyPr wrap="none" lIns="0" tIns="0" rIns="0" bIns="0"/>
-          <a:p>
-            <a:pPr>
-              <a:lnSpc>
-                <a:spcPct val="100000"/>
-              </a:lnSpc>
-            </a:pPr>
-            <a:r>
-              <a:rPr lang="en-US" sz="2550" b="1">
-                <a:solidFill>
-                  <a:srgbClr val="1E4FA8"/>
-                </a:solidFill>
-                <a:latin typeface="Microsoft YaHei"/>
-                <a:ea typeface="Microsoft YaHei"/>
-              </a:rPr>
-              <a:t>Score Stability ≠ Evidence Support Stability</a:t>
-            </a:r>
-            <a:endParaRPr/>
-          </a:p>
-        </p:txBody>
-      </p:sp>
-      <p:sp>
-        <p:nvSpPr>
-          <p:cNvPr id="169" name="" descr="{&quot;isTemplate&quot;:true,&quot;type&quot;:&quot;text&quot;}"/>
-          <p:cNvSpPr txBox="1"/>
-          <p:nvPr/>
-        </p:nvSpPr>
-        <p:spPr>
-          <a:xfrm rot="0" flipH="0" flipV="0">
-            <a:off x="685800" y="2514600"/>
-            <a:ext cx="10820400" cy="266700"/>
-          </a:xfrm>
-          <a:prstGeom prst="rect"/>
-        </p:spPr>
-        <p:txBody>
-          <a:bodyPr wrap="none" lIns="0" tIns="0" rIns="0" bIns="0"/>
-          <a:p>
-            <a:pPr>
-              <a:lnSpc>
-                <a:spcPct val="100000"/>
-              </a:lnSpc>
-            </a:pPr>
-            <a:r>
-              <a:rPr lang="zh-CN" sz="1725">
-                <a:solidFill>
-                  <a:srgbClr val="1A2230"/>
-                </a:solidFill>
-                <a:latin typeface="Microsoft YaHei"/>
-                <a:ea typeface="Microsoft YaHei"/>
-              </a:rPr>
-              <a:t>稳定的</a:t>
-            </a:r>
-            <a:r>
-              <a:rPr lang="en-US" sz="1725">
-                <a:solidFill>
-                  <a:srgbClr val="1A2230"/>
-                </a:solidFill>
-                <a:latin typeface="Microsoft YaHei"/>
-                <a:ea typeface="Microsoft YaHei"/>
-              </a:rPr>
-              <a:t> score </a:t>
-            </a:r>
-            <a:r>
-              <a:rPr lang="zh-CN" sz="1725">
-                <a:solidFill>
-                  <a:srgbClr val="1A2230"/>
-                </a:solidFill>
-                <a:latin typeface="Microsoft YaHei"/>
-                <a:ea typeface="Microsoft YaHei"/>
-              </a:rPr>
-              <a:t>不能替代稳定的</a:t>
-            </a:r>
-            <a:r>
-              <a:rPr lang="en-US" sz="1725">
-                <a:solidFill>
-                  <a:srgbClr val="1A2230"/>
-                </a:solidFill>
-                <a:latin typeface="Microsoft YaHei"/>
-                <a:ea typeface="Microsoft YaHei"/>
-              </a:rPr>
-              <a:t> evidence support</a:t>
-            </a:r>
-            <a:r>
-              <a:rPr lang="zh-CN" sz="1725">
-                <a:solidFill>
-                  <a:srgbClr val="1A2230"/>
-                </a:solidFill>
-                <a:latin typeface="Microsoft YaHei"/>
-                <a:ea typeface="Microsoft YaHei"/>
-              </a:rPr>
-              <a:t>。</a:t>
-            </a:r>
-            <a:endParaRPr/>
-          </a:p>
-        </p:txBody>
-      </p:sp>
-      <p:sp>
-        <p:nvSpPr>
-          <p:cNvPr id="170" name=""/>
-          <p:cNvSpPr/>
-          <p:nvPr/>
-        </p:nvSpPr>
-        <p:spPr>
-          <a:xfrm rot="0" flipH="0" flipV="0">
-            <a:off x="381000" y="3676650"/>
-            <a:ext cx="2571750" cy="1714500"/>
-          </a:xfrm>
-          <a:prstGeom prst="rect">
-            <a:avLst/>
-          </a:prstGeom>
-          <a:solidFill>
-            <a:srgbClr val="FFFFFF"/>
-          </a:solidFill>
-          <a:ln w="12700">
-            <a:solidFill>
-              <a:srgbClr val="D6DCE5"/>
-            </a:solidFill>
-            <a:prstDash val="solid"/>
-          </a:ln>
-        </p:spPr>
-        <p:txBody>
-          <a:bodyPr/>
-          <a:p/>
-        </p:txBody>
-      </p:sp>
-      <p:sp>
-        <p:nvSpPr>
-          <p:cNvPr id="171" name="" descr="{&quot;isTemplate&quot;:true,&quot;type&quot;:&quot;text&quot;}"/>
-          <p:cNvSpPr txBox="1"/>
-          <p:nvPr/>
-        </p:nvSpPr>
-        <p:spPr>
-          <a:xfrm rot="0" flipH="0" flipV="0">
-            <a:off x="571500" y="3867150"/>
-            <a:ext cx="2190750" cy="247650"/>
-          </a:xfrm>
-          <a:prstGeom prst="rect"/>
-        </p:spPr>
-        <p:txBody>
-          <a:bodyPr wrap="none" lIns="0" tIns="0" rIns="0" bIns="0"/>
-          <a:p>
-            <a:pPr>
-              <a:lnSpc>
-                <a:spcPct val="100000"/>
-              </a:lnSpc>
-            </a:pPr>
-            <a:r>
-              <a:rPr lang="en-US" sz="1575" b="1">
-                <a:solidFill>
-                  <a:srgbClr val="1E4FA8"/>
-                </a:solidFill>
-                <a:latin typeface="Microsoft YaHei"/>
-                <a:ea typeface="Microsoft YaHei"/>
-              </a:rPr>
-              <a:t>01 </a:t>
-            </a:r>
-            <a:r>
-              <a:rPr lang="zh-CN" sz="1575" b="1">
-                <a:solidFill>
-                  <a:srgbClr val="1E4FA8"/>
-                </a:solidFill>
-                <a:latin typeface="Microsoft YaHei"/>
-                <a:ea typeface="Microsoft YaHei"/>
-              </a:rPr>
-              <a:t>研究问题</a:t>
-            </a:r>
-            <a:endParaRPr/>
-          </a:p>
-        </p:txBody>
-      </p:sp>
-      <p:sp>
-        <p:nvSpPr>
-          <p:cNvPr id="172" name="" descr="{&quot;isTemplate&quot;:true,&quot;type&quot;:&quot;text&quot;}"/>
-          <p:cNvSpPr txBox="1"/>
-          <p:nvPr/>
-        </p:nvSpPr>
-        <p:spPr>
-          <a:xfrm rot="0" flipH="0" flipV="0">
-            <a:off x="571500" y="4248150"/>
-            <a:ext cx="2190750" cy="581025"/>
-          </a:xfrm>
-          <a:prstGeom prst="rect"/>
-        </p:spPr>
-        <p:txBody>
-          <a:bodyPr wrap="square" lIns="0" tIns="0" rIns="0" bIns="0">
-            <a:normAutofit/>
-          </a:bodyPr>
-          <a:p>
-            <a:pPr>
-              <a:lnSpc>
-                <a:spcPct val="140000"/>
-              </a:lnSpc>
-            </a:pPr>
-            <a:r>
-              <a:rPr lang="en-US" sz="1350">
-                <a:solidFill>
-                  <a:srgbClr val="4A5568"/>
-                </a:solidFill>
-                <a:latin typeface="Microsoft YaHei"/>
-                <a:ea typeface="Microsoft YaHei"/>
-              </a:rPr>
-              <a:t>Observed result </a:t>
-            </a:r>
-            <a:r>
-              <a:rPr lang="zh-CN" sz="1350">
-                <a:solidFill>
-                  <a:srgbClr val="4A5568"/>
-                </a:solidFill>
-                <a:latin typeface="Microsoft YaHei"/>
-                <a:ea typeface="Microsoft YaHei"/>
-              </a:rPr>
-              <a:t>能否可靠解释？</a:t>
-            </a:r>
-            <a:endParaRPr/>
-          </a:p>
-        </p:txBody>
-      </p:sp>
-      <p:sp>
-        <p:nvSpPr>
-          <p:cNvPr id="173" name=""/>
-          <p:cNvSpPr/>
-          <p:nvPr/>
-        </p:nvSpPr>
-        <p:spPr>
-          <a:xfrm rot="0" flipH="0" flipV="0">
-            <a:off x="3105150" y="3676650"/>
-            <a:ext cx="2571750" cy="1714500"/>
-          </a:xfrm>
-          <a:prstGeom prst="rect">
-            <a:avLst/>
-          </a:prstGeom>
-          <a:solidFill>
-            <a:srgbClr val="FFFFFF"/>
-          </a:solidFill>
-          <a:ln w="12700">
-            <a:solidFill>
-              <a:srgbClr val="D6DCE5"/>
-            </a:solidFill>
-            <a:prstDash val="solid"/>
-          </a:ln>
-        </p:spPr>
-        <p:txBody>
-          <a:bodyPr/>
-          <a:p/>
-        </p:txBody>
-      </p:sp>
-      <p:sp>
-        <p:nvSpPr>
-          <p:cNvPr id="174" name="" descr="{&quot;isTemplate&quot;:true,&quot;type&quot;:&quot;text&quot;}"/>
-          <p:cNvSpPr txBox="1"/>
-          <p:nvPr/>
-        </p:nvSpPr>
-        <p:spPr>
-          <a:xfrm rot="0" flipH="0" flipV="0">
-            <a:off x="3295650" y="3867150"/>
-            <a:ext cx="2190750" cy="247650"/>
-          </a:xfrm>
-          <a:prstGeom prst="rect"/>
-        </p:spPr>
-        <p:txBody>
-          <a:bodyPr wrap="none" lIns="0" tIns="0" rIns="0" bIns="0"/>
-          <a:p>
-            <a:pPr>
-              <a:lnSpc>
-                <a:spcPct val="100000"/>
-              </a:lnSpc>
-            </a:pPr>
-            <a:r>
-              <a:rPr lang="en-US" sz="1575" b="1">
-                <a:solidFill>
-                  <a:srgbClr val="1E4FA8"/>
-                </a:solidFill>
-                <a:latin typeface="Microsoft YaHei"/>
-                <a:ea typeface="Microsoft YaHei"/>
-              </a:rPr>
-              <a:t>02 </a:t>
-            </a:r>
-            <a:r>
-              <a:rPr lang="zh-CN" sz="1575" b="1">
-                <a:solidFill>
-                  <a:srgbClr val="1E4FA8"/>
-                </a:solidFill>
-                <a:latin typeface="Microsoft YaHei"/>
-                <a:ea typeface="Microsoft YaHei"/>
-              </a:rPr>
-              <a:t>模型链路</a:t>
-            </a:r>
-            <a:endParaRPr/>
-          </a:p>
-        </p:txBody>
-      </p:sp>
-      <p:sp>
-        <p:nvSpPr>
-          <p:cNvPr id="175" name="" descr="{&quot;isTemplate&quot;:true,&quot;type&quot;:&quot;text&quot;}"/>
-          <p:cNvSpPr txBox="1"/>
-          <p:nvPr/>
-        </p:nvSpPr>
-        <p:spPr>
-          <a:xfrm rot="0" flipH="0" flipV="0">
-            <a:off x="3295650" y="4248150"/>
-            <a:ext cx="2190750" cy="581025"/>
-          </a:xfrm>
-          <a:prstGeom prst="rect"/>
-        </p:spPr>
-        <p:txBody>
-          <a:bodyPr wrap="square" lIns="0" tIns="0" rIns="0" bIns="0">
-            <a:normAutofit/>
-          </a:bodyPr>
-          <a:p>
-            <a:pPr>
-              <a:lnSpc>
-                <a:spcPct val="140000"/>
-              </a:lnSpc>
-            </a:pPr>
-            <a:r>
-              <a:rPr lang="en-US" sz="1350">
-                <a:solidFill>
-                  <a:srgbClr val="4A5568"/>
-                </a:solidFill>
-                <a:latin typeface="Microsoft YaHei"/>
-                <a:ea typeface="Microsoft YaHei"/>
-              </a:rPr>
-              <a:t>Raw → Reliability → Support</a:t>
-            </a:r>
-            <a:endParaRPr/>
-          </a:p>
-        </p:txBody>
-      </p:sp>
-      <p:sp>
-        <p:nvSpPr>
-          <p:cNvPr id="176" name=""/>
-          <p:cNvSpPr/>
-          <p:nvPr/>
-        </p:nvSpPr>
-        <p:spPr>
-          <a:xfrm rot="0" flipH="0" flipV="0">
-            <a:off x="5829300" y="3676650"/>
-            <a:ext cx="2571750" cy="1714500"/>
-          </a:xfrm>
-          <a:prstGeom prst="rect">
-            <a:avLst/>
-          </a:prstGeom>
-          <a:solidFill>
-            <a:srgbClr val="FFFFFF"/>
-          </a:solidFill>
-          <a:ln w="12700">
-            <a:solidFill>
-              <a:srgbClr val="D6DCE5"/>
-            </a:solidFill>
-            <a:prstDash val="solid"/>
-          </a:ln>
-        </p:spPr>
-        <p:txBody>
-          <a:bodyPr/>
-          <a:p/>
-        </p:txBody>
-      </p:sp>
-      <p:sp>
-        <p:nvSpPr>
-          <p:cNvPr id="177" name="" descr="{&quot;isTemplate&quot;:true,&quot;type&quot;:&quot;text&quot;}"/>
-          <p:cNvSpPr txBox="1"/>
-          <p:nvPr/>
-        </p:nvSpPr>
-        <p:spPr>
-          <a:xfrm rot="0" flipH="0" flipV="0">
-            <a:off x="6019800" y="3867150"/>
-            <a:ext cx="2190750" cy="247650"/>
-          </a:xfrm>
-          <a:prstGeom prst="rect"/>
-        </p:spPr>
-        <p:txBody>
-          <a:bodyPr wrap="none" lIns="0" tIns="0" rIns="0" bIns="0"/>
-          <a:p>
-            <a:pPr>
-              <a:lnSpc>
-                <a:spcPct val="100000"/>
-              </a:lnSpc>
-            </a:pPr>
-            <a:r>
-              <a:rPr lang="en-US" sz="1575" b="1">
-                <a:solidFill>
-                  <a:srgbClr val="1E4FA8"/>
-                </a:solidFill>
-                <a:latin typeface="Microsoft YaHei"/>
-                <a:ea typeface="Microsoft YaHei"/>
-              </a:rPr>
-              <a:t>03 </a:t>
-            </a:r>
-            <a:r>
-              <a:rPr lang="zh-CN" sz="1575" b="1">
-                <a:solidFill>
-                  <a:srgbClr val="1E4FA8"/>
-                </a:solidFill>
-                <a:latin typeface="Microsoft YaHei"/>
-                <a:ea typeface="Microsoft YaHei"/>
-              </a:rPr>
-              <a:t>主结果</a:t>
-            </a:r>
-            <a:endParaRPr/>
-          </a:p>
-        </p:txBody>
-      </p:sp>
-      <p:sp>
-        <p:nvSpPr>
-          <p:cNvPr id="178" name="" descr="{&quot;isTemplate&quot;:true,&quot;type&quot;:&quot;text&quot;}"/>
-          <p:cNvSpPr txBox="1"/>
-          <p:nvPr/>
-        </p:nvSpPr>
-        <p:spPr>
-          <a:xfrm rot="0" flipH="0" flipV="0">
-            <a:off x="6019800" y="4248150"/>
-            <a:ext cx="2190750" cy="581025"/>
-          </a:xfrm>
-          <a:prstGeom prst="rect"/>
-        </p:spPr>
-        <p:txBody>
-          <a:bodyPr wrap="square" lIns="0" tIns="0" rIns="0" bIns="0">
-            <a:normAutofit/>
-          </a:bodyPr>
-          <a:p>
-            <a:pPr>
-              <a:lnSpc>
-                <a:spcPct val="140000"/>
-              </a:lnSpc>
-            </a:pPr>
-            <a:r>
-              <a:rPr lang="en-US" sz="1350">
-                <a:solidFill>
-                  <a:srgbClr val="4A5568"/>
-                </a:solidFill>
-                <a:latin typeface="Microsoft YaHei"/>
-                <a:ea typeface="Microsoft YaHei"/>
-              </a:rPr>
-              <a:t>70 / 16 / 54</a:t>
-            </a:r>
-            <a:r>
-              <a:rPr lang="zh-CN" sz="1350">
-                <a:solidFill>
-                  <a:srgbClr val="4A5568"/>
-                </a:solidFill>
-                <a:latin typeface="Microsoft YaHei"/>
-                <a:ea typeface="Microsoft YaHei"/>
-              </a:rPr>
-              <a:t>；</a:t>
-            </a:r>
-            <a:r>
-              <a:rPr lang="en-US" sz="1350">
-                <a:solidFill>
-                  <a:srgbClr val="4A5568"/>
-                </a:solidFill>
-                <a:latin typeface="Microsoft YaHei"/>
-                <a:ea typeface="Microsoft YaHei"/>
-              </a:rPr>
-              <a:t>coverage </a:t>
-            </a:r>
-            <a:r>
-              <a:rPr lang="zh-CN" sz="1350">
-                <a:solidFill>
-                  <a:srgbClr val="4A5568"/>
-                </a:solidFill>
-                <a:latin typeface="Microsoft YaHei"/>
-                <a:ea typeface="Microsoft YaHei"/>
-              </a:rPr>
-              <a:t>下降</a:t>
-            </a:r>
-            <a:endParaRPr/>
-          </a:p>
-        </p:txBody>
-      </p:sp>
-      <p:sp>
-        <p:nvSpPr>
-          <p:cNvPr id="179" name=""/>
-          <p:cNvSpPr/>
-          <p:nvPr/>
-        </p:nvSpPr>
-        <p:spPr>
-          <a:xfrm rot="0" flipH="0" flipV="0">
-            <a:off x="8553450" y="3676650"/>
-            <a:ext cx="2571750" cy="1714500"/>
-          </a:xfrm>
-          <a:prstGeom prst="rect">
-            <a:avLst/>
-          </a:prstGeom>
-          <a:solidFill>
-            <a:srgbClr val="FFFFFF"/>
-          </a:solidFill>
-          <a:ln w="25400">
-            <a:solidFill>
-              <a:srgbClr val="D9534F"/>
-            </a:solidFill>
-            <a:prstDash val="solid"/>
-          </a:ln>
-        </p:spPr>
-        <p:txBody>
-          <a:bodyPr/>
-          <a:p/>
-        </p:txBody>
-      </p:sp>
-      <p:sp>
-        <p:nvSpPr>
-          <p:cNvPr id="180" name="" descr="{&quot;isTemplate&quot;:true,&quot;type&quot;:&quot;text&quot;}"/>
-          <p:cNvSpPr txBox="1"/>
-          <p:nvPr/>
-        </p:nvSpPr>
-        <p:spPr>
-          <a:xfrm rot="0" flipH="0" flipV="0">
-            <a:off x="8743950" y="3867150"/>
-            <a:ext cx="2190750" cy="247650"/>
-          </a:xfrm>
-          <a:prstGeom prst="rect"/>
-        </p:spPr>
-        <p:txBody>
-          <a:bodyPr wrap="none" lIns="0" tIns="0" rIns="0" bIns="0"/>
-          <a:p>
-            <a:pPr>
-              <a:lnSpc>
-                <a:spcPct val="100000"/>
-              </a:lnSpc>
-            </a:pPr>
-            <a:r>
-              <a:rPr lang="en-US" sz="1575" b="1">
-                <a:solidFill>
-                  <a:srgbClr val="D9534F"/>
-                </a:solidFill>
-                <a:latin typeface="Microsoft YaHei"/>
-                <a:ea typeface="Microsoft YaHei"/>
-              </a:rPr>
-              <a:t>04 </a:t>
-            </a:r>
-            <a:r>
-              <a:rPr lang="zh-CN" sz="1575" b="1">
-                <a:solidFill>
-                  <a:srgbClr val="D9534F"/>
-                </a:solidFill>
-                <a:latin typeface="Microsoft YaHei"/>
-                <a:ea typeface="Microsoft YaHei"/>
-              </a:rPr>
-              <a:t>失败案例</a:t>
-            </a:r>
-            <a:endParaRPr/>
-          </a:p>
-        </p:txBody>
-      </p:sp>
-      <p:sp>
-        <p:nvSpPr>
-          <p:cNvPr id="181" name="" descr="{&quot;isTemplate&quot;:true,&quot;type&quot;:&quot;text&quot;}"/>
-          <p:cNvSpPr txBox="1"/>
-          <p:nvPr/>
-        </p:nvSpPr>
-        <p:spPr>
-          <a:xfrm rot="0" flipH="0" flipV="0">
-            <a:off x="8743950" y="4248150"/>
-            <a:ext cx="2190750" cy="295275"/>
-          </a:xfrm>
-          <a:prstGeom prst="rect"/>
-        </p:spPr>
-        <p:txBody>
-          <a:bodyPr wrap="none" lIns="0" tIns="0" rIns="0" bIns="0"/>
-          <a:p>
-            <a:pPr>
-              <a:lnSpc>
-                <a:spcPct val="140000"/>
-              </a:lnSpc>
-            </a:pPr>
-            <a:r>
-              <a:rPr lang="en-US" sz="1350">
-                <a:solidFill>
-                  <a:srgbClr val="4A5568"/>
-                </a:solidFill>
-                <a:latin typeface="Microsoft YaHei"/>
-                <a:ea typeface="Microsoft YaHei"/>
-              </a:rPr>
-              <a:t>P108 → ABSTAIN</a:t>
-            </a:r>
-            <a:endParaRPr/>
-          </a:p>
-        </p:txBody>
-      </p:sp>
-      <p:sp>
-        <p:nvSpPr>
-          <p:cNvPr id="182" name="" descr="{&quot;isTemplate&quot;:true,&quot;type&quot;:&quot;text&quot;}"/>
-          <p:cNvSpPr txBox="1"/>
-          <p:nvPr/>
-        </p:nvSpPr>
-        <p:spPr>
-          <a:xfrm rot="0" flipH="0" flipV="0">
-            <a:off x="381000" y="6048375"/>
-            <a:ext cx="2981325" cy="190500"/>
-          </a:xfrm>
-          <a:prstGeom prst="rect"/>
-        </p:spPr>
-        <p:txBody>
-          <a:bodyPr wrap="none" lIns="0" tIns="0" rIns="0" bIns="0"/>
-          <a:p>
-            <a:pPr>
-              <a:lnSpc>
-                <a:spcPct val="100000"/>
-              </a:lnSpc>
-            </a:pPr>
-            <a:r>
-              <a:rPr lang="zh-CN" sz="1200">
-                <a:solidFill>
-                  <a:srgbClr val="8B97A8"/>
-                </a:solidFill>
-                <a:latin typeface="Microsoft YaHei"/>
-                <a:ea typeface="Microsoft YaHei"/>
-              </a:rPr>
-              <a:t>现场</a:t>
-            </a:r>
-            <a:r>
-              <a:rPr lang="en-US" sz="1200">
-                <a:solidFill>
-                  <a:srgbClr val="8B97A8"/>
-                </a:solidFill>
-                <a:latin typeface="Microsoft YaHei"/>
-                <a:ea typeface="Microsoft YaHei"/>
-              </a:rPr>
-              <a:t> fallback</a:t>
-            </a:r>
-            <a:r>
-              <a:rPr lang="zh-CN" sz="1200">
-                <a:solidFill>
-                  <a:srgbClr val="8B97A8"/>
-                </a:solidFill>
-                <a:latin typeface="Microsoft YaHei"/>
-                <a:ea typeface="Microsoft YaHei"/>
-              </a:rPr>
-              <a:t>：离线</a:t>
-            </a:r>
-            <a:r>
-              <a:rPr lang="en-US" sz="1200">
-                <a:solidFill>
-                  <a:srgbClr val="8B97A8"/>
-                </a:solidFill>
-                <a:latin typeface="Microsoft YaHei"/>
-                <a:ea typeface="Microsoft YaHei"/>
-              </a:rPr>
-              <a:t> Demo + F1–F6 </a:t>
-            </a:r>
-            <a:r>
-              <a:rPr lang="zh-CN" sz="1200">
-                <a:solidFill>
-                  <a:srgbClr val="8B97A8"/>
-                </a:solidFill>
-                <a:latin typeface="Microsoft YaHei"/>
-                <a:ea typeface="Microsoft YaHei"/>
-              </a:rPr>
-              <a:t>冻结图</a:t>
-            </a:r>
-            <a:endParaRPr/>
-          </a:p>
-        </p:txBody>
-      </p:sp>
-      <p:sp>
-        <p:nvSpPr>
-          <p:cNvPr id="183" name="" descr="{&quot;isTemplate&quot;:true,&quot;type&quot;:&quot;text&quot;}"/>
-          <p:cNvSpPr txBox="1"/>
-          <p:nvPr/>
-        </p:nvSpPr>
-        <p:spPr>
-          <a:xfrm rot="0" flipH="0" flipV="0">
-            <a:off x="11353800" y="6067425"/>
-            <a:ext cx="457200" cy="161925"/>
-          </a:xfrm>
-          <a:prstGeom prst="rect"/>
-        </p:spPr>
-        <p:txBody>
-          <a:bodyPr wrap="none" lIns="0" tIns="0" rIns="0" bIns="0"/>
-          <a:p>
-            <a:pPr>
-              <a:lnSpc>
-                <a:spcPct val="100000"/>
-              </a:lnSpc>
-            </a:pPr>
-            <a:r>
-              <a:rPr lang="en-US" sz="1050">
-                <a:solidFill>
-                  <a:srgbClr val="0E3F8C"/>
-                </a:solidFill>
-                <a:latin typeface="Microsoft YaHei"/>
-                <a:ea typeface="Microsoft YaHei"/>
-              </a:rPr>
-              <a:t>10 / 10</a:t>
-            </a:r>
-            <a:endParaRPr/>
-          </a:p>
-        </p:txBody>
-      </p:sp>
-    </p:spTree>
-  </p:cSld>
-</p:sld>
-</file>
-
-<file path=ppt/slides/slide2.xml><?xml version="1.0" encoding="utf-8"?>
-<p:sld xmlns:p="http://schemas.openxmlformats.org/presentationml/2006/main" xmlns:r="http://schemas.openxmlformats.org/officeDocument/2006/relationships" xmlns:a="http://schemas.openxmlformats.org/drawingml/2006/main" xmlns:asvg="http://schemas.microsoft.com/office/drawing/2016/SVG/main" xmlns:mc="http://schemas.openxmlformats.org/markup-compatibility/2006" mc:Ignorable="asvg">
-  <p:cSld>
-    <p:spTree>
-      <p:nvGrpSpPr>
-        <p:cNvPr id="184" name="" descr="&lt;Slide style={{ width: 1280, height: 720, background: '#FFFFFF', padding: 40 }}&gt;&#10;  &lt;Box style={{ height: 88, borderBottom: '3px solid #1E4FA8', justifyContent: 'center' }}&gt;&lt;Text style={{ fontSize: 36, color: '#0E3F8C', fontWeight: 'bold' }}&gt;为什么 Raw Signal 不够&lt;/Text&gt;&lt;Text style={{ fontSize: 18, color: '#4A5568', marginTop: 6 }}&gt;表现水平与证据支持必须分开报告&lt;/Text&gt;&lt;/Box&gt;&#10;  &lt;Box style={{ height: 510, flexDirection: 'row', gap: 28, paddingTop: 18 }}&gt;&#10;    &lt;Box style={{ width: 700, height: 480, border: '1px solid #D6DCE5', padding: 12, background: '#F7F9FC' }}&gt;&lt;Image src=&quot;assets/F2_raw_vs_adjusted.svg&quot; style={{ width: 676, height: 456, objectFit: 'contain' }} /&gt;&lt;/Box&gt;&#10;    &lt;Box style={{ width: 460, height: 480, padding: 22, gap: 20, background: '#F0F5FC' }}&gt;&#10;      &lt;Text style={{ fontSize: 27, color: '#0E3F8C', fontWeight: 'bold' }}&gt;两个独立问题&lt;/Text&gt;&#10;      &lt;Text style={{ fontSize: 23, color: '#1A2230', lineHeight: 1.45 }}&gt;Raw Signal：观察到的表现水平&lt;/Text&gt;&#10;      &lt;Text style={{ fontSize: 23, color: '#1A2230', lineHeight: 1.45 }}&gt;Evidence Reliability：这些观察能否支撑结论&lt;/Text&gt;&#10;      &lt;Box style={{ borderLeft: '5px solid #D9534F', paddingLeft: 16 }}&gt;&lt;Text style={{ fontSize: 22, color: '#D9534F', lineHeight: 1.45 }}&gt;归一化分数不变，不代表支持范围不变&lt;/Text&gt;&lt;/Box&gt;&#10;    &lt;/Box&gt;&#10;  &lt;/Box&gt;&#10;  &lt;Box style={{ height: 40, flexDirection: 'row', justifyContent: 'space-between', alignItems: 'center' }}&gt;&lt;Text style={{ fontSize: 14, color: '#8B97A8' }}&gt;冻结图 F2 · Raw vs Adjusted&lt;/Text&gt;&lt;Text style={{ fontSize: 14, color: '#0E3F8C' }}&gt;02 / 10&lt;/Text&gt;&lt;/Box&gt;&#10;&lt;/Slide&gt;"/>
-        <p:cNvGrpSpPr/>
-        <p:nvPr/>
-      </p:nvGrpSpPr>
-      <p:grpSpPr>
-        <a:xfrm>
-          <a:off x="0" y="0"/>
-          <a:ext cx="0" cy="0"/>
-          <a:chOff x="0" y="0"/>
-          <a:chExt cx="0" cy="0"/>
-        </a:xfrm>
-      </p:grpSpPr>
-      <p:sp>
-        <p:nvSpPr>
-          <p:cNvPr id="185" name=""/>
-          <p:cNvSpPr/>
-          <p:nvPr/>
-        </p:nvSpPr>
-        <p:spPr>
-          <a:xfrm rot="0" flipH="0" flipV="0">
-            <a:off x="0" y="0"/>
-            <a:ext cx="12192000" cy="6858000"/>
-          </a:xfrm>
-          <a:prstGeom prst="rect">
-            <a:avLst/>
-          </a:prstGeom>
-          <a:solidFill>
-            <a:srgbClr val="FFFFFF"/>
-          </a:solidFill>
-          <a:ln/>
-        </p:spPr>
-        <p:txBody>
-          <a:bodyPr/>
-          <a:p/>
-        </p:txBody>
-      </p:sp>
-      <p:sp>
-        <p:nvSpPr>
-          <p:cNvPr id="186" name=""/>
-          <p:cNvSpPr/>
-          <p:nvPr/>
-        </p:nvSpPr>
-        <p:spPr>
-          <a:xfrm rot="0" flipH="0" flipV="0">
-            <a:off x="381000" y="381000"/>
-            <a:ext cx="11430000" cy="838200"/>
-          </a:xfrm>
-          <a:custGeom>
-            <a:pathLst>
-              <a:path w="1200" h="88">
-                <a:moveTo>
-                  <a:pt x="0" y="85"/>
-                </a:moveTo>
-                <a:lnTo>
-                  <a:pt x="1200" y="85"/>
-                </a:lnTo>
-                <a:lnTo>
-                  <a:pt x="1200" y="88"/>
-                </a:lnTo>
-                <a:lnTo>
-                  <a:pt x="0" y="88"/>
-                </a:lnTo>
-                <a:close/>
-              </a:path>
-            </a:pathLst>
-          </a:custGeom>
-          <a:solidFill>
-            <a:srgbClr val="1E4FA8"/>
-          </a:solidFill>
-          <a:ln/>
-        </p:spPr>
-        <p:txBody>
-          <a:bodyPr/>
-          <a:p/>
-        </p:txBody>
-      </p:sp>
-      <p:sp>
-        <p:nvSpPr>
-          <p:cNvPr id="187" name="" descr="{&quot;isTemplate&quot;:true,&quot;type&quot;:&quot;text&quot;}"/>
-          <p:cNvSpPr txBox="1"/>
-          <p:nvPr/>
-        </p:nvSpPr>
-        <p:spPr>
-          <a:xfrm rot="0" flipH="0" flipV="0">
-            <a:off x="381000" y="447675"/>
-            <a:ext cx="11430000" cy="419100"/>
-          </a:xfrm>
-          <a:prstGeom prst="rect"/>
-        </p:spPr>
-        <p:txBody>
-          <a:bodyPr wrap="none" lIns="0" tIns="0" rIns="0" bIns="0"/>
-          <a:p>
-            <a:pPr>
-              <a:lnSpc>
-                <a:spcPct val="100000"/>
-              </a:lnSpc>
-            </a:pPr>
-            <a:r>
-              <a:rPr lang="zh-CN" sz="2700" b="1">
-                <a:solidFill>
-                  <a:srgbClr val="0E3F8C"/>
-                </a:solidFill>
-                <a:latin typeface="Microsoft YaHei"/>
-                <a:ea typeface="Microsoft YaHei"/>
-              </a:rPr>
-              <a:t>为什么</a:t>
-            </a:r>
-            <a:r>
-              <a:rPr lang="en-US" sz="2700" b="1">
-                <a:solidFill>
-                  <a:srgbClr val="0E3F8C"/>
-                </a:solidFill>
-                <a:latin typeface="Microsoft YaHei"/>
-                <a:ea typeface="Microsoft YaHei"/>
-              </a:rPr>
-              <a:t> Raw Signal </a:t>
-            </a:r>
-            <a:r>
-              <a:rPr lang="zh-CN" sz="2700" b="1">
-                <a:solidFill>
-                  <a:srgbClr val="0E3F8C"/>
-                </a:solidFill>
-                <a:latin typeface="Microsoft YaHei"/>
-                <a:ea typeface="Microsoft YaHei"/>
-              </a:rPr>
-              <a:t>不够</a:t>
-            </a:r>
-            <a:endParaRPr/>
-          </a:p>
-        </p:txBody>
-      </p:sp>
-      <p:sp>
-        <p:nvSpPr>
-          <p:cNvPr id="188" name="" descr="{&quot;isTemplate&quot;:true,&quot;type&quot;:&quot;text&quot;}"/>
-          <p:cNvSpPr txBox="1"/>
-          <p:nvPr/>
-        </p:nvSpPr>
-        <p:spPr>
-          <a:xfrm rot="0" flipH="0" flipV="0">
-            <a:off x="381000" y="923925"/>
-            <a:ext cx="11430000" cy="209550"/>
-          </a:xfrm>
-          <a:prstGeom prst="rect"/>
-        </p:spPr>
-        <p:txBody>
-          <a:bodyPr wrap="none" lIns="0" tIns="0" rIns="0" bIns="0"/>
-          <a:p>
-            <a:pPr>
-              <a:lnSpc>
-                <a:spcPct val="100000"/>
-              </a:lnSpc>
-            </a:pPr>
-            <a:r>
-              <a:rPr lang="zh-CN" sz="1350">
-                <a:solidFill>
-                  <a:srgbClr val="4A5568"/>
-                </a:solidFill>
-                <a:latin typeface="Microsoft YaHei"/>
-                <a:ea typeface="Microsoft YaHei"/>
-              </a:rPr>
-              <a:t>表现水平与证据支持必须分开报告</a:t>
-            </a:r>
-            <a:endParaRPr/>
-          </a:p>
-        </p:txBody>
-      </p:sp>
-      <p:sp>
-        <p:nvSpPr>
-          <p:cNvPr id="189" name=""/>
-          <p:cNvSpPr/>
-          <p:nvPr/>
-        </p:nvSpPr>
-        <p:spPr>
-          <a:xfrm rot="0" flipH="0" flipV="0">
-            <a:off x="381000" y="1390650"/>
-            <a:ext cx="6667500" cy="4572000"/>
-          </a:xfrm>
-          <a:prstGeom prst="rect">
-            <a:avLst/>
-          </a:prstGeom>
-          <a:solidFill>
-            <a:srgbClr val="F7F9FC"/>
-          </a:solidFill>
-          <a:ln w="12700">
-            <a:solidFill>
-              <a:srgbClr val="D6DCE5"/>
-            </a:solidFill>
-            <a:prstDash val="solid"/>
-          </a:ln>
-        </p:spPr>
-        <p:txBody>
-          <a:bodyPr/>
-          <a:p/>
-        </p:txBody>
-      </p:sp>
-      <p:pic>
-        <p:nvPicPr>
-          <p:cNvPr id="190" name=""/>
-          <p:cNvPicPr>
-            <a:picLocks noChangeAspect="1"/>
-          </p:cNvPicPr>
-          <p:nvPr/>
-        </p:nvPicPr>
-        <p:blipFill>
-          <a:blip>
-            <a:extLst>
-              <a:ext uri="{96DAC541-7B7A-43D3-8B79-37D633B846F1}">
-                <asvg:svgBlip r:embed="rId1"/>
-              </a:ext>
-            </a:extLst>
-          </a:blip>
-          <a:srcRect l="6761" t="0" r="6761" b="0"/>
-          <a:stretch>
-            <a:fillRect/>
-          </a:stretch>
-        </p:blipFill>
-        <p:spPr>
-          <a:xfrm rot="0" flipH="0" flipV="0">
-            <a:off x="495300" y="1504950"/>
-            <a:ext cx="6438900" cy="4343400"/>
-          </a:xfrm>
-          <a:prstGeom prst="rect">
-            <a:avLst/>
-          </a:prstGeom>
-          <a:ln/>
-        </p:spPr>
-      </p:pic>
-      <p:sp>
-        <p:nvSpPr>
-          <p:cNvPr id="191" name=""/>
-          <p:cNvSpPr/>
-          <p:nvPr/>
-        </p:nvSpPr>
-        <p:spPr>
-          <a:xfrm rot="0" flipH="0" flipV="0">
-            <a:off x="7315200" y="1390650"/>
-            <a:ext cx="4381500" cy="4572000"/>
-          </a:xfrm>
-          <a:prstGeom prst="rect">
-            <a:avLst/>
-          </a:prstGeom>
-          <a:solidFill>
-            <a:srgbClr val="F0F5FC"/>
-          </a:solidFill>
-          <a:ln/>
-        </p:spPr>
-        <p:txBody>
-          <a:bodyPr/>
-          <a:p/>
-        </p:txBody>
-      </p:sp>
-      <p:sp>
-        <p:nvSpPr>
-          <p:cNvPr id="192" name="" descr="{&quot;isTemplate&quot;:true,&quot;type&quot;:&quot;text&quot;}"/>
-          <p:cNvSpPr txBox="1"/>
-          <p:nvPr/>
-        </p:nvSpPr>
-        <p:spPr>
-          <a:xfrm rot="0" flipH="0" flipV="0">
-            <a:off x="7524750" y="1600200"/>
-            <a:ext cx="3962400" cy="314325"/>
-          </a:xfrm>
-          <a:prstGeom prst="rect"/>
-        </p:spPr>
-        <p:txBody>
-          <a:bodyPr wrap="none" lIns="0" tIns="0" rIns="0" bIns="0"/>
-          <a:p>
-            <a:pPr>
-              <a:lnSpc>
-                <a:spcPct val="100000"/>
-              </a:lnSpc>
-            </a:pPr>
-            <a:r>
-              <a:rPr lang="zh-CN" sz="2025" b="1">
-                <a:solidFill>
-                  <a:srgbClr val="0E3F8C"/>
-                </a:solidFill>
-                <a:latin typeface="Microsoft YaHei"/>
-                <a:ea typeface="Microsoft YaHei"/>
-              </a:rPr>
-              <a:t>两个独立问题</a:t>
-            </a:r>
-            <a:endParaRPr/>
-          </a:p>
-        </p:txBody>
-      </p:sp>
-      <p:sp>
-        <p:nvSpPr>
-          <p:cNvPr id="193" name="" descr="{&quot;isTemplate&quot;:true,&quot;type&quot;:&quot;text&quot;}"/>
-          <p:cNvSpPr txBox="1"/>
-          <p:nvPr/>
-        </p:nvSpPr>
-        <p:spPr>
-          <a:xfrm rot="0" flipH="0" flipV="0">
-            <a:off x="7524750" y="2105025"/>
-            <a:ext cx="3962400" cy="390525"/>
-          </a:xfrm>
-          <a:prstGeom prst="rect"/>
-        </p:spPr>
-        <p:txBody>
-          <a:bodyPr wrap="none" lIns="0" tIns="0" rIns="0" bIns="0"/>
-          <a:p>
-            <a:pPr>
-              <a:lnSpc>
-                <a:spcPct val="145000"/>
-              </a:lnSpc>
-            </a:pPr>
-            <a:r>
-              <a:rPr lang="en-US" sz="1725">
-                <a:solidFill>
-                  <a:srgbClr val="1A2230"/>
-                </a:solidFill>
-                <a:latin typeface="Microsoft YaHei"/>
-                <a:ea typeface="Microsoft YaHei"/>
-              </a:rPr>
-              <a:t>Raw Signal</a:t>
-            </a:r>
-            <a:r>
-              <a:rPr lang="zh-CN" sz="1725">
-                <a:solidFill>
-                  <a:srgbClr val="1A2230"/>
-                </a:solidFill>
-                <a:latin typeface="Microsoft YaHei"/>
-                <a:ea typeface="Microsoft YaHei"/>
-              </a:rPr>
-              <a:t>：观察到的表现水平</a:t>
-            </a:r>
-            <a:endParaRPr/>
-          </a:p>
-        </p:txBody>
-      </p:sp>
-      <p:sp>
-        <p:nvSpPr>
-          <p:cNvPr id="194" name="" descr="{&quot;isTemplate&quot;:true,&quot;type&quot;:&quot;text&quot;}"/>
-          <p:cNvSpPr txBox="1"/>
-          <p:nvPr/>
-        </p:nvSpPr>
-        <p:spPr>
-          <a:xfrm rot="0" flipH="0" flipV="0">
-            <a:off x="7524750" y="2686050"/>
-            <a:ext cx="3962400" cy="771525"/>
-          </a:xfrm>
-          <a:prstGeom prst="rect"/>
-        </p:spPr>
-        <p:txBody>
-          <a:bodyPr wrap="square" lIns="0" tIns="0" rIns="0" bIns="0">
-            <a:normAutofit/>
-          </a:bodyPr>
-          <a:p>
-            <a:pPr>
-              <a:lnSpc>
-                <a:spcPct val="145000"/>
-              </a:lnSpc>
-            </a:pPr>
-            <a:r>
-              <a:rPr lang="en-US" sz="1725">
-                <a:solidFill>
-                  <a:srgbClr val="1A2230"/>
-                </a:solidFill>
-                <a:latin typeface="Microsoft YaHei"/>
-                <a:ea typeface="Microsoft YaHei"/>
-              </a:rPr>
-              <a:t>Evidence Reliability</a:t>
-            </a:r>
-            <a:r>
-              <a:rPr lang="zh-CN" sz="1725">
-                <a:solidFill>
-                  <a:srgbClr val="1A2230"/>
-                </a:solidFill>
-                <a:latin typeface="Microsoft YaHei"/>
-                <a:ea typeface="Microsoft YaHei"/>
-              </a:rPr>
-              <a:t>：这些观察能否支撑结论</a:t>
-            </a:r>
-            <a:endParaRPr/>
-          </a:p>
-        </p:txBody>
-      </p:sp>
-      <p:sp>
-        <p:nvSpPr>
-          <p:cNvPr id="195" name=""/>
-          <p:cNvSpPr/>
-          <p:nvPr/>
-        </p:nvSpPr>
-        <p:spPr>
-          <a:xfrm rot="0" flipH="0" flipV="0">
-            <a:off x="7524750" y="3648075"/>
-            <a:ext cx="4010025" cy="371475"/>
-          </a:xfrm>
-          <a:custGeom>
-            <a:pathLst>
-              <a:path w="421" h="39">
-                <a:moveTo>
-                  <a:pt x="0" y="0"/>
-                </a:moveTo>
-                <a:lnTo>
-                  <a:pt x="5" y="0"/>
-                </a:lnTo>
-                <a:lnTo>
-                  <a:pt x="5" y="39"/>
-                </a:lnTo>
-                <a:lnTo>
-                  <a:pt x="0" y="39"/>
-                </a:lnTo>
-                <a:close/>
-              </a:path>
-            </a:pathLst>
-          </a:custGeom>
-          <a:solidFill>
-            <a:srgbClr val="D9534F"/>
-          </a:solidFill>
-          <a:ln/>
-        </p:spPr>
-        <p:txBody>
-          <a:bodyPr/>
-          <a:p/>
-        </p:txBody>
-      </p:sp>
-      <p:sp>
-        <p:nvSpPr>
-          <p:cNvPr id="196" name="" descr="{&quot;isTemplate&quot;:true,&quot;type&quot;:&quot;text&quot;}"/>
-          <p:cNvSpPr txBox="1"/>
-          <p:nvPr/>
-        </p:nvSpPr>
-        <p:spPr>
-          <a:xfrm rot="0" flipH="0" flipV="0">
-            <a:off x="7724775" y="3648075"/>
-            <a:ext cx="3762375" cy="371475"/>
-          </a:xfrm>
-          <a:prstGeom prst="rect"/>
-        </p:spPr>
-        <p:txBody>
-          <a:bodyPr wrap="none" lIns="0" tIns="0" rIns="0" bIns="0"/>
-          <a:p>
-            <a:pPr>
-              <a:lnSpc>
-                <a:spcPct val="145000"/>
-              </a:lnSpc>
-            </a:pPr>
-            <a:r>
-              <a:rPr lang="zh-CN" sz="1650">
-                <a:solidFill>
-                  <a:srgbClr val="D9534F"/>
-                </a:solidFill>
-                <a:latin typeface="Microsoft YaHei"/>
-                <a:ea typeface="Microsoft YaHei"/>
-              </a:rPr>
-              <a:t>归一化分数不变，不代表支持范围不变</a:t>
-            </a:r>
-            <a:endParaRPr/>
-          </a:p>
-        </p:txBody>
-      </p:sp>
-      <p:sp>
-        <p:nvSpPr>
-          <p:cNvPr id="197" name="" descr="{&quot;isTemplate&quot;:true,&quot;type&quot;:&quot;text&quot;}"/>
-          <p:cNvSpPr txBox="1"/>
-          <p:nvPr/>
-        </p:nvSpPr>
-        <p:spPr>
-          <a:xfrm rot="0" flipH="0" flipV="0">
-            <a:off x="381000" y="6191250"/>
-            <a:ext cx="1752600" cy="161925"/>
-          </a:xfrm>
-          <a:prstGeom prst="rect"/>
-        </p:spPr>
-        <p:txBody>
-          <a:bodyPr wrap="none" lIns="0" tIns="0" rIns="0" bIns="0"/>
-          <a:p>
-            <a:pPr>
-              <a:lnSpc>
-                <a:spcPct val="100000"/>
-              </a:lnSpc>
-            </a:pPr>
-            <a:r>
-              <a:rPr lang="zh-CN" sz="1050">
-                <a:solidFill>
-                  <a:srgbClr val="8B97A8"/>
-                </a:solidFill>
-                <a:latin typeface="Microsoft YaHei"/>
-                <a:ea typeface="Microsoft YaHei"/>
-              </a:rPr>
-              <a:t>冻结图</a:t>
-            </a:r>
-            <a:r>
-              <a:rPr lang="en-US" sz="1050">
-                <a:solidFill>
-                  <a:srgbClr val="8B97A8"/>
-                </a:solidFill>
-                <a:latin typeface="Microsoft YaHei"/>
-                <a:ea typeface="Microsoft YaHei"/>
-              </a:rPr>
-              <a:t> F2 · Raw vs Adjusted</a:t>
-            </a:r>
-            <a:endParaRPr/>
-          </a:p>
-        </p:txBody>
-      </p:sp>
-      <p:sp>
-        <p:nvSpPr>
-          <p:cNvPr id="198" name="" descr="{&quot;isTemplate&quot;:true,&quot;type&quot;:&quot;text&quot;}"/>
-          <p:cNvSpPr txBox="1"/>
-          <p:nvPr/>
-        </p:nvSpPr>
-        <p:spPr>
-          <a:xfrm rot="0" flipH="0" flipV="0">
-            <a:off x="11353800" y="6191250"/>
-            <a:ext cx="457200" cy="161925"/>
-          </a:xfrm>
-          <a:prstGeom prst="rect"/>
-        </p:spPr>
-        <p:txBody>
-          <a:bodyPr wrap="none" lIns="0" tIns="0" rIns="0" bIns="0"/>
-          <a:p>
-            <a:pPr>
-              <a:lnSpc>
-                <a:spcPct val="100000"/>
-              </a:lnSpc>
-            </a:pPr>
-            <a:r>
-              <a:rPr lang="en-US" sz="1050">
-                <a:solidFill>
-                  <a:srgbClr val="0E3F8C"/>
-                </a:solidFill>
-                <a:latin typeface="Microsoft YaHei"/>
-                <a:ea typeface="Microsoft YaHei"/>
-              </a:rPr>
-              <a:t>02 / 10</a:t>
-            </a:r>
-            <a:endParaRPr/>
-          </a:p>
-        </p:txBody>
-      </p:sp>
-    </p:spTree>
-  </p:cSld>
-</p:sld>
-</file>
-
-<file path=ppt/slides/slide3.xml><?xml version="1.0" encoding="utf-8"?>
-<p:sld xmlns:p="http://schemas.openxmlformats.org/presentationml/2006/main" xmlns:r="http://schemas.openxmlformats.org/officeDocument/2006/relationships" xmlns:a="http://schemas.openxmlformats.org/drawingml/2006/main" xmlns:asvg="http://schemas.microsoft.com/office/drawing/2016/SVG/main" xmlns:mc="http://schemas.openxmlformats.org/markup-compatibility/2006" mc:Ignorable="asvg">
-  <p:cSld>
-    <p:spTree>
-      <p:nvGrpSpPr>
-        <p:cNvPr id="199" name="" descr="&lt;Slide style={{ width: 1280, height: 720, background: '#FFFFFF', padding: 40 }}&gt;&#10;  &lt;Box style={{ height: 88, borderBottom: '3px solid #1E4FA8', justifyContent: 'center' }}&gt;&lt;Text style={{ fontSize: 36, color: '#0E3F8C', fontWeight: 'bold' }}&gt;Reliability-aware evaluation&lt;/Text&gt;&lt;Text style={{ fontSize: 18, color: '#4A5568', marginTop: 6 }}&gt;从观察证据到可审查决策&lt;/Text&gt;&lt;/Box&gt;&#10;  &lt;Box style={{ height: 472, paddingTop: 16, background: '#F7F9FC' }}&gt;&lt;Image src=&quot;assets/F1_model_flow.svg&quot; style={{ width: 1200, height: 450, objectFit: 'contain' }} /&gt;&lt;/Box&gt;&#10;  &lt;Box style={{ height: 68, background: '#E8EFF8', padding: 14, justifyContent: 'center' }}&gt;&lt;Text style={{ fontSize: 21, color: '#0E3F8C' }}&gt;wᵢ = I(observableᵢ) · cᵢ · (1 − λprompt·pᵢ) · (1 − λcontext·tᵢ)　　Adjustedᵢ = Rawᵢ × wᵢ　　Ceff = Σwᵢ / N&lt;/Text&gt;&lt;/Box&gt;&#10;  &lt;Box style={{ height: 40, flexDirection: 'row', justifyContent: 'space-between', alignItems: 'center' }}&gt;&lt;Text style={{ fontSize: 14, color: '#8B97A8' }}&gt;R 是支持权重，不是校准概率；无证据时 fail-closed&lt;/Text&gt;&lt;Text style={{ fontSize: 14, color: '#0E3F8C' }}&gt;03 / 10&lt;/Text&gt;&lt;/Box&gt;&#10;&lt;/Slide&gt;"/>
-        <p:cNvGrpSpPr/>
-        <p:nvPr/>
-      </p:nvGrpSpPr>
-      <p:grpSpPr>
-        <a:xfrm>
-          <a:off x="0" y="0"/>
-          <a:ext cx="0" cy="0"/>
-          <a:chOff x="0" y="0"/>
-          <a:chExt cx="0" cy="0"/>
-        </a:xfrm>
-      </p:grpSpPr>
-      <p:sp>
-        <p:nvSpPr>
-          <p:cNvPr id="200" name=""/>
-          <p:cNvSpPr/>
-          <p:nvPr/>
-        </p:nvSpPr>
-        <p:spPr>
-          <a:xfrm rot="0" flipH="0" flipV="0">
-            <a:off x="0" y="0"/>
-            <a:ext cx="12192000" cy="6858000"/>
-          </a:xfrm>
-          <a:prstGeom prst="rect">
-            <a:avLst/>
-          </a:prstGeom>
-          <a:solidFill>
-            <a:srgbClr val="FFFFFF"/>
-          </a:solidFill>
-          <a:ln/>
-        </p:spPr>
-        <p:txBody>
-          <a:bodyPr/>
-          <a:p/>
-        </p:txBody>
-      </p:sp>
-      <p:sp>
-        <p:nvSpPr>
-          <p:cNvPr id="201" name=""/>
-          <p:cNvSpPr/>
-          <p:nvPr/>
-        </p:nvSpPr>
-        <p:spPr>
-          <a:xfrm rot="0" flipH="0" flipV="0">
-            <a:off x="381000" y="381000"/>
-            <a:ext cx="11430000" cy="838200"/>
-          </a:xfrm>
-          <a:custGeom>
-            <a:pathLst>
-              <a:path w="1200" h="88">
-                <a:moveTo>
-                  <a:pt x="0" y="85"/>
-                </a:moveTo>
-                <a:lnTo>
-                  <a:pt x="1200" y="85"/>
-                </a:lnTo>
-                <a:lnTo>
-                  <a:pt x="1200" y="88"/>
-                </a:lnTo>
-                <a:lnTo>
-                  <a:pt x="0" y="88"/>
-                </a:lnTo>
-                <a:close/>
-              </a:path>
-            </a:pathLst>
-          </a:custGeom>
-          <a:solidFill>
-            <a:srgbClr val="1E4FA8"/>
-          </a:solidFill>
-          <a:ln/>
-        </p:spPr>
-        <p:txBody>
-          <a:bodyPr/>
-          <a:p/>
-        </p:txBody>
-      </p:sp>
-      <p:sp>
-        <p:nvSpPr>
-          <p:cNvPr id="202" name="" descr="{&quot;isTemplate&quot;:true,&quot;type&quot;:&quot;text&quot;}"/>
-          <p:cNvSpPr txBox="1"/>
-          <p:nvPr/>
-        </p:nvSpPr>
-        <p:spPr>
-          <a:xfrm rot="0" flipH="0" flipV="0">
-            <a:off x="381000" y="447675"/>
-            <a:ext cx="11430000" cy="419100"/>
-          </a:xfrm>
-          <a:prstGeom prst="rect"/>
-        </p:spPr>
-        <p:txBody>
-          <a:bodyPr wrap="none" lIns="0" tIns="0" rIns="0" bIns="0"/>
-          <a:p>
-            <a:pPr>
-              <a:lnSpc>
-                <a:spcPct val="100000"/>
-              </a:lnSpc>
-            </a:pPr>
-            <a:r>
-              <a:rPr lang="en-US" sz="2700" b="1">
-                <a:solidFill>
-                  <a:srgbClr val="0E3F8C"/>
-                </a:solidFill>
-                <a:latin typeface="Microsoft YaHei"/>
-                <a:ea typeface="Microsoft YaHei"/>
-              </a:rPr>
-              <a:t>Reliability-aware evaluation</a:t>
-            </a:r>
-            <a:endParaRPr/>
-          </a:p>
-        </p:txBody>
-      </p:sp>
-      <p:sp>
-        <p:nvSpPr>
-          <p:cNvPr id="203" name="" descr="{&quot;isTemplate&quot;:true,&quot;type&quot;:&quot;text&quot;}"/>
-          <p:cNvSpPr txBox="1"/>
-          <p:nvPr/>
-        </p:nvSpPr>
-        <p:spPr>
-          <a:xfrm rot="0" flipH="0" flipV="0">
-            <a:off x="381000" y="923925"/>
-            <a:ext cx="11430000" cy="209550"/>
-          </a:xfrm>
-          <a:prstGeom prst="rect"/>
-        </p:spPr>
-        <p:txBody>
-          <a:bodyPr wrap="none" lIns="0" tIns="0" rIns="0" bIns="0"/>
-          <a:p>
-            <a:pPr>
-              <a:lnSpc>
-                <a:spcPct val="100000"/>
-              </a:lnSpc>
-            </a:pPr>
-            <a:r>
-              <a:rPr lang="zh-CN" sz="1350">
-                <a:solidFill>
-                  <a:srgbClr val="4A5568"/>
-                </a:solidFill>
-                <a:latin typeface="Microsoft YaHei"/>
-                <a:ea typeface="Microsoft YaHei"/>
-              </a:rPr>
-              <a:t>从观察证据到可审查决策</a:t>
-            </a:r>
-            <a:endParaRPr/>
-          </a:p>
-        </p:txBody>
-      </p:sp>
-      <p:sp>
-        <p:nvSpPr>
-          <p:cNvPr id="204" name=""/>
-          <p:cNvSpPr/>
-          <p:nvPr/>
-        </p:nvSpPr>
-        <p:spPr>
-          <a:xfrm rot="0" flipH="0" flipV="0">
-            <a:off x="381000" y="1219200"/>
-            <a:ext cx="11430000" cy="4495800"/>
-          </a:xfrm>
-          <a:prstGeom prst="rect">
-            <a:avLst/>
-          </a:prstGeom>
-          <a:solidFill>
-            <a:srgbClr val="F7F9FC"/>
-          </a:solidFill>
-          <a:ln/>
-        </p:spPr>
-        <p:txBody>
-          <a:bodyPr/>
-          <a:p/>
-        </p:txBody>
-      </p:sp>
-      <p:pic>
-        <p:nvPicPr>
-          <p:cNvPr id="205" name=""/>
-          <p:cNvPicPr>
-            <a:picLocks noChangeAspect="1"/>
-          </p:cNvPicPr>
-          <p:nvPr/>
-        </p:nvPicPr>
-        <p:blipFill>
-          <a:blip>
-            <a:extLst>
-              <a:ext uri="{96DAC541-7B7A-43D3-8B79-37D633B846F1}">
-                <asvg:svgBlip r:embed="rId1"/>
-              </a:ext>
-            </a:extLst>
-          </a:blip>
-          <a:srcRect l="0" t="17857" r="0" b="17857"/>
-          <a:stretch>
-            <a:fillRect/>
-          </a:stretch>
-        </p:blipFill>
-        <p:spPr>
-          <a:xfrm rot="0" flipH="0" flipV="0">
-            <a:off x="381000" y="1371600"/>
-            <a:ext cx="11430000" cy="4286250"/>
-          </a:xfrm>
-          <a:prstGeom prst="rect">
-            <a:avLst/>
-          </a:prstGeom>
-          <a:ln/>
-        </p:spPr>
-      </p:pic>
-      <p:sp>
-        <p:nvSpPr>
-          <p:cNvPr id="206" name=""/>
-          <p:cNvSpPr/>
-          <p:nvPr/>
-        </p:nvSpPr>
-        <p:spPr>
-          <a:xfrm rot="0" flipH="0" flipV="0">
-            <a:off x="381000" y="5715000"/>
-            <a:ext cx="11430000" cy="647700"/>
-          </a:xfrm>
-          <a:prstGeom prst="rect">
-            <a:avLst/>
-          </a:prstGeom>
-          <a:solidFill>
-            <a:srgbClr val="E8EFF8"/>
-          </a:solidFill>
-          <a:ln/>
-        </p:spPr>
-        <p:txBody>
-          <a:bodyPr/>
-          <a:p/>
-        </p:txBody>
-      </p:sp>
-      <p:sp>
-        <p:nvSpPr>
-          <p:cNvPr id="207" name="" descr="{&quot;isTemplate&quot;:true,&quot;type&quot;:&quot;text&quot;}"/>
-          <p:cNvSpPr txBox="1"/>
-          <p:nvPr/>
-        </p:nvSpPr>
-        <p:spPr>
-          <a:xfrm rot="0" flipH="0" flipV="0">
-            <a:off x="514350" y="5915025"/>
-            <a:ext cx="11163300" cy="247650"/>
-          </a:xfrm>
-          <a:prstGeom prst="rect"/>
-        </p:spPr>
-        <p:txBody>
-          <a:bodyPr wrap="none" lIns="0" tIns="0" rIns="0" bIns="0"/>
-          <a:p>
-            <a:pPr>
-              <a:lnSpc>
-                <a:spcPct val="100000"/>
-              </a:lnSpc>
-            </a:pPr>
-            <a:r>
-              <a:rPr lang="en-US" sz="1575">
-                <a:solidFill>
-                  <a:srgbClr val="0E3F8C"/>
-                </a:solidFill>
-                <a:latin typeface="Microsoft YaHei"/>
-                <a:ea typeface="Microsoft YaHei"/>
-              </a:rPr>
-              <a:t>wᵢ = I(observableᵢ) · cᵢ · (1 − λprompt·pᵢ) · (1 − λcontext·tᵢ)</a:t>
-            </a:r>
-            <a:r>
-              <a:rPr lang="zh-CN" sz="1575">
-                <a:solidFill>
-                  <a:srgbClr val="0E3F8C"/>
-                </a:solidFill>
-                <a:latin typeface="Microsoft YaHei"/>
-                <a:ea typeface="Microsoft YaHei"/>
-              </a:rPr>
-              <a:t>　　</a:t>
-            </a:r>
-            <a:r>
-              <a:rPr lang="en-US" sz="1575">
-                <a:solidFill>
-                  <a:srgbClr val="0E3F8C"/>
-                </a:solidFill>
-                <a:latin typeface="Microsoft YaHei"/>
-                <a:ea typeface="Microsoft YaHei"/>
-              </a:rPr>
-              <a:t>Adjustedᵢ = Rawᵢ × wᵢ</a:t>
-            </a:r>
-            <a:r>
-              <a:rPr lang="zh-CN" sz="1575">
-                <a:solidFill>
-                  <a:srgbClr val="0E3F8C"/>
-                </a:solidFill>
-                <a:latin typeface="Microsoft YaHei"/>
-                <a:ea typeface="Microsoft YaHei"/>
-              </a:rPr>
-              <a:t>　　</a:t>
-            </a:r>
-            <a:r>
-              <a:rPr lang="en-US" sz="1575">
-                <a:solidFill>
-                  <a:srgbClr val="0E3F8C"/>
-                </a:solidFill>
-                <a:latin typeface="Microsoft YaHei"/>
-                <a:ea typeface="Microsoft YaHei"/>
-              </a:rPr>
-              <a:t>Ceff = Σwᵢ / N</a:t>
-            </a:r>
-            <a:endParaRPr/>
-          </a:p>
-        </p:txBody>
-      </p:sp>
-      <p:sp>
-        <p:nvSpPr>
-          <p:cNvPr id="208" name="" descr="{&quot;isTemplate&quot;:true,&quot;type&quot;:&quot;text&quot;}"/>
-          <p:cNvSpPr txBox="1"/>
-          <p:nvPr/>
-        </p:nvSpPr>
-        <p:spPr>
-          <a:xfrm rot="0" flipH="0" flipV="0">
-            <a:off x="381000" y="6477000"/>
-            <a:ext cx="3095625" cy="161925"/>
-          </a:xfrm>
-          <a:prstGeom prst="rect"/>
-        </p:spPr>
-        <p:txBody>
-          <a:bodyPr wrap="none" lIns="0" tIns="0" rIns="0" bIns="0"/>
-          <a:p>
-            <a:pPr>
-              <a:lnSpc>
-                <a:spcPct val="100000"/>
-              </a:lnSpc>
-            </a:pPr>
-            <a:r>
-              <a:rPr lang="en-US" sz="1050">
-                <a:solidFill>
-                  <a:srgbClr val="8B97A8"/>
-                </a:solidFill>
-                <a:latin typeface="Microsoft YaHei"/>
-                <a:ea typeface="Microsoft YaHei"/>
-              </a:rPr>
-              <a:t>R </a:t>
-            </a:r>
-            <a:r>
-              <a:rPr lang="zh-CN" sz="1050">
-                <a:solidFill>
-                  <a:srgbClr val="8B97A8"/>
-                </a:solidFill>
-                <a:latin typeface="Microsoft YaHei"/>
-                <a:ea typeface="Microsoft YaHei"/>
-              </a:rPr>
-              <a:t>是支持权重，不是校准概率；无证据时</a:t>
-            </a:r>
-            <a:r>
-              <a:rPr lang="en-US" sz="1050">
-                <a:solidFill>
-                  <a:srgbClr val="8B97A8"/>
-                </a:solidFill>
-                <a:latin typeface="Microsoft YaHei"/>
-                <a:ea typeface="Microsoft YaHei"/>
-              </a:rPr>
-              <a:t> fail-closed</a:t>
-            </a:r>
-            <a:endParaRPr/>
-          </a:p>
-        </p:txBody>
-      </p:sp>
-      <p:sp>
-        <p:nvSpPr>
-          <p:cNvPr id="209" name="" descr="{&quot;isTemplate&quot;:true,&quot;type&quot;:&quot;text&quot;}"/>
-          <p:cNvSpPr txBox="1"/>
-          <p:nvPr/>
-        </p:nvSpPr>
-        <p:spPr>
-          <a:xfrm rot="0" flipH="0" flipV="0">
-            <a:off x="11353800" y="6477000"/>
-            <a:ext cx="457200" cy="161925"/>
-          </a:xfrm>
-          <a:prstGeom prst="rect"/>
-        </p:spPr>
-        <p:txBody>
-          <a:bodyPr wrap="none" lIns="0" tIns="0" rIns="0" bIns="0"/>
-          <a:p>
-            <a:pPr>
-              <a:lnSpc>
-                <a:spcPct val="100000"/>
-              </a:lnSpc>
-            </a:pPr>
-            <a:r>
-              <a:rPr lang="en-US" sz="1050">
-                <a:solidFill>
-                  <a:srgbClr val="0E3F8C"/>
-                </a:solidFill>
-                <a:latin typeface="Microsoft YaHei"/>
-                <a:ea typeface="Microsoft YaHei"/>
-              </a:rPr>
-              <a:t>03 / 10</a:t>
-            </a:r>
-            <a:endParaRPr/>
-          </a:p>
-        </p:txBody>
-      </p:sp>
-    </p:spTree>
-  </p:cSld>
-</p:sld>
-</file>
-
-<file path=ppt/slides/slide4.xml><?xml version="1.0" encoding="utf-8"?>
-<p:sld xmlns:p="http://schemas.openxmlformats.org/presentationml/2006/main" xmlns:r="http://schemas.openxmlformats.org/officeDocument/2006/relationships" xmlns:a="http://schemas.openxmlformats.org/drawingml/2006/main" xmlns:asvg="http://schemas.microsoft.com/office/drawing/2016/SVG/main" xmlns:mc="http://schemas.openxmlformats.org/markup-compatibility/2006" mc:Ignorable="asvg">
-  <p:cSld>
-    <p:spTree>
-      <p:nvGrpSpPr>
-        <p:cNvPr id="210" name="" descr="&lt;Slide style={{ width: 1280, height: 720, background: '#FFFFFF', padding: 40 }}&gt;&#10;  &lt;Box style={{ height: 88, borderBottom: '3px solid #1E4FA8', justifyContent: 'center' }}&gt;&lt;Text style={{ fontSize: 36, color: '#0E3F8C', fontWeight: 'bold' }}&gt;Development slice：70 条记录，只有 16 条可判读&lt;/Text&gt;&lt;/Box&gt;&#10;  &lt;Box style={{ height: 510, flexDirection: 'row', gap: 28, paddingTop: 18 }}&gt;&#10;    &lt;Box style={{ width: 300, height: 470, background: '#0E3F8C', padding: 24, gap: 18, justifyContent: 'center' }}&gt;&lt;Text style={{ fontSize: 72, color: '#FFFFFF', fontWeight: 'bold' }}&gt;70&lt;/Text&gt;&lt;Text style={{ fontSize: 24, color: '#FFFFFF' }}&gt;AI provisional records&lt;/Text&gt;&lt;Box style={{ height: 1, background: '#8EB5F0' }} /&gt;&lt;Text style={{ fontSize: 21, color: '#DCEBFF', lineHeight: 1.4 }}&gt;16 readable&lt;br /&gt;19 NO_EVIDENCE&lt;br /&gt;35 UNDETERMINED&lt;br /&gt;54 NO_EFFECTIVE_EVIDENCE&lt;/Text&gt;&lt;/Box&gt;&#10;    &lt;Box style={{ width: 872, height: 470, border: '1px solid #D6DCE5', padding: 12, background: '#F7F9FC' }}&gt;&lt;Image src=&quot;assets/F3_evidence_degradation.svg&quot; style={{ width: 846, height: 446, objectFit: 'contain' }} /&gt;&lt;/Box&gt;&#10;  &lt;/Box&gt;&#10;  &lt;Box style={{ height: 40, flexDirection: 'row', justifyContent: 'space-between', alignItems: 'center' }}&gt;&lt;Text style={{ fontSize: 14, color: '#D9534F' }}&gt;54 不是 54 个零分，而是没有有效证据支持数值判断&lt;/Text&gt;&lt;Text style={{ fontSize: 14, color: '#0E3F8C' }}&gt;04 / 10&lt;/Text&gt;&lt;/Box&gt;&#10;&lt;/Slide&gt;"/>
-        <p:cNvGrpSpPr/>
-        <p:nvPr/>
-      </p:nvGrpSpPr>
-      <p:grpSpPr>
-        <a:xfrm>
-          <a:off x="0" y="0"/>
-          <a:ext cx="0" cy="0"/>
-          <a:chOff x="0" y="0"/>
-          <a:chExt cx="0" cy="0"/>
-        </a:xfrm>
-      </p:grpSpPr>
-      <p:sp>
-        <p:nvSpPr>
-          <p:cNvPr id="211" name=""/>
-          <p:cNvSpPr/>
-          <p:nvPr/>
-        </p:nvSpPr>
-        <p:spPr>
-          <a:xfrm rot="0" flipH="0" flipV="0">
-            <a:off x="0" y="0"/>
-            <a:ext cx="12192000" cy="6858000"/>
-          </a:xfrm>
-          <a:prstGeom prst="rect">
-            <a:avLst/>
-          </a:prstGeom>
-          <a:solidFill>
-            <a:srgbClr val="FFFFFF"/>
-          </a:solidFill>
-          <a:ln/>
-        </p:spPr>
-        <p:txBody>
-          <a:bodyPr/>
-          <a:p/>
-        </p:txBody>
-      </p:sp>
-      <p:sp>
-        <p:nvSpPr>
-          <p:cNvPr id="212" name=""/>
-          <p:cNvSpPr/>
-          <p:nvPr/>
-        </p:nvSpPr>
-        <p:spPr>
-          <a:xfrm rot="0" flipH="0" flipV="0">
-            <a:off x="381000" y="381000"/>
-            <a:ext cx="11430000" cy="838200"/>
-          </a:xfrm>
-          <a:custGeom>
-            <a:pathLst>
-              <a:path w="1200" h="88">
-                <a:moveTo>
-                  <a:pt x="0" y="85"/>
-                </a:moveTo>
-                <a:lnTo>
-                  <a:pt x="1200" y="85"/>
-                </a:lnTo>
-                <a:lnTo>
-                  <a:pt x="1200" y="88"/>
-                </a:lnTo>
-                <a:lnTo>
-                  <a:pt x="0" y="88"/>
-                </a:lnTo>
-                <a:close/>
-              </a:path>
-            </a:pathLst>
-          </a:custGeom>
-          <a:solidFill>
-            <a:srgbClr val="1E4FA8"/>
-          </a:solidFill>
-          <a:ln/>
-        </p:spPr>
-        <p:txBody>
-          <a:bodyPr/>
-          <a:p/>
-        </p:txBody>
-      </p:sp>
-      <p:sp>
-        <p:nvSpPr>
-          <p:cNvPr id="213" name="" descr="{&quot;isTemplate&quot;:true,&quot;type&quot;:&quot;text&quot;}"/>
-          <p:cNvSpPr txBox="1"/>
-          <p:nvPr/>
-        </p:nvSpPr>
-        <p:spPr>
-          <a:xfrm rot="0" flipH="0" flipV="0">
-            <a:off x="381000" y="581025"/>
-            <a:ext cx="11430000" cy="419100"/>
-          </a:xfrm>
-          <a:prstGeom prst="rect"/>
-        </p:spPr>
-        <p:txBody>
-          <a:bodyPr wrap="none" lIns="0" tIns="0" rIns="0" bIns="0"/>
-          <a:p>
-            <a:pPr>
-              <a:lnSpc>
-                <a:spcPct val="100000"/>
-              </a:lnSpc>
-            </a:pPr>
-            <a:r>
-              <a:rPr lang="en-US" sz="2700" b="1">
-                <a:solidFill>
-                  <a:srgbClr val="0E3F8C"/>
-                </a:solidFill>
-                <a:latin typeface="Microsoft YaHei"/>
-                <a:ea typeface="Microsoft YaHei"/>
-              </a:rPr>
-              <a:t>Development slice</a:t>
-            </a:r>
-            <a:r>
-              <a:rPr lang="zh-CN" sz="2700" b="1">
-                <a:solidFill>
-                  <a:srgbClr val="0E3F8C"/>
-                </a:solidFill>
-                <a:latin typeface="Microsoft YaHei"/>
-                <a:ea typeface="Microsoft YaHei"/>
-              </a:rPr>
-              <a:t>：</a:t>
-            </a:r>
-            <a:r>
-              <a:rPr lang="en-US" sz="2700" b="1">
-                <a:solidFill>
-                  <a:srgbClr val="0E3F8C"/>
-                </a:solidFill>
-                <a:latin typeface="Microsoft YaHei"/>
-                <a:ea typeface="Microsoft YaHei"/>
-              </a:rPr>
-              <a:t>70 </a:t>
-            </a:r>
-            <a:r>
-              <a:rPr lang="zh-CN" sz="2700" b="1">
-                <a:solidFill>
-                  <a:srgbClr val="0E3F8C"/>
-                </a:solidFill>
-                <a:latin typeface="Microsoft YaHei"/>
-                <a:ea typeface="Microsoft YaHei"/>
-              </a:rPr>
-              <a:t>条记录，只有</a:t>
-            </a:r>
-            <a:r>
-              <a:rPr lang="en-US" sz="2700" b="1">
-                <a:solidFill>
-                  <a:srgbClr val="0E3F8C"/>
-                </a:solidFill>
-                <a:latin typeface="Microsoft YaHei"/>
-                <a:ea typeface="Microsoft YaHei"/>
-              </a:rPr>
-              <a:t> 16 </a:t>
-            </a:r>
-            <a:r>
-              <a:rPr lang="zh-CN" sz="2700" b="1">
-                <a:solidFill>
-                  <a:srgbClr val="0E3F8C"/>
-                </a:solidFill>
-                <a:latin typeface="Microsoft YaHei"/>
-                <a:ea typeface="Microsoft YaHei"/>
-              </a:rPr>
-              <a:t>条可判读</a:t>
-            </a:r>
-            <a:endParaRPr/>
-          </a:p>
-        </p:txBody>
-      </p:sp>
-      <p:sp>
-        <p:nvSpPr>
-          <p:cNvPr id="214" name=""/>
-          <p:cNvSpPr/>
-          <p:nvPr/>
-        </p:nvSpPr>
-        <p:spPr>
-          <a:xfrm rot="0" flipH="0" flipV="0">
-            <a:off x="381000" y="1390650"/>
-            <a:ext cx="2857500" cy="4476750"/>
-          </a:xfrm>
-          <a:prstGeom prst="rect">
-            <a:avLst/>
-          </a:prstGeom>
-          <a:solidFill>
-            <a:srgbClr val="0E3F8C"/>
-          </a:solidFill>
-          <a:ln/>
-        </p:spPr>
-        <p:txBody>
-          <a:bodyPr/>
-          <a:p/>
-        </p:txBody>
-      </p:sp>
-      <p:sp>
-        <p:nvSpPr>
-          <p:cNvPr id="215" name="" descr="{&quot;isTemplate&quot;:true,&quot;type&quot;:&quot;text&quot;}"/>
-          <p:cNvSpPr txBox="1"/>
-          <p:nvPr/>
-        </p:nvSpPr>
-        <p:spPr>
-          <a:xfrm rot="0" flipH="0" flipV="0">
-            <a:off x="609600" y="1971675"/>
-            <a:ext cx="2400300" cy="828675"/>
-          </a:xfrm>
-          <a:prstGeom prst="rect"/>
-        </p:spPr>
-        <p:txBody>
-          <a:bodyPr wrap="none" lIns="0" tIns="0" rIns="0" bIns="0"/>
-          <a:p>
-            <a:pPr>
-              <a:lnSpc>
-                <a:spcPct val="100000"/>
-              </a:lnSpc>
-            </a:pPr>
-            <a:r>
-              <a:rPr lang="en-US" sz="5400" b="1">
-                <a:solidFill>
-                  <a:srgbClr val="FFFFFF"/>
-                </a:solidFill>
-                <a:latin typeface="Microsoft YaHei"/>
-                <a:ea typeface="Microsoft YaHei"/>
-              </a:rPr>
-              <a:t>70</a:t>
-            </a:r>
-            <a:endParaRPr/>
-          </a:p>
-        </p:txBody>
-      </p:sp>
-      <p:sp>
-        <p:nvSpPr>
-          <p:cNvPr id="216" name="" descr="{&quot;isTemplate&quot;:true,&quot;type&quot;:&quot;text&quot;}"/>
-          <p:cNvSpPr txBox="1"/>
-          <p:nvPr/>
-        </p:nvSpPr>
-        <p:spPr>
-          <a:xfrm rot="0" flipH="0" flipV="0">
-            <a:off x="609600" y="2971800"/>
-            <a:ext cx="2400300" cy="276225"/>
-          </a:xfrm>
-          <a:prstGeom prst="rect"/>
-        </p:spPr>
-        <p:txBody>
-          <a:bodyPr wrap="none" lIns="0" tIns="0" rIns="0" bIns="0"/>
-          <a:p>
-            <a:pPr>
-              <a:lnSpc>
-                <a:spcPct val="100000"/>
-              </a:lnSpc>
-            </a:pPr>
-            <a:r>
-              <a:rPr lang="en-US" sz="1800">
-                <a:solidFill>
-                  <a:srgbClr val="FFFFFF"/>
-                </a:solidFill>
-                <a:latin typeface="Microsoft YaHei"/>
-                <a:ea typeface="Microsoft YaHei"/>
-              </a:rPr>
-              <a:t>AI provisional records</a:t>
-            </a:r>
-            <a:endParaRPr/>
-          </a:p>
-        </p:txBody>
-      </p:sp>
-      <p:sp>
-        <p:nvSpPr>
-          <p:cNvPr id="217" name=""/>
-          <p:cNvSpPr/>
-          <p:nvPr/>
-        </p:nvSpPr>
-        <p:spPr>
-          <a:xfrm rot="0" flipH="0" flipV="0">
-            <a:off x="609600" y="3419475"/>
-            <a:ext cx="2400300" cy="9525"/>
-          </a:xfrm>
-          <a:prstGeom prst="rect">
-            <a:avLst/>
-          </a:prstGeom>
-          <a:solidFill>
-            <a:srgbClr val="8EB5F0"/>
-          </a:solidFill>
-          <a:ln/>
-        </p:spPr>
-        <p:txBody>
-          <a:bodyPr/>
-          <a:p/>
-        </p:txBody>
-      </p:sp>
-      <p:sp>
-        <p:nvSpPr>
-          <p:cNvPr id="218" name="" descr="{&quot;isTemplate&quot;:true,&quot;type&quot;:&quot;text&quot;}"/>
-          <p:cNvSpPr txBox="1"/>
-          <p:nvPr/>
-        </p:nvSpPr>
-        <p:spPr>
-          <a:xfrm rot="0" flipH="0" flipV="0">
-            <a:off x="609600" y="3600450"/>
-            <a:ext cx="2466975" cy="1685925"/>
-          </a:xfrm>
-          <a:prstGeom prst="rect"/>
-        </p:spPr>
-        <p:txBody>
-          <a:bodyPr wrap="square" lIns="0" tIns="0" rIns="0" bIns="0">
-            <a:normAutofit/>
-          </a:bodyPr>
-          <a:p>
-            <a:pPr>
-              <a:lnSpc>
-                <a:spcPct val="140000"/>
-              </a:lnSpc>
-            </a:pPr>
-            <a:r>
-              <a:rPr lang="en-US" sz="1575">
-                <a:solidFill>
-                  <a:srgbClr val="DCEBFF"/>
-                </a:solidFill>
-                <a:latin typeface="Microsoft YaHei"/>
-                <a:ea typeface="Microsoft YaHei"/>
-              </a:rPr>
-              <a:t>16 readable</a:t>
-            </a:r>
-            <a:endParaRPr/>
-          </a:p>
-          <a:p>
-            <a:pPr>
-              <a:lnSpc>
-                <a:spcPct val="140000"/>
-              </a:lnSpc>
-            </a:pPr>
-            <a:r>
-              <a:rPr lang="en-US" sz="1575">
-                <a:solidFill>
-                  <a:srgbClr val="DCEBFF"/>
-                </a:solidFill>
-                <a:latin typeface="Microsoft YaHei"/>
-                <a:ea typeface="Microsoft YaHei"/>
-              </a:rPr>
-              <a:t>19 NO_EVIDENCE</a:t>
-            </a:r>
-            <a:endParaRPr/>
-          </a:p>
-          <a:p>
-            <a:pPr>
-              <a:lnSpc>
-                <a:spcPct val="140000"/>
-              </a:lnSpc>
-            </a:pPr>
-            <a:r>
-              <a:rPr lang="en-US" sz="1575">
-                <a:solidFill>
-                  <a:srgbClr val="DCEBFF"/>
-                </a:solidFill>
-                <a:latin typeface="Microsoft YaHei"/>
-                <a:ea typeface="Microsoft YaHei"/>
-              </a:rPr>
-              <a:t>35 UNDETERMINED</a:t>
-            </a:r>
-            <a:endParaRPr/>
-          </a:p>
-          <a:p>
-            <a:pPr>
-              <a:lnSpc>
-                <a:spcPct val="140000"/>
-              </a:lnSpc>
-            </a:pPr>
-            <a:r>
-              <a:rPr lang="en-US" sz="1575">
-                <a:solidFill>
-                  <a:srgbClr val="DCEBFF"/>
-                </a:solidFill>
-                <a:latin typeface="Microsoft YaHei"/>
-                <a:ea typeface="Microsoft YaHei"/>
-              </a:rPr>
-              <a:t>54 NO_EFFECTIVE_EVIDENCE</a:t>
-            </a:r>
-            <a:endParaRPr/>
-          </a:p>
-        </p:txBody>
-      </p:sp>
-      <p:sp>
-        <p:nvSpPr>
-          <p:cNvPr id="219" name=""/>
-          <p:cNvSpPr/>
-          <p:nvPr/>
-        </p:nvSpPr>
-        <p:spPr>
-          <a:xfrm rot="0" flipH="0" flipV="0">
-            <a:off x="3505200" y="1390650"/>
-            <a:ext cx="8305800" cy="4476750"/>
-          </a:xfrm>
-          <a:prstGeom prst="rect">
-            <a:avLst/>
-          </a:prstGeom>
-          <a:solidFill>
-            <a:srgbClr val="F7F9FC"/>
-          </a:solidFill>
-          <a:ln w="12700">
-            <a:solidFill>
-              <a:srgbClr val="D6DCE5"/>
-            </a:solidFill>
-            <a:prstDash val="solid"/>
-          </a:ln>
-        </p:spPr>
-        <p:txBody>
-          <a:bodyPr/>
-          <a:p/>
-        </p:txBody>
-      </p:sp>
-      <p:pic>
-        <p:nvPicPr>
-          <p:cNvPr id="220" name=""/>
-          <p:cNvPicPr>
-            <a:picLocks noChangeAspect="1"/>
-          </p:cNvPicPr>
-          <p:nvPr/>
-        </p:nvPicPr>
-        <p:blipFill>
-          <a:blip>
-            <a:extLst>
-              <a:ext uri="{96DAC541-7B7A-43D3-8B79-37D633B846F1}">
-                <asvg:svgBlip r:embed="rId1"/>
-              </a:ext>
-            </a:extLst>
-          </a:blip>
-          <a:srcRect l="0" t="4812" r="0" b="4812"/>
-          <a:stretch>
-            <a:fillRect/>
-          </a:stretch>
-        </p:blipFill>
-        <p:spPr>
-          <a:xfrm rot="0" flipH="0" flipV="0">
-            <a:off x="3619500" y="1504950"/>
-            <a:ext cx="8058150" cy="4248150"/>
-          </a:xfrm>
-          <a:prstGeom prst="rect">
-            <a:avLst/>
-          </a:prstGeom>
-          <a:ln/>
-        </p:spPr>
-      </p:pic>
-      <p:sp>
-        <p:nvSpPr>
-          <p:cNvPr id="221" name="" descr="{&quot;isTemplate&quot;:true,&quot;type&quot;:&quot;text&quot;}"/>
-          <p:cNvSpPr txBox="1"/>
-          <p:nvPr/>
-        </p:nvSpPr>
-        <p:spPr>
-          <a:xfrm rot="0" flipH="0" flipV="0">
-            <a:off x="381000" y="6191250"/>
-            <a:ext cx="3105150" cy="161925"/>
-          </a:xfrm>
-          <a:prstGeom prst="rect"/>
-        </p:spPr>
-        <p:txBody>
-          <a:bodyPr wrap="none" lIns="0" tIns="0" rIns="0" bIns="0"/>
-          <a:p>
-            <a:pPr>
-              <a:lnSpc>
-                <a:spcPct val="100000"/>
-              </a:lnSpc>
-            </a:pPr>
-            <a:r>
-              <a:rPr lang="en-US" sz="1050">
-                <a:solidFill>
-                  <a:srgbClr val="D9534F"/>
-                </a:solidFill>
-                <a:latin typeface="Microsoft YaHei"/>
-                <a:ea typeface="Microsoft YaHei"/>
-              </a:rPr>
-              <a:t>54 </a:t>
-            </a:r>
-            <a:r>
-              <a:rPr lang="zh-CN" sz="1050">
-                <a:solidFill>
-                  <a:srgbClr val="D9534F"/>
-                </a:solidFill>
-                <a:latin typeface="Microsoft YaHei"/>
-                <a:ea typeface="Microsoft YaHei"/>
-              </a:rPr>
-              <a:t>不是</a:t>
-            </a:r>
-            <a:r>
-              <a:rPr lang="en-US" sz="1050">
-                <a:solidFill>
-                  <a:srgbClr val="D9534F"/>
-                </a:solidFill>
-                <a:latin typeface="Microsoft YaHei"/>
-                <a:ea typeface="Microsoft YaHei"/>
-              </a:rPr>
-              <a:t> 54 </a:t>
-            </a:r>
-            <a:r>
-              <a:rPr lang="zh-CN" sz="1050">
-                <a:solidFill>
-                  <a:srgbClr val="D9534F"/>
-                </a:solidFill>
-                <a:latin typeface="Microsoft YaHei"/>
-                <a:ea typeface="Microsoft YaHei"/>
-              </a:rPr>
-              <a:t>个零分，而是没有有效证据支持数值判断</a:t>
-            </a:r>
-            <a:endParaRPr/>
-          </a:p>
-        </p:txBody>
-      </p:sp>
-      <p:sp>
-        <p:nvSpPr>
-          <p:cNvPr id="222" name="" descr="{&quot;isTemplate&quot;:true,&quot;type&quot;:&quot;text&quot;}"/>
-          <p:cNvSpPr txBox="1"/>
-          <p:nvPr/>
-        </p:nvSpPr>
-        <p:spPr>
-          <a:xfrm rot="0" flipH="0" flipV="0">
-            <a:off x="11353800" y="6191250"/>
-            <a:ext cx="457200" cy="161925"/>
-          </a:xfrm>
-          <a:prstGeom prst="rect"/>
-        </p:spPr>
-        <p:txBody>
-          <a:bodyPr wrap="none" lIns="0" tIns="0" rIns="0" bIns="0"/>
-          <a:p>
-            <a:pPr>
-              <a:lnSpc>
-                <a:spcPct val="100000"/>
-              </a:lnSpc>
-            </a:pPr>
-            <a:r>
-              <a:rPr lang="en-US" sz="1050">
-                <a:solidFill>
-                  <a:srgbClr val="0E3F8C"/>
-                </a:solidFill>
-                <a:latin typeface="Microsoft YaHei"/>
-                <a:ea typeface="Microsoft YaHei"/>
-              </a:rPr>
-              <a:t>04 / 10</a:t>
-            </a:r>
-            <a:endParaRPr/>
-          </a:p>
-        </p:txBody>
-      </p:sp>
-    </p:spTree>
-  </p:cSld>
-</p:sld>
-</file>
-
-<file path=ppt/slides/slide5.xml><?xml version="1.0" encoding="utf-8"?>
-<p:sld xmlns:p="http://schemas.openxmlformats.org/presentationml/2006/main" xmlns:r="http://schemas.openxmlformats.org/officeDocument/2006/relationships" xmlns:a="http://schemas.openxmlformats.org/drawingml/2006/main" xmlns:asvg="http://schemas.microsoft.com/office/drawing/2016/SVG/main" xmlns:mc="http://schemas.openxmlformats.org/markup-compatibility/2006" mc:Ignorable="asvg">
-  <p:cSld>
-    <p:spTree>
-      <p:nvGrpSpPr>
-        <p:cNvPr id="223" name="" descr="&lt;Slide style={{ width: 1280, height: 720, background: '#FFFFFF', padding: 40 }}&gt;&#10;  &lt;Box style={{ height: 88, borderBottom: '3px solid #1E4FA8', justifyContent: 'center' }}&gt;&lt;Text style={{ fontSize: 36, color: '#0E3F8C', fontWeight: 'bold' }}&gt;公共缩放退化：分数不动，但支持下降&lt;/Text&gt;&lt;Text style={{ fontSize: 18, color: '#4A5568', marginTop: 6 }}&gt;稳定的归一化 score 不能替代稳定的 evidence support&lt;/Text&gt;&lt;/Box&gt;&#10;  &lt;Box style={{ height: 500, flexDirection: 'row', gap: 28, paddingTop: 18 }}&gt;&#10;    &lt;Box style={{ width: 770, height: 470, border: '1px solid #D6DCE5', padding: 12, background: '#F7F9FC' }}&gt;&lt;Image src=&quot;assets/F4_parameter_perturbation.svg&quot; style={{ width: 744, height: 444, objectFit: 'contain' }} /&gt;&lt;/Box&gt;&#10;    &lt;Box style={{ width: 402, height: 470, padding: 24, gap: 18, background: '#F0F5FC' }}&gt;&lt;Text style={{ fontSize: 25, color: '#0E3F8C', fontWeight: 'bold' }}&gt;锁定机制&lt;/Text&gt;&lt;Text style={{ fontSize: 21, color: '#1A2230', lineHeight: 1.4 }}&gt;16 条可判读记录共享：&lt;/Text&gt;&lt;Text style={{ fontSize: 21, color: '#1A2230', lineHeight: 1.4 }}&gt;prompt=true&lt;br /&gt;context=false&lt;br /&gt;confidence=medium&lt;br /&gt;R = 0.375&lt;/Text&gt;&lt;Box style={{ borderTop: '2px solid #1E4FA8', paddingTop: 14 }}&gt;&lt;Text style={{ fontSize: 21, color: '#1E4FA8', fontWeight: 'bold' }}&gt;weight：16 → 12 → 6 → 6&lt;/Text&gt;&lt;Text style={{ fontSize: 21, color: '#1E4FA8', fontWeight: 'bold', marginTop: 8 }}&gt;coverage：0.228571 → 0.085714&lt;/Text&gt;&lt;/Box&gt;&lt;/Box&gt;&#10;  &lt;/Box&gt;&#10;  &lt;Box style={{ height: 50, flexDirection: 'row', justifyContent: 'space-between', alignItems: 'center' }}&gt;&lt;Text style={{ fontSize: 17, color: '#4A5568' }}&gt;ABL / HOT / Gap = 3.5625 / 0.375 / 1.125（Raw=Adjusted，不是提升）&lt;/Text&gt;&lt;Text style={{ fontSize: 14, color: '#0E3F8C' }}&gt;05 / 10&lt;/Text&gt;&lt;/Box&gt;&#10;&lt;/Slide&gt;"/>
-        <p:cNvGrpSpPr/>
-        <p:nvPr/>
-      </p:nvGrpSpPr>
-      <p:grpSpPr>
-        <a:xfrm>
-          <a:off x="0" y="0"/>
-          <a:ext cx="0" cy="0"/>
-          <a:chOff x="0" y="0"/>
-          <a:chExt cx="0" cy="0"/>
-        </a:xfrm>
-      </p:grpSpPr>
-      <p:sp>
-        <p:nvSpPr>
-          <p:cNvPr id="224" name=""/>
-          <p:cNvSpPr/>
-          <p:nvPr/>
-        </p:nvSpPr>
-        <p:spPr>
-          <a:xfrm rot="0" flipH="0" flipV="0">
-            <a:off x="0" y="0"/>
-            <a:ext cx="12192000" cy="6858000"/>
-          </a:xfrm>
-          <a:prstGeom prst="rect">
-            <a:avLst/>
-          </a:prstGeom>
-          <a:solidFill>
-            <a:srgbClr val="FFFFFF"/>
-          </a:solidFill>
-          <a:ln/>
-        </p:spPr>
-        <p:txBody>
-          <a:bodyPr/>
-          <a:p/>
-        </p:txBody>
-      </p:sp>
-      <p:sp>
-        <p:nvSpPr>
-          <p:cNvPr id="225" name=""/>
-          <p:cNvSpPr/>
-          <p:nvPr/>
-        </p:nvSpPr>
-        <p:spPr>
-          <a:xfrm rot="0" flipH="0" flipV="0">
-            <a:off x="381000" y="381000"/>
-            <a:ext cx="11430000" cy="838200"/>
-          </a:xfrm>
-          <a:custGeom>
-            <a:pathLst>
-              <a:path w="1200" h="88">
-                <a:moveTo>
-                  <a:pt x="0" y="85"/>
-                </a:moveTo>
-                <a:lnTo>
-                  <a:pt x="1200" y="85"/>
-                </a:lnTo>
-                <a:lnTo>
-                  <a:pt x="1200" y="88"/>
-                </a:lnTo>
-                <a:lnTo>
-                  <a:pt x="0" y="88"/>
-                </a:lnTo>
-                <a:close/>
-              </a:path>
-            </a:pathLst>
-          </a:custGeom>
-          <a:solidFill>
-            <a:srgbClr val="1E4FA8"/>
-          </a:solidFill>
-          <a:ln/>
-        </p:spPr>
-        <p:txBody>
-          <a:bodyPr/>
-          <a:p/>
-        </p:txBody>
-      </p:sp>
-      <p:sp>
-        <p:nvSpPr>
-          <p:cNvPr id="226" name="" descr="{&quot;isTemplate&quot;:true,&quot;type&quot;:&quot;text&quot;}"/>
-          <p:cNvSpPr txBox="1"/>
-          <p:nvPr/>
-        </p:nvSpPr>
-        <p:spPr>
-          <a:xfrm rot="0" flipH="0" flipV="0">
-            <a:off x="381000" y="447675"/>
-            <a:ext cx="11430000" cy="419100"/>
-          </a:xfrm>
-          <a:prstGeom prst="rect"/>
-        </p:spPr>
-        <p:txBody>
-          <a:bodyPr wrap="none" lIns="0" tIns="0" rIns="0" bIns="0"/>
-          <a:p>
-            <a:pPr>
-              <a:lnSpc>
-                <a:spcPct val="100000"/>
-              </a:lnSpc>
-            </a:pPr>
-            <a:r>
-              <a:rPr lang="zh-CN" sz="2700" b="1">
-                <a:solidFill>
-                  <a:srgbClr val="0E3F8C"/>
-                </a:solidFill>
-                <a:latin typeface="Microsoft YaHei"/>
-                <a:ea typeface="Microsoft YaHei"/>
-              </a:rPr>
-              <a:t>公共缩放退化：分数不动，但支持下降</a:t>
-            </a:r>
-            <a:endParaRPr/>
-          </a:p>
-        </p:txBody>
-      </p:sp>
-      <p:sp>
-        <p:nvSpPr>
-          <p:cNvPr id="227" name="" descr="{&quot;isTemplate&quot;:true,&quot;type&quot;:&quot;text&quot;}"/>
-          <p:cNvSpPr txBox="1"/>
-          <p:nvPr/>
-        </p:nvSpPr>
-        <p:spPr>
-          <a:xfrm rot="0" flipH="0" flipV="0">
-            <a:off x="381000" y="923925"/>
-            <a:ext cx="11430000" cy="209550"/>
-          </a:xfrm>
-          <a:prstGeom prst="rect"/>
-        </p:spPr>
-        <p:txBody>
-          <a:bodyPr wrap="none" lIns="0" tIns="0" rIns="0" bIns="0"/>
-          <a:p>
-            <a:pPr>
-              <a:lnSpc>
-                <a:spcPct val="100000"/>
-              </a:lnSpc>
-            </a:pPr>
-            <a:r>
-              <a:rPr lang="zh-CN" sz="1350">
-                <a:solidFill>
-                  <a:srgbClr val="4A5568"/>
-                </a:solidFill>
-                <a:latin typeface="Microsoft YaHei"/>
-                <a:ea typeface="Microsoft YaHei"/>
-              </a:rPr>
-              <a:t>稳定的归一化</a:t>
-            </a:r>
-            <a:r>
-              <a:rPr lang="en-US" sz="1350">
-                <a:solidFill>
-                  <a:srgbClr val="4A5568"/>
-                </a:solidFill>
-                <a:latin typeface="Microsoft YaHei"/>
-                <a:ea typeface="Microsoft YaHei"/>
-              </a:rPr>
-              <a:t> score </a:t>
-            </a:r>
-            <a:r>
-              <a:rPr lang="zh-CN" sz="1350">
-                <a:solidFill>
-                  <a:srgbClr val="4A5568"/>
-                </a:solidFill>
-                <a:latin typeface="Microsoft YaHei"/>
-                <a:ea typeface="Microsoft YaHei"/>
-              </a:rPr>
-              <a:t>不能替代稳定的</a:t>
-            </a:r>
-            <a:r>
-              <a:rPr lang="en-US" sz="1350">
-                <a:solidFill>
-                  <a:srgbClr val="4A5568"/>
-                </a:solidFill>
-                <a:latin typeface="Microsoft YaHei"/>
-                <a:ea typeface="Microsoft YaHei"/>
-              </a:rPr>
-              <a:t> evidence support</a:t>
-            </a:r>
-            <a:endParaRPr/>
-          </a:p>
-        </p:txBody>
-      </p:sp>
-      <p:sp>
-        <p:nvSpPr>
-          <p:cNvPr id="228" name=""/>
-          <p:cNvSpPr/>
-          <p:nvPr/>
-        </p:nvSpPr>
-        <p:spPr>
-          <a:xfrm rot="0" flipH="0" flipV="0">
-            <a:off x="381000" y="1390650"/>
-            <a:ext cx="7334250" cy="4476750"/>
-          </a:xfrm>
-          <a:prstGeom prst="rect">
-            <a:avLst/>
-          </a:prstGeom>
-          <a:solidFill>
-            <a:srgbClr val="F7F9FC"/>
-          </a:solidFill>
-          <a:ln w="12700">
-            <a:solidFill>
-              <a:srgbClr val="D6DCE5"/>
-            </a:solidFill>
-            <a:prstDash val="solid"/>
-          </a:ln>
-        </p:spPr>
-        <p:txBody>
-          <a:bodyPr/>
-          <a:p/>
-        </p:txBody>
-      </p:sp>
-      <p:pic>
-        <p:nvPicPr>
-          <p:cNvPr id="229" name=""/>
-          <p:cNvPicPr>
-            <a:picLocks noChangeAspect="1"/>
-          </p:cNvPicPr>
-          <p:nvPr/>
-        </p:nvPicPr>
-        <p:blipFill>
-          <a:blip>
-            <a:extLst>
-              <a:ext uri="{96DAC541-7B7A-43D3-8B79-37D633B846F1}">
-                <asvg:svgBlip r:embed="rId1"/>
-              </a:ext>
-            </a:extLst>
-          </a:blip>
-          <a:srcRect l="1126" t="0" r="1126" b="0"/>
-          <a:stretch>
-            <a:fillRect/>
-          </a:stretch>
-        </p:blipFill>
-        <p:spPr>
-          <a:xfrm rot="0" flipH="0" flipV="0">
-            <a:off x="495300" y="1504950"/>
-            <a:ext cx="7086600" cy="4229100"/>
-          </a:xfrm>
-          <a:prstGeom prst="rect">
-            <a:avLst/>
-          </a:prstGeom>
-          <a:ln/>
-        </p:spPr>
-      </p:pic>
-      <p:sp>
-        <p:nvSpPr>
-          <p:cNvPr id="230" name=""/>
-          <p:cNvSpPr/>
-          <p:nvPr/>
-        </p:nvSpPr>
-        <p:spPr>
-          <a:xfrm rot="0" flipH="0" flipV="0">
-            <a:off x="7981950" y="1390650"/>
-            <a:ext cx="3829050" cy="4476750"/>
-          </a:xfrm>
-          <a:prstGeom prst="rect">
-            <a:avLst/>
-          </a:prstGeom>
-          <a:solidFill>
-            <a:srgbClr val="F0F5FC"/>
-          </a:solidFill>
-          <a:ln/>
-        </p:spPr>
-        <p:txBody>
-          <a:bodyPr/>
-          <a:p/>
-        </p:txBody>
-      </p:sp>
-      <p:sp>
-        <p:nvSpPr>
-          <p:cNvPr id="231" name="" descr="{&quot;isTemplate&quot;:true,&quot;type&quot;:&quot;text&quot;}"/>
-          <p:cNvSpPr txBox="1"/>
-          <p:nvPr/>
-        </p:nvSpPr>
-        <p:spPr>
-          <a:xfrm rot="0" flipH="0" flipV="0">
-            <a:off x="8210550" y="1619250"/>
-            <a:ext cx="3371850" cy="285750"/>
-          </a:xfrm>
-          <a:prstGeom prst="rect"/>
-        </p:spPr>
-        <p:txBody>
-          <a:bodyPr wrap="none" lIns="0" tIns="0" rIns="0" bIns="0"/>
-          <a:p>
-            <a:pPr>
-              <a:lnSpc>
-                <a:spcPct val="100000"/>
-              </a:lnSpc>
-            </a:pPr>
-            <a:r>
-              <a:rPr lang="zh-CN" sz="1875" b="1">
-                <a:solidFill>
-                  <a:srgbClr val="0E3F8C"/>
-                </a:solidFill>
-                <a:latin typeface="Microsoft YaHei"/>
-                <a:ea typeface="Microsoft YaHei"/>
-              </a:rPr>
-              <a:t>锁定机制</a:t>
-            </a:r>
-            <a:endParaRPr/>
-          </a:p>
-        </p:txBody>
-      </p:sp>
-      <p:sp>
-        <p:nvSpPr>
-          <p:cNvPr id="232" name="" descr="{&quot;isTemplate&quot;:true,&quot;type&quot;:&quot;text&quot;}"/>
-          <p:cNvSpPr txBox="1"/>
-          <p:nvPr/>
-        </p:nvSpPr>
-        <p:spPr>
-          <a:xfrm rot="0" flipH="0" flipV="0">
-            <a:off x="8210550" y="2076450"/>
-            <a:ext cx="3371850" cy="342900"/>
-          </a:xfrm>
-          <a:prstGeom prst="rect"/>
-        </p:spPr>
-        <p:txBody>
-          <a:bodyPr wrap="none" lIns="0" tIns="0" rIns="0" bIns="0"/>
-          <a:p>
-            <a:pPr>
-              <a:lnSpc>
-                <a:spcPct val="140000"/>
-              </a:lnSpc>
-            </a:pPr>
-            <a:r>
-              <a:rPr lang="en-US" sz="1575">
-                <a:solidFill>
-                  <a:srgbClr val="1A2230"/>
-                </a:solidFill>
-                <a:latin typeface="Microsoft YaHei"/>
-                <a:ea typeface="Microsoft YaHei"/>
-              </a:rPr>
-              <a:t>16 </a:t>
-            </a:r>
-            <a:r>
-              <a:rPr lang="zh-CN" sz="1575">
-                <a:solidFill>
-                  <a:srgbClr val="1A2230"/>
-                </a:solidFill>
-                <a:latin typeface="Microsoft YaHei"/>
-                <a:ea typeface="Microsoft YaHei"/>
-              </a:rPr>
-              <a:t>条可判读记录共享：</a:t>
-            </a:r>
-            <a:endParaRPr/>
-          </a:p>
-        </p:txBody>
-      </p:sp>
-      <p:sp>
-        <p:nvSpPr>
-          <p:cNvPr id="233" name="" descr="{&quot;isTemplate&quot;:true,&quot;type&quot;:&quot;text&quot;}"/>
-          <p:cNvSpPr txBox="1"/>
-          <p:nvPr/>
-        </p:nvSpPr>
-        <p:spPr>
-          <a:xfrm rot="0" flipH="0" flipV="0">
-            <a:off x="8210550" y="2590800"/>
-            <a:ext cx="3371850" cy="1352550"/>
-          </a:xfrm>
-          <a:prstGeom prst="rect"/>
-        </p:spPr>
-        <p:txBody>
-          <a:bodyPr wrap="none" lIns="0" tIns="0" rIns="0" bIns="0"/>
-          <a:p>
-            <a:pPr>
-              <a:lnSpc>
-                <a:spcPct val="140000"/>
-              </a:lnSpc>
-            </a:pPr>
-            <a:r>
-              <a:rPr lang="en-US" sz="1575">
-                <a:solidFill>
-                  <a:srgbClr val="1A2230"/>
-                </a:solidFill>
-                <a:latin typeface="Microsoft YaHei"/>
-                <a:ea typeface="Microsoft YaHei"/>
-              </a:rPr>
-              <a:t>prompt=true</a:t>
-            </a:r>
-            <a:endParaRPr/>
-          </a:p>
-          <a:p>
-            <a:pPr>
-              <a:lnSpc>
-                <a:spcPct val="140000"/>
-              </a:lnSpc>
-            </a:pPr>
-            <a:r>
-              <a:rPr lang="en-US" sz="1575">
-                <a:solidFill>
-                  <a:srgbClr val="1A2230"/>
-                </a:solidFill>
-                <a:latin typeface="Microsoft YaHei"/>
-                <a:ea typeface="Microsoft YaHei"/>
-              </a:rPr>
-              <a:t>context=false</a:t>
-            </a:r>
-            <a:endParaRPr/>
-          </a:p>
-          <a:p>
-            <a:pPr>
-              <a:lnSpc>
-                <a:spcPct val="140000"/>
-              </a:lnSpc>
-            </a:pPr>
-            <a:r>
-              <a:rPr lang="en-US" sz="1575">
-                <a:solidFill>
-                  <a:srgbClr val="1A2230"/>
-                </a:solidFill>
-                <a:latin typeface="Microsoft YaHei"/>
-                <a:ea typeface="Microsoft YaHei"/>
-              </a:rPr>
-              <a:t>confidence=medium</a:t>
-            </a:r>
-            <a:endParaRPr/>
-          </a:p>
-          <a:p>
-            <a:pPr>
-              <a:lnSpc>
-                <a:spcPct val="140000"/>
-              </a:lnSpc>
-            </a:pPr>
-            <a:r>
-              <a:rPr lang="en-US" sz="1575">
-                <a:solidFill>
-                  <a:srgbClr val="1A2230"/>
-                </a:solidFill>
-                <a:latin typeface="Microsoft YaHei"/>
-                <a:ea typeface="Microsoft YaHei"/>
-              </a:rPr>
-              <a:t>R = 0.375</a:t>
-            </a:r>
-            <a:endParaRPr/>
-          </a:p>
-        </p:txBody>
-      </p:sp>
-      <p:sp>
-        <p:nvSpPr>
-          <p:cNvPr id="234" name=""/>
-          <p:cNvSpPr/>
-          <p:nvPr/>
-        </p:nvSpPr>
-        <p:spPr>
-          <a:xfrm rot="0" flipH="0" flipV="0">
-            <a:off x="8210550" y="4114800"/>
-            <a:ext cx="3371850" cy="742950"/>
-          </a:xfrm>
-          <a:custGeom>
-            <a:pathLst>
-              <a:path w="354" h="78">
-                <a:moveTo>
-                  <a:pt x="0" y="0"/>
-                </a:moveTo>
-                <a:lnTo>
-                  <a:pt x="354" y="0"/>
-                </a:lnTo>
-                <a:lnTo>
-                  <a:pt x="354" y="2"/>
-                </a:lnTo>
-                <a:lnTo>
-                  <a:pt x="0" y="2"/>
-                </a:lnTo>
-                <a:close/>
-              </a:path>
-            </a:pathLst>
-          </a:custGeom>
-          <a:solidFill>
-            <a:srgbClr val="1E4FA8"/>
-          </a:solidFill>
-          <a:ln/>
-        </p:spPr>
-        <p:txBody>
-          <a:bodyPr/>
-          <a:p/>
-        </p:txBody>
-      </p:sp>
-      <p:sp>
-        <p:nvSpPr>
-          <p:cNvPr id="235" name="" descr="{&quot;isTemplate&quot;:true,&quot;type&quot;:&quot;text&quot;}"/>
-          <p:cNvSpPr txBox="1"/>
-          <p:nvPr/>
-        </p:nvSpPr>
-        <p:spPr>
-          <a:xfrm rot="0" flipH="0" flipV="0">
-            <a:off x="8210550" y="4267200"/>
-            <a:ext cx="3371850" cy="247650"/>
-          </a:xfrm>
-          <a:prstGeom prst="rect"/>
-        </p:spPr>
-        <p:txBody>
-          <a:bodyPr wrap="none" lIns="0" tIns="0" rIns="0" bIns="0"/>
-          <a:p>
-            <a:pPr>
-              <a:lnSpc>
-                <a:spcPct val="100000"/>
-              </a:lnSpc>
-            </a:pPr>
-            <a:r>
-              <a:rPr lang="en-US" sz="1575" b="1">
-                <a:solidFill>
-                  <a:srgbClr val="1E4FA8"/>
-                </a:solidFill>
-                <a:latin typeface="Microsoft YaHei"/>
-                <a:ea typeface="Microsoft YaHei"/>
-              </a:rPr>
-              <a:t>weight</a:t>
-            </a:r>
-            <a:r>
-              <a:rPr lang="zh-CN" sz="1575" b="1">
-                <a:solidFill>
-                  <a:srgbClr val="1E4FA8"/>
-                </a:solidFill>
-                <a:latin typeface="Microsoft YaHei"/>
-                <a:ea typeface="Microsoft YaHei"/>
-              </a:rPr>
-              <a:t>：</a:t>
-            </a:r>
-            <a:r>
-              <a:rPr lang="en-US" sz="1575" b="1">
-                <a:solidFill>
-                  <a:srgbClr val="1E4FA8"/>
-                </a:solidFill>
-                <a:latin typeface="Microsoft YaHei"/>
-                <a:ea typeface="Microsoft YaHei"/>
-              </a:rPr>
-              <a:t>16 → 12 → 6 → 6</a:t>
-            </a:r>
-            <a:endParaRPr/>
-          </a:p>
-        </p:txBody>
-      </p:sp>
-      <p:sp>
-        <p:nvSpPr>
-          <p:cNvPr id="236" name="" descr="{&quot;isTemplate&quot;:true,&quot;type&quot;:&quot;text&quot;}"/>
-          <p:cNvSpPr txBox="1"/>
-          <p:nvPr/>
-        </p:nvSpPr>
-        <p:spPr>
-          <a:xfrm rot="0" flipH="0" flipV="0">
-            <a:off x="8210550" y="4591050"/>
-            <a:ext cx="3371850" cy="247650"/>
-          </a:xfrm>
-          <a:prstGeom prst="rect"/>
-        </p:spPr>
-        <p:txBody>
-          <a:bodyPr wrap="none" lIns="0" tIns="0" rIns="0" bIns="0"/>
-          <a:p>
-            <a:pPr>
-              <a:lnSpc>
-                <a:spcPct val="100000"/>
-              </a:lnSpc>
-            </a:pPr>
-            <a:r>
-              <a:rPr lang="en-US" sz="1575" b="1">
-                <a:solidFill>
-                  <a:srgbClr val="1E4FA8"/>
-                </a:solidFill>
-                <a:latin typeface="Microsoft YaHei"/>
-                <a:ea typeface="Microsoft YaHei"/>
-              </a:rPr>
-              <a:t>coverage</a:t>
-            </a:r>
-            <a:r>
-              <a:rPr lang="zh-CN" sz="1575" b="1">
-                <a:solidFill>
-                  <a:srgbClr val="1E4FA8"/>
-                </a:solidFill>
-                <a:latin typeface="Microsoft YaHei"/>
-                <a:ea typeface="Microsoft YaHei"/>
-              </a:rPr>
-              <a:t>：</a:t>
-            </a:r>
-            <a:r>
-              <a:rPr lang="en-US" sz="1575" b="1">
-                <a:solidFill>
-                  <a:srgbClr val="1E4FA8"/>
-                </a:solidFill>
-                <a:latin typeface="Microsoft YaHei"/>
-                <a:ea typeface="Microsoft YaHei"/>
-              </a:rPr>
-              <a:t>0.228571 → 0.085714</a:t>
-            </a:r>
-            <a:endParaRPr/>
-          </a:p>
-        </p:txBody>
-      </p:sp>
-      <p:sp>
-        <p:nvSpPr>
-          <p:cNvPr id="237" name="" descr="{&quot;isTemplate&quot;:true,&quot;type&quot;:&quot;text&quot;}"/>
-          <p:cNvSpPr txBox="1"/>
-          <p:nvPr/>
-        </p:nvSpPr>
-        <p:spPr>
-          <a:xfrm rot="0" flipH="0" flipV="0">
-            <a:off x="381000" y="6124575"/>
-            <a:ext cx="5448300" cy="200025"/>
-          </a:xfrm>
-          <a:prstGeom prst="rect"/>
-        </p:spPr>
-        <p:txBody>
-          <a:bodyPr wrap="none" lIns="0" tIns="0" rIns="0" bIns="0"/>
-          <a:p>
-            <a:pPr>
-              <a:lnSpc>
-                <a:spcPct val="100000"/>
-              </a:lnSpc>
-            </a:pPr>
-            <a:r>
-              <a:rPr lang="en-US" sz="1275">
-                <a:solidFill>
-                  <a:srgbClr val="4A5568"/>
-                </a:solidFill>
-                <a:latin typeface="Microsoft YaHei"/>
-                <a:ea typeface="Microsoft YaHei"/>
-              </a:rPr>
-              <a:t>ABL / HOT / Gap = 3.5625 / 0.375 / 1.125</a:t>
-            </a:r>
-            <a:r>
-              <a:rPr lang="zh-CN" sz="1275">
-                <a:solidFill>
-                  <a:srgbClr val="4A5568"/>
-                </a:solidFill>
-                <a:latin typeface="Microsoft YaHei"/>
-                <a:ea typeface="Microsoft YaHei"/>
-              </a:rPr>
-              <a:t>（</a:t>
-            </a:r>
-            <a:r>
-              <a:rPr lang="en-US" sz="1275">
-                <a:solidFill>
-                  <a:srgbClr val="4A5568"/>
-                </a:solidFill>
-                <a:latin typeface="Microsoft YaHei"/>
-                <a:ea typeface="Microsoft YaHei"/>
-              </a:rPr>
-              <a:t>Raw=Adjusted</a:t>
-            </a:r>
-            <a:r>
-              <a:rPr lang="zh-CN" sz="1275">
-                <a:solidFill>
-                  <a:srgbClr val="4A5568"/>
-                </a:solidFill>
-                <a:latin typeface="Microsoft YaHei"/>
-                <a:ea typeface="Microsoft YaHei"/>
-              </a:rPr>
-              <a:t>，不是提升）</a:t>
-            </a:r>
-            <a:endParaRPr/>
-          </a:p>
-        </p:txBody>
-      </p:sp>
-      <p:sp>
-        <p:nvSpPr>
-          <p:cNvPr id="238" name="" descr="{&quot;isTemplate&quot;:true,&quot;type&quot;:&quot;text&quot;}"/>
-          <p:cNvSpPr txBox="1"/>
-          <p:nvPr/>
-        </p:nvSpPr>
-        <p:spPr>
-          <a:xfrm rot="0" flipH="0" flipV="0">
-            <a:off x="11353800" y="6143625"/>
-            <a:ext cx="457200" cy="161925"/>
-          </a:xfrm>
-          <a:prstGeom prst="rect"/>
-        </p:spPr>
-        <p:txBody>
-          <a:bodyPr wrap="none" lIns="0" tIns="0" rIns="0" bIns="0"/>
-          <a:p>
-            <a:pPr>
-              <a:lnSpc>
-                <a:spcPct val="100000"/>
-              </a:lnSpc>
-            </a:pPr>
-            <a:r>
-              <a:rPr lang="en-US" sz="1050">
-                <a:solidFill>
-                  <a:srgbClr val="0E3F8C"/>
-                </a:solidFill>
-                <a:latin typeface="Microsoft YaHei"/>
-                <a:ea typeface="Microsoft YaHei"/>
-              </a:rPr>
-              <a:t>05 / 10</a:t>
-            </a:r>
-            <a:endParaRPr/>
-          </a:p>
-        </p:txBody>
-      </p:sp>
-    </p:spTree>
-  </p:cSld>
-</p:sld>
-</file>
-
-<file path=ppt/slides/slide6.xml><?xml version="1.0" encoding="utf-8"?>
-<p:sld xmlns:p="http://schemas.openxmlformats.org/presentationml/2006/main" xmlns:a="http://schemas.openxmlformats.org/drawingml/2006/main">
-  <p:cSld>
-    <p:spTree>
-      <p:nvGrpSpPr>
-        <p:cNvPr id="239" name="" descr="&lt;Slide style={{ width: 1280, height: 720, background: '#F7F9FC', padding: 40 }}&gt;&#10;  &lt;Box style={{ height: 72, background: '#0E3F8C', padding: 18, justifyContent: 'center' }}&gt;&#10;    &lt;Text style={{ fontSize: 22, color: '#FFFFFF', fontWeight: 'bold' }}&gt;教育 AI 增量价值评价｜现场答辩&lt;/Text&gt;&#10;  &lt;/Box&gt;&#10;  &lt;Box style={{ height: 500, padding: 54, justifyContent: 'center', gap: 24 }}&gt;&#10;    &lt;Text style={{ fontSize: 42, color: '#0E3F8C', fontWeight: 'bold', lineHeight: 1.2 }}&gt;观察到的结果，不等于可靠证据&lt;/Text&gt;&#10;    &lt;Text style={{ fontSize: 25, color: '#4A5568', lineHeight: 1.45 }}&gt;当证据缺失、冲突或可信度不同，如何避免把 Raw Signal 直接当成可信结论？&lt;/Text&gt;&#10;    &lt;Box style={{ background: '#E8EFF8', border: '2px solid #1E4FA8', padding: 28, width: 900 }}&gt;&#10;      &lt;Text style={{ fontSize: 34, color: '#1E4FA8', fontWeight: 'bold' }}&gt;Score Stability ≠ Evidence Support Stability&lt;/Text&gt;&#10;      &lt;Text style={{ fontSize: 22, color: '#1A2230', marginTop: 12 }}&gt;分数稳定，不等于证据支撑稳定&lt;/Text&gt;&#10;    &lt;/Box&gt;&#10;    &lt;Text style={{ fontSize: 18, color: '#8B97A8' }}&gt;AI_PROVISIONAL · DEVELOPMENT_ONLY · NOT_HUMAN_VALIDATED&lt;/Text&gt;&#10;  &lt;/Box&gt;&#10;  &lt;Box style={{ height: 40, flexDirection: 'row', justifyContent: 'space-between', alignItems: 'center' }}&gt;&#10;    &lt;Text style={{ fontSize: 14, color: '#8B97A8' }}&gt;PPT_FINAL_CONVERGENCE&lt;/Text&gt;&lt;Text style={{ fontSize: 14, color: '#0E3F8C' }}&gt;01 / 10&lt;/Text&gt;&#10;  &lt;/Box&gt;&#10;&lt;/Slide&gt;"/>
-        <p:cNvGrpSpPr/>
-        <p:nvPr/>
-      </p:nvGrpSpPr>
-      <p:grpSpPr>
-        <a:xfrm>
-          <a:off x="0" y="0"/>
-          <a:ext cx="0" cy="0"/>
-          <a:chOff x="0" y="0"/>
-          <a:chExt cx="0" cy="0"/>
-        </a:xfrm>
-      </p:grpSpPr>
-      <p:sp>
-        <p:nvSpPr>
-          <p:cNvPr id="240" name=""/>
-          <p:cNvSpPr/>
-          <p:nvPr/>
-        </p:nvSpPr>
-        <p:spPr>
-          <a:xfrm rot="0" flipH="0" flipV="0">
-            <a:off x="0" y="0"/>
-            <a:ext cx="12192000" cy="6858000"/>
-          </a:xfrm>
-          <a:prstGeom prst="rect">
-            <a:avLst/>
-          </a:prstGeom>
-          <a:solidFill>
-            <a:srgbClr val="F7F9FC"/>
-          </a:solidFill>
-          <a:ln/>
-        </p:spPr>
-        <p:txBody>
-          <a:bodyPr/>
-          <a:p/>
-        </p:txBody>
-      </p:sp>
-      <p:sp>
-        <p:nvSpPr>
-          <p:cNvPr id="241" name=""/>
-          <p:cNvSpPr/>
-          <p:nvPr/>
-        </p:nvSpPr>
-        <p:spPr>
-          <a:xfrm rot="0" flipH="0" flipV="0">
-            <a:off x="381000" y="381000"/>
-            <a:ext cx="11430000" cy="685800"/>
-          </a:xfrm>
-          <a:prstGeom prst="rect">
-            <a:avLst/>
-          </a:prstGeom>
-          <a:solidFill>
-            <a:srgbClr val="0E3F8C"/>
-          </a:solidFill>
-          <a:ln/>
-        </p:spPr>
-        <p:txBody>
-          <a:bodyPr/>
-          <a:p/>
-        </p:txBody>
-      </p:sp>
-      <p:sp>
-        <p:nvSpPr>
-          <p:cNvPr id="242" name="" descr="{&quot;isTemplate&quot;:true,&quot;type&quot;:&quot;text&quot;}"/>
-          <p:cNvSpPr txBox="1"/>
-          <p:nvPr/>
-        </p:nvSpPr>
-        <p:spPr>
-          <a:xfrm rot="0" flipH="0" flipV="0">
-            <a:off x="552450" y="600075"/>
-            <a:ext cx="11087100" cy="257175"/>
-          </a:xfrm>
-          <a:prstGeom prst="rect"/>
-        </p:spPr>
-        <p:txBody>
-          <a:bodyPr wrap="none" lIns="0" tIns="0" rIns="0" bIns="0"/>
-          <a:p>
-            <a:pPr>
-              <a:lnSpc>
-                <a:spcPct val="100000"/>
-              </a:lnSpc>
-            </a:pPr>
-            <a:r>
-              <a:rPr lang="zh-CN" sz="1650" b="1">
-                <a:solidFill>
-                  <a:srgbClr val="FFFFFF"/>
-                </a:solidFill>
-                <a:latin typeface="Microsoft YaHei"/>
-                <a:ea typeface="Microsoft YaHei"/>
-              </a:rPr>
-              <a:t>教育</a:t>
-            </a:r>
-            <a:r>
-              <a:rPr lang="en-US" sz="1650" b="1">
-                <a:solidFill>
-                  <a:srgbClr val="FFFFFF"/>
-                </a:solidFill>
-                <a:latin typeface="Microsoft YaHei"/>
-                <a:ea typeface="Microsoft YaHei"/>
-              </a:rPr>
-              <a:t> AI </a:t>
-            </a:r>
-            <a:r>
-              <a:rPr lang="zh-CN" sz="1650" b="1">
-                <a:solidFill>
-                  <a:srgbClr val="FFFFFF"/>
-                </a:solidFill>
-                <a:latin typeface="Microsoft YaHei"/>
-                <a:ea typeface="Microsoft YaHei"/>
-              </a:rPr>
-              <a:t>增量价值评价｜现场答辩</a:t>
-            </a:r>
-            <a:endParaRPr/>
-          </a:p>
-        </p:txBody>
-      </p:sp>
-      <p:sp>
-        <p:nvSpPr>
-          <p:cNvPr id="243" name="" descr="{&quot;isTemplate&quot;:true,&quot;type&quot;:&quot;text&quot;}"/>
-          <p:cNvSpPr txBox="1"/>
-          <p:nvPr/>
-        </p:nvSpPr>
-        <p:spPr>
-          <a:xfrm rot="0" flipH="0" flipV="0">
-            <a:off x="895350" y="1857375"/>
-            <a:ext cx="10401300" cy="581025"/>
-          </a:xfrm>
-          <a:prstGeom prst="rect"/>
-        </p:spPr>
-        <p:txBody>
-          <a:bodyPr wrap="none" lIns="0" tIns="0" rIns="0" bIns="0"/>
-          <a:p>
-            <a:pPr>
-              <a:lnSpc>
-                <a:spcPct val="120000"/>
-              </a:lnSpc>
-            </a:pPr>
-            <a:r>
-              <a:rPr lang="zh-CN" sz="3150" b="1">
-                <a:solidFill>
-                  <a:srgbClr val="0E3F8C"/>
-                </a:solidFill>
-                <a:latin typeface="Microsoft YaHei"/>
-                <a:ea typeface="Microsoft YaHei"/>
-              </a:rPr>
-              <a:t>观察到的结果，不等于可靠证据</a:t>
-            </a:r>
-            <a:endParaRPr/>
-          </a:p>
-        </p:txBody>
-      </p:sp>
-      <p:sp>
-        <p:nvSpPr>
-          <p:cNvPr id="244" name="" descr="{&quot;isTemplate&quot;:true,&quot;type&quot;:&quot;text&quot;}"/>
-          <p:cNvSpPr txBox="1"/>
-          <p:nvPr/>
-        </p:nvSpPr>
-        <p:spPr>
-          <a:xfrm rot="0" flipH="0" flipV="0">
-            <a:off x="895350" y="2667000"/>
-            <a:ext cx="10401300" cy="419100"/>
-          </a:xfrm>
-          <a:prstGeom prst="rect"/>
-        </p:spPr>
-        <p:txBody>
-          <a:bodyPr wrap="none" lIns="0" tIns="0" rIns="0" bIns="0"/>
-          <a:p>
-            <a:pPr>
-              <a:lnSpc>
-                <a:spcPct val="145000"/>
-              </a:lnSpc>
-            </a:pPr>
-            <a:r>
-              <a:rPr lang="zh-CN" sz="1875">
-                <a:solidFill>
-                  <a:srgbClr val="4A5568"/>
-                </a:solidFill>
-                <a:latin typeface="Microsoft YaHei"/>
-                <a:ea typeface="Microsoft YaHei"/>
-              </a:rPr>
-              <a:t>当证据缺失、冲突或可信度不同，如何避免把</a:t>
-            </a:r>
-            <a:r>
-              <a:rPr lang="en-US" sz="1875">
-                <a:solidFill>
-                  <a:srgbClr val="4A5568"/>
-                </a:solidFill>
-                <a:latin typeface="Microsoft YaHei"/>
-                <a:ea typeface="Microsoft YaHei"/>
-              </a:rPr>
-              <a:t> Raw Signal </a:t>
-            </a:r>
-            <a:r>
-              <a:rPr lang="zh-CN" sz="1875">
-                <a:solidFill>
-                  <a:srgbClr val="4A5568"/>
-                </a:solidFill>
-                <a:latin typeface="Microsoft YaHei"/>
-                <a:ea typeface="Microsoft YaHei"/>
-              </a:rPr>
-              <a:t>直接当成可信结论？</a:t>
-            </a:r>
-            <a:endParaRPr/>
-          </a:p>
-        </p:txBody>
-      </p:sp>
-      <p:sp>
-        <p:nvSpPr>
-          <p:cNvPr id="245" name=""/>
-          <p:cNvSpPr/>
-          <p:nvPr/>
-        </p:nvSpPr>
-        <p:spPr>
-          <a:xfrm rot="0" flipH="0" flipV="0">
-            <a:off x="895350" y="3314700"/>
-            <a:ext cx="8572500" cy="1295400"/>
-          </a:xfrm>
-          <a:prstGeom prst="rect">
-            <a:avLst/>
-          </a:prstGeom>
-          <a:solidFill>
-            <a:srgbClr val="E8EFF8"/>
-          </a:solidFill>
-          <a:ln w="25400">
-            <a:solidFill>
-              <a:srgbClr val="1E4FA8"/>
-            </a:solidFill>
-            <a:prstDash val="solid"/>
-          </a:ln>
-        </p:spPr>
-        <p:txBody>
-          <a:bodyPr/>
-          <a:p/>
-        </p:txBody>
-      </p:sp>
-      <p:sp>
-        <p:nvSpPr>
-          <p:cNvPr id="246" name="" descr="{&quot;isTemplate&quot;:true,&quot;type&quot;:&quot;text&quot;}"/>
-          <p:cNvSpPr txBox="1"/>
-          <p:nvPr/>
-        </p:nvSpPr>
-        <p:spPr>
-          <a:xfrm rot="0" flipH="0" flipV="0">
-            <a:off x="1162050" y="3581400"/>
-            <a:ext cx="8039100" cy="390525"/>
-          </a:xfrm>
-          <a:prstGeom prst="rect"/>
-        </p:spPr>
-        <p:txBody>
-          <a:bodyPr wrap="none" lIns="0" tIns="0" rIns="0" bIns="0"/>
-          <a:p>
-            <a:pPr>
-              <a:lnSpc>
-                <a:spcPct val="100000"/>
-              </a:lnSpc>
-            </a:pPr>
-            <a:r>
-              <a:rPr lang="en-US" sz="2550" b="1">
-                <a:solidFill>
-                  <a:srgbClr val="1E4FA8"/>
-                </a:solidFill>
-                <a:latin typeface="Microsoft YaHei"/>
-                <a:ea typeface="Microsoft YaHei"/>
-              </a:rPr>
-              <a:t>Score Stability ≠ Evidence Support Stability</a:t>
-            </a:r>
-            <a:endParaRPr/>
-          </a:p>
-        </p:txBody>
-      </p:sp>
-      <p:sp>
-        <p:nvSpPr>
-          <p:cNvPr id="247" name="" descr="{&quot;isTemplate&quot;:true,&quot;type&quot;:&quot;text&quot;}"/>
-          <p:cNvSpPr txBox="1"/>
-          <p:nvPr/>
-        </p:nvSpPr>
-        <p:spPr>
-          <a:xfrm rot="0" flipH="0" flipV="0">
-            <a:off x="1162050" y="4086225"/>
-            <a:ext cx="8039100" cy="257175"/>
-          </a:xfrm>
-          <a:prstGeom prst="rect"/>
-        </p:spPr>
-        <p:txBody>
-          <a:bodyPr wrap="none" lIns="0" tIns="0" rIns="0" bIns="0"/>
-          <a:p>
-            <a:pPr>
-              <a:lnSpc>
-                <a:spcPct val="100000"/>
-              </a:lnSpc>
-            </a:pPr>
-            <a:r>
-              <a:rPr lang="zh-CN" sz="1650">
-                <a:solidFill>
-                  <a:srgbClr val="1A2230"/>
-                </a:solidFill>
-                <a:latin typeface="Microsoft YaHei"/>
-                <a:ea typeface="Microsoft YaHei"/>
-              </a:rPr>
-              <a:t>分数稳定，不等于证据支撑稳定</a:t>
-            </a:r>
-            <a:endParaRPr/>
-          </a:p>
-        </p:txBody>
-      </p:sp>
-      <p:sp>
-        <p:nvSpPr>
-          <p:cNvPr id="248" name="" descr="{&quot;isTemplate&quot;:true,&quot;type&quot;:&quot;text&quot;}"/>
-          <p:cNvSpPr txBox="1"/>
-          <p:nvPr/>
-        </p:nvSpPr>
-        <p:spPr>
-          <a:xfrm rot="0" flipH="0" flipV="0">
-            <a:off x="895350" y="4838700"/>
-            <a:ext cx="10401300" cy="209550"/>
-          </a:xfrm>
-          <a:prstGeom prst="rect"/>
-        </p:spPr>
-        <p:txBody>
-          <a:bodyPr wrap="none" lIns="0" tIns="0" rIns="0" bIns="0"/>
-          <a:p>
-            <a:pPr>
-              <a:lnSpc>
-                <a:spcPct val="100000"/>
-              </a:lnSpc>
-            </a:pPr>
-            <a:r>
-              <a:rPr lang="en-US" sz="1350">
-                <a:solidFill>
-                  <a:srgbClr val="8B97A8"/>
-                </a:solidFill>
-                <a:latin typeface="Microsoft YaHei"/>
-                <a:ea typeface="Microsoft YaHei"/>
-              </a:rPr>
-              <a:t>AI_PROVISIONAL · DEVELOPMENT_ONLY · NOT_HUMAN_VALIDATED</a:t>
-            </a:r>
-            <a:endParaRPr/>
-          </a:p>
-        </p:txBody>
-      </p:sp>
-      <p:sp>
-        <p:nvSpPr>
-          <p:cNvPr id="249" name="" descr="{&quot;isTemplate&quot;:true,&quot;type&quot;:&quot;text&quot;}"/>
-          <p:cNvSpPr txBox="1"/>
-          <p:nvPr/>
-        </p:nvSpPr>
-        <p:spPr>
-          <a:xfrm rot="0" flipH="0" flipV="0">
-            <a:off x="381000" y="5943600"/>
-            <a:ext cx="1743075" cy="161925"/>
-          </a:xfrm>
-          <a:prstGeom prst="rect"/>
-        </p:spPr>
-        <p:txBody>
-          <a:bodyPr wrap="none" lIns="0" tIns="0" rIns="0" bIns="0"/>
-          <a:p>
-            <a:pPr>
-              <a:lnSpc>
-                <a:spcPct val="100000"/>
-              </a:lnSpc>
-            </a:pPr>
-            <a:r>
-              <a:rPr lang="en-US" sz="1050">
-                <a:solidFill>
-                  <a:srgbClr val="8B97A8"/>
-                </a:solidFill>
-                <a:latin typeface="Microsoft YaHei"/>
-                <a:ea typeface="Microsoft YaHei"/>
-              </a:rPr>
-              <a:t>PPT_FINAL_CONVERGENCE</a:t>
-            </a:r>
-            <a:endParaRPr/>
-          </a:p>
-        </p:txBody>
-      </p:sp>
-      <p:sp>
-        <p:nvSpPr>
-          <p:cNvPr id="250" name="" descr="{&quot;isTemplate&quot;:true,&quot;type&quot;:&quot;text&quot;}"/>
-          <p:cNvSpPr txBox="1"/>
-          <p:nvPr/>
-        </p:nvSpPr>
-        <p:spPr>
-          <a:xfrm rot="0" flipH="0" flipV="0">
-            <a:off x="11353800" y="5943600"/>
-            <a:ext cx="457200" cy="161925"/>
-          </a:xfrm>
-          <a:prstGeom prst="rect"/>
-        </p:spPr>
-        <p:txBody>
-          <a:bodyPr wrap="none" lIns="0" tIns="0" rIns="0" bIns="0"/>
-          <a:p>
-            <a:pPr>
-              <a:lnSpc>
-                <a:spcPct val="100000"/>
-              </a:lnSpc>
-            </a:pPr>
-            <a:r>
-              <a:rPr lang="en-US" sz="1050">
-                <a:solidFill>
-                  <a:srgbClr val="0E3F8C"/>
-                </a:solidFill>
-                <a:latin typeface="Microsoft YaHei"/>
-                <a:ea typeface="Microsoft YaHei"/>
-              </a:rPr>
-              <a:t>01 / 10</a:t>
-            </a:r>
-            <a:endParaRPr/>
-          </a:p>
-        </p:txBody>
-      </p:sp>
-    </p:spTree>
-  </p:cSld>
-</p:sld>
-</file>
-
-<file path=ppt/slides/slide7.xml><?xml version="1.0" encoding="utf-8"?>
-<p:sld xmlns:p="http://schemas.openxmlformats.org/presentationml/2006/main" xmlns:r="http://schemas.openxmlformats.org/officeDocument/2006/relationships" xmlns:a="http://schemas.openxmlformats.org/drawingml/2006/main" xmlns:asvg="http://schemas.microsoft.com/office/drawing/2016/SVG/main" xmlns:mc="http://schemas.openxmlformats.org/markup-compatibility/2006" mc:Ignorable="asvg">
-  <p:cSld>
-    <p:spTree>
-      <p:nvGrpSpPr>
-        <p:cNvPr id="251" name="" descr="&lt;Slide style={{ width: 1280, height: 720, background: '#FFFFFF', padding: 40 }}&gt;&#10;  &lt;Box style={{ height: 88, borderBottom: '3px solid #1E4FA8', justifyContent: 'center' }}&gt;&lt;Text style={{ fontSize: 36, color: '#0E3F8C', fontWeight: 'bold' }}&gt;为什么 Raw Signal 不够&lt;/Text&gt;&lt;Text style={{ fontSize: 18, color: '#4A5568', marginTop: 6 }}&gt;表现水平与证据支持必须分开报告&lt;/Text&gt;&lt;/Box&gt;&#10;  &lt;Box style={{ height: 510, flexDirection: 'row', gap: 28, paddingTop: 18 }}&gt;&#10;    &lt;Box style={{ width: 700, height: 480, border: '1px solid #D6DCE5', padding: 12, background: '#F7F9FC' }}&gt;&lt;Image src=&quot;assets/F2_raw_vs_adjusted.svg&quot; style={{ width: 676, height: 456, objectFit: 'contain' }} /&gt;&lt;/Box&gt;&#10;    &lt;Box style={{ width: 460, height: 480, padding: 22, gap: 20, background: '#F0F5FC' }}&gt;&#10;      &lt;Text style={{ fontSize: 27, color: '#0E3F8C', fontWeight: 'bold' }}&gt;两个独立问题&lt;/Text&gt;&#10;      &lt;Text style={{ fontSize: 23, color: '#1A2230', lineHeight: 1.45 }}&gt;Raw Signal：观察到的表现水平&lt;/Text&gt;&#10;      &lt;Text style={{ fontSize: 23, color: '#1A2230', lineHeight: 1.45 }}&gt;Evidence Reliability：这些观察能否支撑结论&lt;/Text&gt;&#10;      &lt;Box style={{ borderLeft: '5px solid #D9534F', paddingLeft: 16 }}&gt;&lt;Text style={{ fontSize: 22, color: '#D9534F', lineHeight: 1.45 }}&gt;归一化分数不变，不代表支持范围不变&lt;/Text&gt;&lt;/Box&gt;&#10;    &lt;/Box&gt;&#10;  &lt;/Box&gt;&#10;  &lt;Box style={{ height: 40, flexDirection: 'row', justifyContent: 'space-between', alignItems: 'center' }}&gt;&lt;Text style={{ fontSize: 14, color: '#8B97A8' }}&gt;冻结图 F2 · Raw vs Adjusted&lt;/Text&gt;&lt;Text style={{ fontSize: 14, color: '#0E3F8C' }}&gt;02 / 10&lt;/Text&gt;&lt;/Box&gt;&#10;&lt;/Slide&gt;"/>
-        <p:cNvGrpSpPr/>
-        <p:nvPr/>
-      </p:nvGrpSpPr>
-      <p:grpSpPr>
-        <a:xfrm>
-          <a:off x="0" y="0"/>
-          <a:ext cx="0" cy="0"/>
-          <a:chOff x="0" y="0"/>
-          <a:chExt cx="0" cy="0"/>
-        </a:xfrm>
-      </p:grpSpPr>
-      <p:sp>
-        <p:nvSpPr>
-          <p:cNvPr id="252" name=""/>
-          <p:cNvSpPr/>
-          <p:nvPr/>
-        </p:nvSpPr>
-        <p:spPr>
-          <a:xfrm rot="0" flipH="0" flipV="0">
-            <a:off x="0" y="0"/>
-            <a:ext cx="12192000" cy="6858000"/>
-          </a:xfrm>
-          <a:prstGeom prst="rect">
-            <a:avLst/>
-          </a:prstGeom>
-          <a:solidFill>
-            <a:srgbClr val="FFFFFF"/>
-          </a:solidFill>
-          <a:ln/>
-        </p:spPr>
-        <p:txBody>
-          <a:bodyPr/>
-          <a:p/>
-        </p:txBody>
-      </p:sp>
-      <p:sp>
-        <p:nvSpPr>
-          <p:cNvPr id="253" name=""/>
-          <p:cNvSpPr/>
-          <p:nvPr/>
-        </p:nvSpPr>
-        <p:spPr>
-          <a:xfrm rot="0" flipH="0" flipV="0">
-            <a:off x="381000" y="381000"/>
-            <a:ext cx="11430000" cy="838200"/>
-          </a:xfrm>
-          <a:custGeom>
-            <a:pathLst>
-              <a:path w="1200" h="88">
-                <a:moveTo>
-                  <a:pt x="0" y="85"/>
-                </a:moveTo>
-                <a:lnTo>
-                  <a:pt x="1200" y="85"/>
-                </a:lnTo>
-                <a:lnTo>
-                  <a:pt x="1200" y="88"/>
-                </a:lnTo>
-                <a:lnTo>
-                  <a:pt x="0" y="88"/>
-                </a:lnTo>
-                <a:close/>
-              </a:path>
-            </a:pathLst>
-          </a:custGeom>
-          <a:solidFill>
-            <a:srgbClr val="1E4FA8"/>
-          </a:solidFill>
-          <a:ln/>
-        </p:spPr>
-        <p:txBody>
-          <a:bodyPr/>
-          <a:p/>
-        </p:txBody>
-      </p:sp>
-      <p:sp>
-        <p:nvSpPr>
-          <p:cNvPr id="254" name="" descr="{&quot;isTemplate&quot;:true,&quot;type&quot;:&quot;text&quot;}"/>
-          <p:cNvSpPr txBox="1"/>
-          <p:nvPr/>
-        </p:nvSpPr>
-        <p:spPr>
-          <a:xfrm rot="0" flipH="0" flipV="0">
-            <a:off x="381000" y="447675"/>
-            <a:ext cx="11430000" cy="419100"/>
-          </a:xfrm>
-          <a:prstGeom prst="rect"/>
-        </p:spPr>
-        <p:txBody>
-          <a:bodyPr wrap="none" lIns="0" tIns="0" rIns="0" bIns="0"/>
-          <a:p>
-            <a:pPr>
-              <a:lnSpc>
-                <a:spcPct val="100000"/>
-              </a:lnSpc>
-            </a:pPr>
-            <a:r>
-              <a:rPr lang="zh-CN" sz="2700" b="1">
-                <a:solidFill>
-                  <a:srgbClr val="0E3F8C"/>
-                </a:solidFill>
-                <a:latin typeface="Microsoft YaHei"/>
-                <a:ea typeface="Microsoft YaHei"/>
-              </a:rPr>
-              <a:t>为什么</a:t>
-            </a:r>
-            <a:r>
-              <a:rPr lang="en-US" sz="2700" b="1">
-                <a:solidFill>
-                  <a:srgbClr val="0E3F8C"/>
-                </a:solidFill>
-                <a:latin typeface="Microsoft YaHei"/>
-                <a:ea typeface="Microsoft YaHei"/>
-              </a:rPr>
-              <a:t> Raw Signal </a:t>
-            </a:r>
-            <a:r>
-              <a:rPr lang="zh-CN" sz="2700" b="1">
-                <a:solidFill>
-                  <a:srgbClr val="0E3F8C"/>
-                </a:solidFill>
-                <a:latin typeface="Microsoft YaHei"/>
-                <a:ea typeface="Microsoft YaHei"/>
-              </a:rPr>
-              <a:t>不够</a:t>
-            </a:r>
-            <a:endParaRPr/>
-          </a:p>
-        </p:txBody>
-      </p:sp>
-      <p:sp>
-        <p:nvSpPr>
-          <p:cNvPr id="255" name="" descr="{&quot;isTemplate&quot;:true,&quot;type&quot;:&quot;text&quot;}"/>
-          <p:cNvSpPr txBox="1"/>
-          <p:nvPr/>
-        </p:nvSpPr>
-        <p:spPr>
-          <a:xfrm rot="0" flipH="0" flipV="0">
-            <a:off x="381000" y="923925"/>
-            <a:ext cx="11430000" cy="209550"/>
-          </a:xfrm>
-          <a:prstGeom prst="rect"/>
-        </p:spPr>
-        <p:txBody>
-          <a:bodyPr wrap="none" lIns="0" tIns="0" rIns="0" bIns="0"/>
-          <a:p>
-            <a:pPr>
-              <a:lnSpc>
-                <a:spcPct val="100000"/>
-              </a:lnSpc>
-            </a:pPr>
-            <a:r>
-              <a:rPr lang="zh-CN" sz="1350">
-                <a:solidFill>
-                  <a:srgbClr val="4A5568"/>
-                </a:solidFill>
-                <a:latin typeface="Microsoft YaHei"/>
-                <a:ea typeface="Microsoft YaHei"/>
-              </a:rPr>
-              <a:t>表现水平与证据支持必须分开报告</a:t>
-            </a:r>
-            <a:endParaRPr/>
-          </a:p>
-        </p:txBody>
-      </p:sp>
-      <p:sp>
-        <p:nvSpPr>
-          <p:cNvPr id="256" name=""/>
-          <p:cNvSpPr/>
-          <p:nvPr/>
-        </p:nvSpPr>
-        <p:spPr>
-          <a:xfrm rot="0" flipH="0" flipV="0">
-            <a:off x="381000" y="1390650"/>
-            <a:ext cx="6667500" cy="4572000"/>
-          </a:xfrm>
-          <a:prstGeom prst="rect">
-            <a:avLst/>
-          </a:prstGeom>
-          <a:solidFill>
-            <a:srgbClr val="F7F9FC"/>
-          </a:solidFill>
-          <a:ln w="12700">
-            <a:solidFill>
-              <a:srgbClr val="D6DCE5"/>
-            </a:solidFill>
-            <a:prstDash val="solid"/>
-          </a:ln>
-        </p:spPr>
-        <p:txBody>
-          <a:bodyPr/>
-          <a:p/>
-        </p:txBody>
-      </p:sp>
-      <p:pic>
-        <p:nvPicPr>
-          <p:cNvPr id="257" name=""/>
-          <p:cNvPicPr>
-            <a:picLocks noChangeAspect="1"/>
-          </p:cNvPicPr>
-          <p:nvPr/>
-        </p:nvPicPr>
-        <p:blipFill>
-          <a:blip>
-            <a:extLst>
-              <a:ext uri="{96DAC541-7B7A-43D3-8B79-37D633B846F1}">
-                <asvg:svgBlip r:embed="rId1"/>
-              </a:ext>
-            </a:extLst>
-          </a:blip>
-          <a:srcRect l="6761" t="0" r="6761" b="0"/>
-          <a:stretch>
-            <a:fillRect/>
-          </a:stretch>
-        </p:blipFill>
-        <p:spPr>
-          <a:xfrm rot="0" flipH="0" flipV="0">
-            <a:off x="495300" y="1504950"/>
-            <a:ext cx="6438900" cy="4343400"/>
-          </a:xfrm>
-          <a:prstGeom prst="rect">
-            <a:avLst/>
-          </a:prstGeom>
-          <a:ln/>
-        </p:spPr>
-      </p:pic>
-      <p:sp>
-        <p:nvSpPr>
-          <p:cNvPr id="258" name=""/>
-          <p:cNvSpPr/>
-          <p:nvPr/>
-        </p:nvSpPr>
-        <p:spPr>
-          <a:xfrm rot="0" flipH="0" flipV="0">
-            <a:off x="7315200" y="1390650"/>
-            <a:ext cx="4381500" cy="4572000"/>
-          </a:xfrm>
-          <a:prstGeom prst="rect">
-            <a:avLst/>
-          </a:prstGeom>
-          <a:solidFill>
-            <a:srgbClr val="F0F5FC"/>
-          </a:solidFill>
-          <a:ln/>
-        </p:spPr>
-        <p:txBody>
-          <a:bodyPr/>
-          <a:p/>
-        </p:txBody>
-      </p:sp>
-      <p:sp>
-        <p:nvSpPr>
-          <p:cNvPr id="259" name="" descr="{&quot;isTemplate&quot;:true,&quot;type&quot;:&quot;text&quot;}"/>
-          <p:cNvSpPr txBox="1"/>
-          <p:nvPr/>
-        </p:nvSpPr>
-        <p:spPr>
-          <a:xfrm rot="0" flipH="0" flipV="0">
-            <a:off x="7524750" y="1600200"/>
-            <a:ext cx="3962400" cy="314325"/>
-          </a:xfrm>
-          <a:prstGeom prst="rect"/>
-        </p:spPr>
-        <p:txBody>
-          <a:bodyPr wrap="none" lIns="0" tIns="0" rIns="0" bIns="0"/>
-          <a:p>
-            <a:pPr>
-              <a:lnSpc>
-                <a:spcPct val="100000"/>
-              </a:lnSpc>
-            </a:pPr>
-            <a:r>
-              <a:rPr lang="zh-CN" sz="2025" b="1">
-                <a:solidFill>
-                  <a:srgbClr val="0E3F8C"/>
-                </a:solidFill>
-                <a:latin typeface="Microsoft YaHei"/>
-                <a:ea typeface="Microsoft YaHei"/>
-              </a:rPr>
-              <a:t>两个独立问题</a:t>
-            </a:r>
-            <a:endParaRPr/>
-          </a:p>
-        </p:txBody>
-      </p:sp>
-      <p:sp>
-        <p:nvSpPr>
-          <p:cNvPr id="260" name="" descr="{&quot;isTemplate&quot;:true,&quot;type&quot;:&quot;text&quot;}"/>
-          <p:cNvSpPr txBox="1"/>
-          <p:nvPr/>
-        </p:nvSpPr>
-        <p:spPr>
-          <a:xfrm rot="0" flipH="0" flipV="0">
-            <a:off x="7524750" y="2105025"/>
-            <a:ext cx="3962400" cy="390525"/>
-          </a:xfrm>
-          <a:prstGeom prst="rect"/>
-        </p:spPr>
-        <p:txBody>
-          <a:bodyPr wrap="none" lIns="0" tIns="0" rIns="0" bIns="0"/>
-          <a:p>
-            <a:pPr>
-              <a:lnSpc>
-                <a:spcPct val="145000"/>
-              </a:lnSpc>
-            </a:pPr>
-            <a:r>
-              <a:rPr lang="en-US" sz="1725">
-                <a:solidFill>
-                  <a:srgbClr val="1A2230"/>
-                </a:solidFill>
-                <a:latin typeface="Microsoft YaHei"/>
-                <a:ea typeface="Microsoft YaHei"/>
-              </a:rPr>
-              <a:t>Raw Signal</a:t>
-            </a:r>
-            <a:r>
-              <a:rPr lang="zh-CN" sz="1725">
-                <a:solidFill>
-                  <a:srgbClr val="1A2230"/>
-                </a:solidFill>
-                <a:latin typeface="Microsoft YaHei"/>
-                <a:ea typeface="Microsoft YaHei"/>
-              </a:rPr>
-              <a:t>：观察到的表现水平</a:t>
-            </a:r>
-            <a:endParaRPr/>
-          </a:p>
-        </p:txBody>
-      </p:sp>
-      <p:sp>
-        <p:nvSpPr>
-          <p:cNvPr id="261" name="" descr="{&quot;isTemplate&quot;:true,&quot;type&quot;:&quot;text&quot;}"/>
-          <p:cNvSpPr txBox="1"/>
-          <p:nvPr/>
-        </p:nvSpPr>
-        <p:spPr>
-          <a:xfrm rot="0" flipH="0" flipV="0">
-            <a:off x="7524750" y="2686050"/>
-            <a:ext cx="3962400" cy="771525"/>
-          </a:xfrm>
-          <a:prstGeom prst="rect"/>
-        </p:spPr>
-        <p:txBody>
-          <a:bodyPr wrap="square" lIns="0" tIns="0" rIns="0" bIns="0">
-            <a:normAutofit/>
-          </a:bodyPr>
-          <a:p>
-            <a:pPr>
-              <a:lnSpc>
-                <a:spcPct val="145000"/>
-              </a:lnSpc>
-            </a:pPr>
-            <a:r>
-              <a:rPr lang="en-US" sz="1725">
-                <a:solidFill>
-                  <a:srgbClr val="1A2230"/>
-                </a:solidFill>
-                <a:latin typeface="Microsoft YaHei"/>
-                <a:ea typeface="Microsoft YaHei"/>
-              </a:rPr>
-              <a:t>Evidence Reliability</a:t>
-            </a:r>
-            <a:r>
-              <a:rPr lang="zh-CN" sz="1725">
-                <a:solidFill>
-                  <a:srgbClr val="1A2230"/>
-                </a:solidFill>
-                <a:latin typeface="Microsoft YaHei"/>
-                <a:ea typeface="Microsoft YaHei"/>
-              </a:rPr>
-              <a:t>：这些观察能否支撑结论</a:t>
-            </a:r>
-            <a:endParaRPr/>
-          </a:p>
-        </p:txBody>
-      </p:sp>
-      <p:sp>
-        <p:nvSpPr>
-          <p:cNvPr id="262" name=""/>
-          <p:cNvSpPr/>
-          <p:nvPr/>
-        </p:nvSpPr>
-        <p:spPr>
-          <a:xfrm rot="0" flipH="0" flipV="0">
-            <a:off x="7524750" y="3648075"/>
-            <a:ext cx="4010025" cy="371475"/>
-          </a:xfrm>
-          <a:custGeom>
-            <a:pathLst>
-              <a:path w="421" h="39">
-                <a:moveTo>
-                  <a:pt x="0" y="0"/>
-                </a:moveTo>
-                <a:lnTo>
-                  <a:pt x="5" y="0"/>
-                </a:lnTo>
-                <a:lnTo>
-                  <a:pt x="5" y="39"/>
-                </a:lnTo>
-                <a:lnTo>
-                  <a:pt x="0" y="39"/>
-                </a:lnTo>
-                <a:close/>
-              </a:path>
-            </a:pathLst>
-          </a:custGeom>
-          <a:solidFill>
-            <a:srgbClr val="D9534F"/>
-          </a:solidFill>
-          <a:ln/>
-        </p:spPr>
-        <p:txBody>
-          <a:bodyPr/>
-          <a:p/>
-        </p:txBody>
-      </p:sp>
-      <p:sp>
-        <p:nvSpPr>
-          <p:cNvPr id="263" name="" descr="{&quot;isTemplate&quot;:true,&quot;type&quot;:&quot;text&quot;}"/>
-          <p:cNvSpPr txBox="1"/>
-          <p:nvPr/>
-        </p:nvSpPr>
-        <p:spPr>
-          <a:xfrm rot="0" flipH="0" flipV="0">
-            <a:off x="7724775" y="3648075"/>
-            <a:ext cx="3762375" cy="371475"/>
-          </a:xfrm>
-          <a:prstGeom prst="rect"/>
-        </p:spPr>
-        <p:txBody>
-          <a:bodyPr wrap="none" lIns="0" tIns="0" rIns="0" bIns="0"/>
-          <a:p>
-            <a:pPr>
-              <a:lnSpc>
-                <a:spcPct val="145000"/>
-              </a:lnSpc>
-            </a:pPr>
-            <a:r>
-              <a:rPr lang="zh-CN" sz="1650">
-                <a:solidFill>
-                  <a:srgbClr val="D9534F"/>
-                </a:solidFill>
-                <a:latin typeface="Microsoft YaHei"/>
-                <a:ea typeface="Microsoft YaHei"/>
-              </a:rPr>
-              <a:t>归一化分数不变，不代表支持范围不变</a:t>
-            </a:r>
-            <a:endParaRPr/>
-          </a:p>
-        </p:txBody>
-      </p:sp>
-      <p:sp>
-        <p:nvSpPr>
-          <p:cNvPr id="264" name="" descr="{&quot;isTemplate&quot;:true,&quot;type&quot;:&quot;text&quot;}"/>
-          <p:cNvSpPr txBox="1"/>
-          <p:nvPr/>
-        </p:nvSpPr>
-        <p:spPr>
-          <a:xfrm rot="0" flipH="0" flipV="0">
-            <a:off x="381000" y="6191250"/>
-            <a:ext cx="1752600" cy="161925"/>
-          </a:xfrm>
-          <a:prstGeom prst="rect"/>
-        </p:spPr>
-        <p:txBody>
-          <a:bodyPr wrap="none" lIns="0" tIns="0" rIns="0" bIns="0"/>
-          <a:p>
-            <a:pPr>
-              <a:lnSpc>
-                <a:spcPct val="100000"/>
-              </a:lnSpc>
-            </a:pPr>
-            <a:r>
-              <a:rPr lang="zh-CN" sz="1050">
-                <a:solidFill>
-                  <a:srgbClr val="8B97A8"/>
-                </a:solidFill>
-                <a:latin typeface="Microsoft YaHei"/>
-                <a:ea typeface="Microsoft YaHei"/>
-              </a:rPr>
-              <a:t>冻结图</a:t>
-            </a:r>
-            <a:r>
-              <a:rPr lang="en-US" sz="1050">
-                <a:solidFill>
-                  <a:srgbClr val="8B97A8"/>
-                </a:solidFill>
-                <a:latin typeface="Microsoft YaHei"/>
-                <a:ea typeface="Microsoft YaHei"/>
-              </a:rPr>
-              <a:t> F2 · Raw vs Adjusted</a:t>
-            </a:r>
-            <a:endParaRPr/>
-          </a:p>
-        </p:txBody>
-      </p:sp>
-      <p:sp>
-        <p:nvSpPr>
-          <p:cNvPr id="265" name="" descr="{&quot;isTemplate&quot;:true,&quot;type&quot;:&quot;text&quot;}"/>
-          <p:cNvSpPr txBox="1"/>
-          <p:nvPr/>
-        </p:nvSpPr>
-        <p:spPr>
-          <a:xfrm rot="0" flipH="0" flipV="0">
-            <a:off x="11353800" y="6191250"/>
-            <a:ext cx="457200" cy="161925"/>
-          </a:xfrm>
-          <a:prstGeom prst="rect"/>
-        </p:spPr>
-        <p:txBody>
-          <a:bodyPr wrap="none" lIns="0" tIns="0" rIns="0" bIns="0"/>
-          <a:p>
-            <a:pPr>
-              <a:lnSpc>
-                <a:spcPct val="100000"/>
-              </a:lnSpc>
-            </a:pPr>
-            <a:r>
-              <a:rPr lang="en-US" sz="1050">
-                <a:solidFill>
-                  <a:srgbClr val="0E3F8C"/>
-                </a:solidFill>
-                <a:latin typeface="Microsoft YaHei"/>
-                <a:ea typeface="Microsoft YaHei"/>
-              </a:rPr>
-              <a:t>02 / 10</a:t>
-            </a:r>
-            <a:endParaRPr/>
-          </a:p>
-        </p:txBody>
-      </p:sp>
-    </p:spTree>
-  </p:cSld>
-</p:sld>
-</file>
-
-<file path=ppt/slides/slide8.xml><?xml version="1.0" encoding="utf-8"?>
-<p:sld xmlns:p="http://schemas.openxmlformats.org/presentationml/2006/main" xmlns:r="http://schemas.openxmlformats.org/officeDocument/2006/relationships" xmlns:a="http://schemas.openxmlformats.org/drawingml/2006/main" xmlns:asvg="http://schemas.microsoft.com/office/drawing/2016/SVG/main" xmlns:mc="http://schemas.openxmlformats.org/markup-compatibility/2006" mc:Ignorable="asvg">
-  <p:cSld>
-    <p:spTree>
-      <p:nvGrpSpPr>
-        <p:cNvPr id="266" name="" descr="&lt;Slide style={{ width: 1280, height: 720, background: '#FFFFFF', padding: 40 }}&gt;&#10;  &lt;Box style={{ height: 88, borderBottom: '3px solid #1E4FA8', justifyContent: 'center' }}&gt;&lt;Text style={{ fontSize: 36, color: '#0E3F8C', fontWeight: 'bold' }}&gt;Reliability-aware evaluation&lt;/Text&gt;&lt;Text style={{ fontSize: 18, color: '#4A5568', marginTop: 6 }}&gt;从观察证据到可审查决策&lt;/Text&gt;&lt;/Box&gt;&#10;  &lt;Box style={{ height: 472, paddingTop: 16, background: '#F7F9FC' }}&gt;&lt;Image src=&quot;assets/F1_model_flow.svg&quot; style={{ width: 1200, height: 450, objectFit: 'contain' }} /&gt;&lt;/Box&gt;&#10;  &lt;Box style={{ height: 68, background: '#E8EFF8', padding: 14, justifyContent: 'center' }}&gt;&lt;Text style={{ fontSize: 21, color: '#0E3F8C' }}&gt;wᵢ = I(observableᵢ) · cᵢ · (1 − λprompt·pᵢ) · (1 − λcontext·tᵢ)　　Adjustedᵢ = Rawᵢ × wᵢ　　Ceff = Σwᵢ / N&lt;/Text&gt;&lt;/Box&gt;&#10;  &lt;Box style={{ height: 40, flexDirection: 'row', justifyContent: 'space-between', alignItems: 'center' }}&gt;&lt;Text style={{ fontSize: 14, color: '#8B97A8' }}&gt;R 是支持权重，不是校准概率；无证据时 fail-closed&lt;/Text&gt;&lt;Text style={{ fontSize: 14, color: '#0E3F8C' }}&gt;03 / 10&lt;/Text&gt;&lt;/Box&gt;&#10;&lt;/Slide&gt;"/>
-        <p:cNvGrpSpPr/>
-        <p:nvPr/>
-      </p:nvGrpSpPr>
-      <p:grpSpPr>
-        <a:xfrm>
-          <a:off x="0" y="0"/>
-          <a:ext cx="0" cy="0"/>
-          <a:chOff x="0" y="0"/>
-          <a:chExt cx="0" cy="0"/>
-        </a:xfrm>
-      </p:grpSpPr>
-      <p:sp>
-        <p:nvSpPr>
-          <p:cNvPr id="267" name=""/>
-          <p:cNvSpPr/>
-          <p:nvPr/>
-        </p:nvSpPr>
-        <p:spPr>
-          <a:xfrm rot="0" flipH="0" flipV="0">
-            <a:off x="0" y="0"/>
-            <a:ext cx="12192000" cy="6858000"/>
-          </a:xfrm>
-          <a:prstGeom prst="rect">
-            <a:avLst/>
-          </a:prstGeom>
-          <a:solidFill>
-            <a:srgbClr val="FFFFFF"/>
-          </a:solidFill>
-          <a:ln/>
-        </p:spPr>
-        <p:txBody>
-          <a:bodyPr/>
-          <a:p/>
-        </p:txBody>
-      </p:sp>
-      <p:sp>
-        <p:nvSpPr>
-          <p:cNvPr id="268" name=""/>
-          <p:cNvSpPr/>
-          <p:nvPr/>
-        </p:nvSpPr>
-        <p:spPr>
-          <a:xfrm rot="0" flipH="0" flipV="0">
-            <a:off x="381000" y="381000"/>
-            <a:ext cx="11430000" cy="838200"/>
-          </a:xfrm>
-          <a:custGeom>
-            <a:pathLst>
-              <a:path w="1200" h="88">
-                <a:moveTo>
-                  <a:pt x="0" y="85"/>
-                </a:moveTo>
-                <a:lnTo>
-                  <a:pt x="1200" y="85"/>
-                </a:lnTo>
-                <a:lnTo>
-                  <a:pt x="1200" y="88"/>
-                </a:lnTo>
-                <a:lnTo>
-                  <a:pt x="0" y="88"/>
-                </a:lnTo>
-                <a:close/>
-              </a:path>
-            </a:pathLst>
-          </a:custGeom>
-          <a:solidFill>
-            <a:srgbClr val="1E4FA8"/>
-          </a:solidFill>
-          <a:ln/>
-        </p:spPr>
-        <p:txBody>
-          <a:bodyPr/>
-          <a:p/>
-        </p:txBody>
-      </p:sp>
-      <p:sp>
-        <p:nvSpPr>
-          <p:cNvPr id="269" name="" descr="{&quot;isTemplate&quot;:true,&quot;type&quot;:&quot;text&quot;}"/>
-          <p:cNvSpPr txBox="1"/>
-          <p:nvPr/>
-        </p:nvSpPr>
-        <p:spPr>
-          <a:xfrm rot="0" flipH="0" flipV="0">
-            <a:off x="381000" y="447675"/>
-            <a:ext cx="11430000" cy="419100"/>
-          </a:xfrm>
-          <a:prstGeom prst="rect"/>
-        </p:spPr>
-        <p:txBody>
-          <a:bodyPr wrap="none" lIns="0" tIns="0" rIns="0" bIns="0"/>
-          <a:p>
-            <a:pPr>
-              <a:lnSpc>
-                <a:spcPct val="100000"/>
-              </a:lnSpc>
-            </a:pPr>
-            <a:r>
-              <a:rPr lang="en-US" sz="2700" b="1">
-                <a:solidFill>
-                  <a:srgbClr val="0E3F8C"/>
-                </a:solidFill>
-                <a:latin typeface="Microsoft YaHei"/>
-                <a:ea typeface="Microsoft YaHei"/>
-              </a:rPr>
-              <a:t>Reliability-aware evaluation</a:t>
-            </a:r>
-            <a:endParaRPr/>
-          </a:p>
-        </p:txBody>
-      </p:sp>
-      <p:sp>
-        <p:nvSpPr>
-          <p:cNvPr id="270" name="" descr="{&quot;isTemplate&quot;:true,&quot;type&quot;:&quot;text&quot;}"/>
-          <p:cNvSpPr txBox="1"/>
-          <p:nvPr/>
-        </p:nvSpPr>
-        <p:spPr>
-          <a:xfrm rot="0" flipH="0" flipV="0">
-            <a:off x="381000" y="923925"/>
-            <a:ext cx="11430000" cy="209550"/>
-          </a:xfrm>
-          <a:prstGeom prst="rect"/>
-        </p:spPr>
-        <p:txBody>
-          <a:bodyPr wrap="none" lIns="0" tIns="0" rIns="0" bIns="0"/>
-          <a:p>
-            <a:pPr>
-              <a:lnSpc>
-                <a:spcPct val="100000"/>
-              </a:lnSpc>
-            </a:pPr>
-            <a:r>
-              <a:rPr lang="zh-CN" sz="1350">
-                <a:solidFill>
-                  <a:srgbClr val="4A5568"/>
-                </a:solidFill>
-                <a:latin typeface="Microsoft YaHei"/>
-                <a:ea typeface="Microsoft YaHei"/>
-              </a:rPr>
-              <a:t>从观察证据到可审查决策</a:t>
-            </a:r>
-            <a:endParaRPr/>
-          </a:p>
-        </p:txBody>
-      </p:sp>
-      <p:sp>
-        <p:nvSpPr>
-          <p:cNvPr id="271" name=""/>
-          <p:cNvSpPr/>
-          <p:nvPr/>
-        </p:nvSpPr>
-        <p:spPr>
-          <a:xfrm rot="0" flipH="0" flipV="0">
-            <a:off x="381000" y="1219200"/>
-            <a:ext cx="11430000" cy="4495800"/>
-          </a:xfrm>
-          <a:prstGeom prst="rect">
-            <a:avLst/>
-          </a:prstGeom>
-          <a:solidFill>
-            <a:srgbClr val="F7F9FC"/>
-          </a:solidFill>
-          <a:ln/>
-        </p:spPr>
-        <p:txBody>
-          <a:bodyPr/>
-          <a:p/>
-        </p:txBody>
-      </p:sp>
-      <p:pic>
-        <p:nvPicPr>
-          <p:cNvPr id="272" name=""/>
-          <p:cNvPicPr>
-            <a:picLocks noChangeAspect="1"/>
-          </p:cNvPicPr>
-          <p:nvPr/>
-        </p:nvPicPr>
-        <p:blipFill>
-          <a:blip>
-            <a:extLst>
-              <a:ext uri="{96DAC541-7B7A-43D3-8B79-37D633B846F1}">
-                <asvg:svgBlip r:embed="rId1"/>
-              </a:ext>
-            </a:extLst>
-          </a:blip>
-          <a:srcRect l="0" t="17857" r="0" b="17857"/>
-          <a:stretch>
-            <a:fillRect/>
-          </a:stretch>
-        </p:blipFill>
-        <p:spPr>
-          <a:xfrm rot="0" flipH="0" flipV="0">
-            <a:off x="381000" y="1371600"/>
-            <a:ext cx="11430000" cy="4286250"/>
-          </a:xfrm>
-          <a:prstGeom prst="rect">
-            <a:avLst/>
-          </a:prstGeom>
-          <a:ln/>
-        </p:spPr>
-      </p:pic>
-      <p:sp>
-        <p:nvSpPr>
-          <p:cNvPr id="273" name=""/>
-          <p:cNvSpPr/>
-          <p:nvPr/>
-        </p:nvSpPr>
-        <p:spPr>
-          <a:xfrm rot="0" flipH="0" flipV="0">
-            <a:off x="381000" y="5715000"/>
-            <a:ext cx="11430000" cy="647700"/>
-          </a:xfrm>
-          <a:prstGeom prst="rect">
-            <a:avLst/>
-          </a:prstGeom>
-          <a:solidFill>
-            <a:srgbClr val="E8EFF8"/>
-          </a:solidFill>
-          <a:ln/>
-        </p:spPr>
-        <p:txBody>
-          <a:bodyPr/>
-          <a:p/>
-        </p:txBody>
-      </p:sp>
-      <p:sp>
-        <p:nvSpPr>
-          <p:cNvPr id="274" name="" descr="{&quot;isTemplate&quot;:true,&quot;type&quot;:&quot;text&quot;}"/>
-          <p:cNvSpPr txBox="1"/>
-          <p:nvPr/>
-        </p:nvSpPr>
-        <p:spPr>
-          <a:xfrm rot="0" flipH="0" flipV="0">
-            <a:off x="514350" y="5915025"/>
-            <a:ext cx="11163300" cy="247650"/>
-          </a:xfrm>
-          <a:prstGeom prst="rect"/>
-        </p:spPr>
-        <p:txBody>
-          <a:bodyPr wrap="none" lIns="0" tIns="0" rIns="0" bIns="0"/>
-          <a:p>
-            <a:pPr>
-              <a:lnSpc>
-                <a:spcPct val="100000"/>
-              </a:lnSpc>
-            </a:pPr>
-            <a:r>
-              <a:rPr lang="en-US" sz="1575">
-                <a:solidFill>
-                  <a:srgbClr val="0E3F8C"/>
-                </a:solidFill>
-                <a:latin typeface="Microsoft YaHei"/>
-                <a:ea typeface="Microsoft YaHei"/>
-              </a:rPr>
-              <a:t>wᵢ = I(observableᵢ) · cᵢ · (1 − λprompt·pᵢ) · (1 − λcontext·tᵢ)</a:t>
-            </a:r>
-            <a:r>
-              <a:rPr lang="zh-CN" sz="1575">
-                <a:solidFill>
-                  <a:srgbClr val="0E3F8C"/>
-                </a:solidFill>
-                <a:latin typeface="Microsoft YaHei"/>
-                <a:ea typeface="Microsoft YaHei"/>
-              </a:rPr>
-              <a:t>　　</a:t>
-            </a:r>
-            <a:r>
-              <a:rPr lang="en-US" sz="1575">
-                <a:solidFill>
-                  <a:srgbClr val="0E3F8C"/>
-                </a:solidFill>
-                <a:latin typeface="Microsoft YaHei"/>
-                <a:ea typeface="Microsoft YaHei"/>
-              </a:rPr>
-              <a:t>Adjustedᵢ = Rawᵢ × wᵢ</a:t>
-            </a:r>
-            <a:r>
-              <a:rPr lang="zh-CN" sz="1575">
-                <a:solidFill>
-                  <a:srgbClr val="0E3F8C"/>
-                </a:solidFill>
-                <a:latin typeface="Microsoft YaHei"/>
-                <a:ea typeface="Microsoft YaHei"/>
-              </a:rPr>
-              <a:t>　　</a:t>
-            </a:r>
-            <a:r>
-              <a:rPr lang="en-US" sz="1575">
-                <a:solidFill>
-                  <a:srgbClr val="0E3F8C"/>
-                </a:solidFill>
-                <a:latin typeface="Microsoft YaHei"/>
-                <a:ea typeface="Microsoft YaHei"/>
-              </a:rPr>
-              <a:t>Ceff = Σwᵢ / N</a:t>
-            </a:r>
-            <a:endParaRPr/>
-          </a:p>
-        </p:txBody>
-      </p:sp>
-      <p:sp>
-        <p:nvSpPr>
-          <p:cNvPr id="275" name="" descr="{&quot;isTemplate&quot;:true,&quot;type&quot;:&quot;text&quot;}"/>
-          <p:cNvSpPr txBox="1"/>
-          <p:nvPr/>
-        </p:nvSpPr>
-        <p:spPr>
-          <a:xfrm rot="0" flipH="0" flipV="0">
-            <a:off x="381000" y="6477000"/>
-            <a:ext cx="3095625" cy="161925"/>
-          </a:xfrm>
-          <a:prstGeom prst="rect"/>
-        </p:spPr>
-        <p:txBody>
-          <a:bodyPr wrap="none" lIns="0" tIns="0" rIns="0" bIns="0"/>
-          <a:p>
-            <a:pPr>
-              <a:lnSpc>
-                <a:spcPct val="100000"/>
-              </a:lnSpc>
-            </a:pPr>
-            <a:r>
-              <a:rPr lang="en-US" sz="1050">
-                <a:solidFill>
-                  <a:srgbClr val="8B97A8"/>
-                </a:solidFill>
-                <a:latin typeface="Microsoft YaHei"/>
-                <a:ea typeface="Microsoft YaHei"/>
-              </a:rPr>
-              <a:t>R </a:t>
-            </a:r>
-            <a:r>
-              <a:rPr lang="zh-CN" sz="1050">
-                <a:solidFill>
-                  <a:srgbClr val="8B97A8"/>
-                </a:solidFill>
-                <a:latin typeface="Microsoft YaHei"/>
-                <a:ea typeface="Microsoft YaHei"/>
-              </a:rPr>
-              <a:t>是支持权重，不是校准概率；无证据时</a:t>
-            </a:r>
-            <a:r>
-              <a:rPr lang="en-US" sz="1050">
-                <a:solidFill>
-                  <a:srgbClr val="8B97A8"/>
-                </a:solidFill>
-                <a:latin typeface="Microsoft YaHei"/>
-                <a:ea typeface="Microsoft YaHei"/>
-              </a:rPr>
-              <a:t> fail-closed</a:t>
-            </a:r>
-            <a:endParaRPr/>
-          </a:p>
-        </p:txBody>
-      </p:sp>
-      <p:sp>
-        <p:nvSpPr>
-          <p:cNvPr id="276" name="" descr="{&quot;isTemplate&quot;:true,&quot;type&quot;:&quot;text&quot;}"/>
-          <p:cNvSpPr txBox="1"/>
-          <p:nvPr/>
-        </p:nvSpPr>
-        <p:spPr>
-          <a:xfrm rot="0" flipH="0" flipV="0">
-            <a:off x="11353800" y="6477000"/>
-            <a:ext cx="457200" cy="161925"/>
-          </a:xfrm>
-          <a:prstGeom prst="rect"/>
-        </p:spPr>
-        <p:txBody>
-          <a:bodyPr wrap="none" lIns="0" tIns="0" rIns="0" bIns="0"/>
-          <a:p>
-            <a:pPr>
-              <a:lnSpc>
-                <a:spcPct val="100000"/>
-              </a:lnSpc>
-            </a:pPr>
-            <a:r>
-              <a:rPr lang="en-US" sz="1050">
-                <a:solidFill>
-                  <a:srgbClr val="0E3F8C"/>
-                </a:solidFill>
-                <a:latin typeface="Microsoft YaHei"/>
-                <a:ea typeface="Microsoft YaHei"/>
-              </a:rPr>
-              <a:t>03 / 10</a:t>
-            </a:r>
-            <a:endParaRPr/>
-          </a:p>
-        </p:txBody>
-      </p:sp>
-    </p:spTree>
-  </p:cSld>
-</p:sld>
-</file>
-
-<file path=ppt/slides/slide9.xml><?xml version="1.0" encoding="utf-8"?>
-<p:sld xmlns:p="http://schemas.openxmlformats.org/presentationml/2006/main" xmlns:r="http://schemas.openxmlformats.org/officeDocument/2006/relationships" xmlns:a="http://schemas.openxmlformats.org/drawingml/2006/main" xmlns:asvg="http://schemas.microsoft.com/office/drawing/2016/SVG/main" xmlns:mc="http://schemas.openxmlformats.org/markup-compatibility/2006" mc:Ignorable="asvg">
-  <p:cSld>
-    <p:spTree>
-      <p:nvGrpSpPr>
-        <p:cNvPr id="277" name="" descr="&lt;Slide style={{ width: 1280, height: 720, background: '#FFFFFF', padding: 40 }}&gt;&#10;  &lt;Box style={{ height: 88, borderBottom: '3px solid #1E4FA8', justifyContent: 'center' }}&gt;&lt;Text style={{ fontSize: 36, color: '#0E3F8C', fontWeight: 'bold' }}&gt;Development slice：70 条记录，只有 16 条可判读&lt;/Text&gt;&lt;/Box&gt;&#10;  &lt;Box style={{ height: 510, flexDirection: 'row', gap: 28, paddingTop: 18 }}&gt;&#10;    &lt;Box style={{ width: 300, height: 470, background: '#0E3F8C', padding: 24, gap: 18, justifyContent: 'center' }}&gt;&lt;Text style={{ fontSize: 72, color: '#FFFFFF', fontWeight: 'bold' }}&gt;70&lt;/Text&gt;&lt;Text style={{ fontSize: 24, color: '#FFFFFF' }}&gt;AI provisional records&lt;/Text&gt;&lt;Box style={{ height: 1, background: '#8EB5F0' }} /&gt;&lt;Text style={{ fontSize: 21, color: '#DCEBFF', lineHeight: 1.4 }}&gt;16 readable&lt;br /&gt;19 NO_EVIDENCE&lt;br /&gt;35 UNDETERMINED&lt;br /&gt;54 NO_EFFECTIVE_EVIDENCE&lt;/Text&gt;&lt;/Box&gt;&#10;    &lt;Box style={{ width: 872, height: 470, border: '1px solid #D6DCE5', padding: 12, background: '#F7F9FC' }}&gt;&lt;Image src=&quot;assets/F3_evidence_degradation.svg&quot; style={{ width: 846, height: 446, objectFit: 'contain' }} /&gt;&lt;/Box&gt;&#10;  &lt;/Box&gt;&#10;  &lt;Box style={{ height: 40, flexDirection: 'row', justifyContent: 'space-between', alignItems: 'center' }}&gt;&lt;Text style={{ fontSize: 14, color: '#D9534F' }}&gt;54 不是 54 个零分，而是没有有效证据支持数值判断&lt;/Text&gt;&lt;Text style={{ fontSize: 14, color: '#0E3F8C' }}&gt;04 / 10&lt;/Text&gt;&lt;/Box&gt;&#10;&lt;/Slide&gt;"/>
-        <p:cNvGrpSpPr/>
-        <p:nvPr/>
-      </p:nvGrpSpPr>
-      <p:grpSpPr>
-        <a:xfrm>
-          <a:off x="0" y="0"/>
-          <a:ext cx="0" cy="0"/>
-          <a:chOff x="0" y="0"/>
-          <a:chExt cx="0" cy="0"/>
-        </a:xfrm>
-      </p:grpSpPr>
-      <p:sp>
-        <p:nvSpPr>
-          <p:cNvPr id="278" name=""/>
-          <p:cNvSpPr/>
-          <p:nvPr/>
-        </p:nvSpPr>
-        <p:spPr>
-          <a:xfrm rot="0" flipH="0" flipV="0">
-            <a:off x="0" y="0"/>
-            <a:ext cx="12192000" cy="6858000"/>
-          </a:xfrm>
-          <a:prstGeom prst="rect">
-            <a:avLst/>
-          </a:prstGeom>
-          <a:solidFill>
-            <a:srgbClr val="FFFFFF"/>
-          </a:solidFill>
-          <a:ln/>
-        </p:spPr>
-        <p:txBody>
-          <a:bodyPr/>
-          <a:p/>
-        </p:txBody>
-      </p:sp>
-      <p:sp>
-        <p:nvSpPr>
-          <p:cNvPr id="279" name=""/>
-          <p:cNvSpPr/>
-          <p:nvPr/>
-        </p:nvSpPr>
-        <p:spPr>
-          <a:xfrm rot="0" flipH="0" flipV="0">
-            <a:off x="381000" y="381000"/>
-            <a:ext cx="11430000" cy="838200"/>
-          </a:xfrm>
-          <a:custGeom>
-            <a:pathLst>
-              <a:path w="1200" h="88">
-                <a:moveTo>
-                  <a:pt x="0" y="85"/>
-                </a:moveTo>
-                <a:lnTo>
-                  <a:pt x="1200" y="85"/>
-                </a:lnTo>
-                <a:lnTo>
-                  <a:pt x="1200" y="88"/>
-                </a:lnTo>
-                <a:lnTo>
-                  <a:pt x="0" y="88"/>
-                </a:lnTo>
-                <a:close/>
-              </a:path>
-            </a:pathLst>
-          </a:custGeom>
-          <a:solidFill>
-            <a:srgbClr val="1E4FA8"/>
-          </a:solidFill>
-          <a:ln/>
-        </p:spPr>
-        <p:txBody>
-          <a:bodyPr/>
-          <a:p/>
-        </p:txBody>
-      </p:sp>
-      <p:sp>
-        <p:nvSpPr>
-          <p:cNvPr id="280" name="" descr="{&quot;isTemplate&quot;:true,&quot;type&quot;:&quot;text&quot;}"/>
-          <p:cNvSpPr txBox="1"/>
-          <p:nvPr/>
-        </p:nvSpPr>
-        <p:spPr>
-          <a:xfrm rot="0" flipH="0" flipV="0">
-            <a:off x="381000" y="581025"/>
-            <a:ext cx="11430000" cy="419100"/>
-          </a:xfrm>
-          <a:prstGeom prst="rect"/>
-        </p:spPr>
-        <p:txBody>
-          <a:bodyPr wrap="none" lIns="0" tIns="0" rIns="0" bIns="0"/>
-          <a:p>
-            <a:pPr>
-              <a:lnSpc>
-                <a:spcPct val="100000"/>
-              </a:lnSpc>
-            </a:pPr>
-            <a:r>
-              <a:rPr lang="en-US" sz="2700" b="1">
-                <a:solidFill>
-                  <a:srgbClr val="0E3F8C"/>
-                </a:solidFill>
-                <a:latin typeface="Microsoft YaHei"/>
-                <a:ea typeface="Microsoft YaHei"/>
-              </a:rPr>
-              <a:t>Development slice</a:t>
-            </a:r>
-            <a:r>
-              <a:rPr lang="zh-CN" sz="2700" b="1">
-                <a:solidFill>
-                  <a:srgbClr val="0E3F8C"/>
-                </a:solidFill>
-                <a:latin typeface="Microsoft YaHei"/>
-                <a:ea typeface="Microsoft YaHei"/>
-              </a:rPr>
-              <a:t>：</a:t>
-            </a:r>
-            <a:r>
-              <a:rPr lang="en-US" sz="2700" b="1">
-                <a:solidFill>
-                  <a:srgbClr val="0E3F8C"/>
-                </a:solidFill>
-                <a:latin typeface="Microsoft YaHei"/>
-                <a:ea typeface="Microsoft YaHei"/>
-              </a:rPr>
-              <a:t>70 </a:t>
-            </a:r>
-            <a:r>
-              <a:rPr lang="zh-CN" sz="2700" b="1">
-                <a:solidFill>
-                  <a:srgbClr val="0E3F8C"/>
-                </a:solidFill>
-                <a:latin typeface="Microsoft YaHei"/>
-                <a:ea typeface="Microsoft YaHei"/>
-              </a:rPr>
-              <a:t>条记录，只有</a:t>
-            </a:r>
-            <a:r>
-              <a:rPr lang="en-US" sz="2700" b="1">
-                <a:solidFill>
-                  <a:srgbClr val="0E3F8C"/>
-                </a:solidFill>
-                <a:latin typeface="Microsoft YaHei"/>
-                <a:ea typeface="Microsoft YaHei"/>
-              </a:rPr>
-              <a:t> 16 </a:t>
-            </a:r>
-            <a:r>
-              <a:rPr lang="zh-CN" sz="2700" b="1">
-                <a:solidFill>
-                  <a:srgbClr val="0E3F8C"/>
-                </a:solidFill>
-                <a:latin typeface="Microsoft YaHei"/>
-                <a:ea typeface="Microsoft YaHei"/>
-              </a:rPr>
-              <a:t>条可判读</a:t>
-            </a:r>
-            <a:endParaRPr/>
-          </a:p>
-        </p:txBody>
-      </p:sp>
-      <p:sp>
-        <p:nvSpPr>
-          <p:cNvPr id="281" name=""/>
-          <p:cNvSpPr/>
-          <p:nvPr/>
-        </p:nvSpPr>
-        <p:spPr>
-          <a:xfrm rot="0" flipH="0" flipV="0">
-            <a:off x="381000" y="1390650"/>
-            <a:ext cx="2857500" cy="4476750"/>
-          </a:xfrm>
-          <a:prstGeom prst="rect">
-            <a:avLst/>
-          </a:prstGeom>
-          <a:solidFill>
-            <a:srgbClr val="0E3F8C"/>
-          </a:solidFill>
-          <a:ln/>
-        </p:spPr>
-        <p:txBody>
-          <a:bodyPr/>
-          <a:p/>
-        </p:txBody>
-      </p:sp>
-      <p:sp>
-        <p:nvSpPr>
-          <p:cNvPr id="282" name="" descr="{&quot;isTemplate&quot;:true,&quot;type&quot;:&quot;text&quot;}"/>
-          <p:cNvSpPr txBox="1"/>
-          <p:nvPr/>
-        </p:nvSpPr>
-        <p:spPr>
-          <a:xfrm rot="0" flipH="0" flipV="0">
-            <a:off x="609600" y="1971675"/>
-            <a:ext cx="2400300" cy="828675"/>
-          </a:xfrm>
-          <a:prstGeom prst="rect"/>
-        </p:spPr>
-        <p:txBody>
-          <a:bodyPr wrap="none" lIns="0" tIns="0" rIns="0" bIns="0"/>
-          <a:p>
-            <a:pPr>
-              <a:lnSpc>
-                <a:spcPct val="100000"/>
-              </a:lnSpc>
-            </a:pPr>
-            <a:r>
-              <a:rPr lang="en-US" sz="5400" b="1">
-                <a:solidFill>
-                  <a:srgbClr val="FFFFFF"/>
-                </a:solidFill>
-                <a:latin typeface="Microsoft YaHei"/>
-                <a:ea typeface="Microsoft YaHei"/>
-              </a:rPr>
-              <a:t>70</a:t>
-            </a:r>
-            <a:endParaRPr/>
-          </a:p>
-        </p:txBody>
-      </p:sp>
-      <p:sp>
-        <p:nvSpPr>
-          <p:cNvPr id="283" name="" descr="{&quot;isTemplate&quot;:true,&quot;type&quot;:&quot;text&quot;}"/>
-          <p:cNvSpPr txBox="1"/>
-          <p:nvPr/>
-        </p:nvSpPr>
-        <p:spPr>
-          <a:xfrm rot="0" flipH="0" flipV="0">
-            <a:off x="609600" y="2971800"/>
-            <a:ext cx="2400300" cy="276225"/>
-          </a:xfrm>
-          <a:prstGeom prst="rect"/>
-        </p:spPr>
-        <p:txBody>
-          <a:bodyPr wrap="none" lIns="0" tIns="0" rIns="0" bIns="0"/>
-          <a:p>
-            <a:pPr>
-              <a:lnSpc>
-                <a:spcPct val="100000"/>
-              </a:lnSpc>
-            </a:pPr>
-            <a:r>
-              <a:rPr lang="en-US" sz="1800">
-                <a:solidFill>
-                  <a:srgbClr val="FFFFFF"/>
-                </a:solidFill>
-                <a:latin typeface="Microsoft YaHei"/>
-                <a:ea typeface="Microsoft YaHei"/>
-              </a:rPr>
-              <a:t>AI provisional records</a:t>
-            </a:r>
-            <a:endParaRPr/>
-          </a:p>
-        </p:txBody>
-      </p:sp>
-      <p:sp>
-        <p:nvSpPr>
-          <p:cNvPr id="284" name=""/>
-          <p:cNvSpPr/>
-          <p:nvPr/>
-        </p:nvSpPr>
-        <p:spPr>
-          <a:xfrm rot="0" flipH="0" flipV="0">
-            <a:off x="609600" y="3419475"/>
-            <a:ext cx="2400300" cy="9525"/>
-          </a:xfrm>
-          <a:prstGeom prst="rect">
-            <a:avLst/>
-          </a:prstGeom>
-          <a:solidFill>
-            <a:srgbClr val="8EB5F0"/>
-          </a:solidFill>
-          <a:ln/>
-        </p:spPr>
-        <p:txBody>
-          <a:bodyPr/>
-          <a:p/>
-        </p:txBody>
-      </p:sp>
-      <p:sp>
-        <p:nvSpPr>
-          <p:cNvPr id="285" name="" descr="{&quot;isTemplate&quot;:true,&quot;type&quot;:&quot;text&quot;}"/>
-          <p:cNvSpPr txBox="1"/>
-          <p:nvPr/>
-        </p:nvSpPr>
-        <p:spPr>
-          <a:xfrm rot="0" flipH="0" flipV="0">
-            <a:off x="609600" y="3600450"/>
-            <a:ext cx="2466975" cy="1685925"/>
-          </a:xfrm>
-          <a:prstGeom prst="rect"/>
-        </p:spPr>
-        <p:txBody>
-          <a:bodyPr wrap="square" lIns="0" tIns="0" rIns="0" bIns="0">
-            <a:normAutofit/>
-          </a:bodyPr>
-          <a:p>
-            <a:pPr>
-              <a:lnSpc>
-                <a:spcPct val="140000"/>
-              </a:lnSpc>
-            </a:pPr>
-            <a:r>
-              <a:rPr lang="en-US" sz="1575">
-                <a:solidFill>
-                  <a:srgbClr val="DCEBFF"/>
-                </a:solidFill>
-                <a:latin typeface="Microsoft YaHei"/>
-                <a:ea typeface="Microsoft YaHei"/>
-              </a:rPr>
-              <a:t>16 readable</a:t>
-            </a:r>
-            <a:endParaRPr/>
-          </a:p>
-          <a:p>
-            <a:pPr>
-              <a:lnSpc>
-                <a:spcPct val="140000"/>
-              </a:lnSpc>
-            </a:pPr>
-            <a:r>
-              <a:rPr lang="en-US" sz="1575">
-                <a:solidFill>
-                  <a:srgbClr val="DCEBFF"/>
-                </a:solidFill>
-                <a:latin typeface="Microsoft YaHei"/>
-                <a:ea typeface="Microsoft YaHei"/>
-              </a:rPr>
-              <a:t>19 NO_EVIDENCE</a:t>
-            </a:r>
-            <a:endParaRPr/>
-          </a:p>
-          <a:p>
-            <a:pPr>
-              <a:lnSpc>
-                <a:spcPct val="140000"/>
-              </a:lnSpc>
-            </a:pPr>
-            <a:r>
-              <a:rPr lang="en-US" sz="1575">
-                <a:solidFill>
-                  <a:srgbClr val="DCEBFF"/>
-                </a:solidFill>
-                <a:latin typeface="Microsoft YaHei"/>
-                <a:ea typeface="Microsoft YaHei"/>
-              </a:rPr>
-              <a:t>35 UNDETERMINED</a:t>
-            </a:r>
-            <a:endParaRPr/>
-          </a:p>
-          <a:p>
-            <a:pPr>
-              <a:lnSpc>
-                <a:spcPct val="140000"/>
-              </a:lnSpc>
-            </a:pPr>
-            <a:r>
-              <a:rPr lang="en-US" sz="1575">
-                <a:solidFill>
-                  <a:srgbClr val="DCEBFF"/>
-                </a:solidFill>
-                <a:latin typeface="Microsoft YaHei"/>
-                <a:ea typeface="Microsoft YaHei"/>
-              </a:rPr>
-              <a:t>54 NO_EFFECTIVE_EVIDENCE</a:t>
-            </a:r>
-            <a:endParaRPr/>
-          </a:p>
-        </p:txBody>
-      </p:sp>
-      <p:sp>
-        <p:nvSpPr>
-          <p:cNvPr id="286" name=""/>
-          <p:cNvSpPr/>
-          <p:nvPr/>
-        </p:nvSpPr>
-        <p:spPr>
-          <a:xfrm rot="0" flipH="0" flipV="0">
-            <a:off x="3505200" y="1390650"/>
-            <a:ext cx="8305800" cy="4476750"/>
-          </a:xfrm>
-          <a:prstGeom prst="rect">
-            <a:avLst/>
-          </a:prstGeom>
-          <a:solidFill>
-            <a:srgbClr val="F7F9FC"/>
-          </a:solidFill>
-          <a:ln w="12700">
-            <a:solidFill>
-              <a:srgbClr val="D6DCE5"/>
-            </a:solidFill>
-            <a:prstDash val="solid"/>
-          </a:ln>
-        </p:spPr>
-        <p:txBody>
-          <a:bodyPr/>
-          <a:p/>
-        </p:txBody>
-      </p:sp>
-      <p:pic>
-        <p:nvPicPr>
-          <p:cNvPr id="287" name=""/>
-          <p:cNvPicPr>
-            <a:picLocks noChangeAspect="1"/>
-          </p:cNvPicPr>
-          <p:nvPr/>
-        </p:nvPicPr>
-        <p:blipFill>
-          <a:blip>
-            <a:extLst>
-              <a:ext uri="{96DAC541-7B7A-43D3-8B79-37D633B846F1}">
-                <asvg:svgBlip r:embed="rId1"/>
-              </a:ext>
-            </a:extLst>
-          </a:blip>
-          <a:srcRect l="0" t="4812" r="0" b="4812"/>
-          <a:stretch>
-            <a:fillRect/>
-          </a:stretch>
-        </p:blipFill>
-        <p:spPr>
-          <a:xfrm rot="0" flipH="0" flipV="0">
-            <a:off x="3619500" y="1504950"/>
-            <a:ext cx="8058150" cy="4248150"/>
-          </a:xfrm>
-          <a:prstGeom prst="rect">
-            <a:avLst/>
-          </a:prstGeom>
-          <a:ln/>
-        </p:spPr>
-      </p:pic>
-      <p:sp>
-        <p:nvSpPr>
-          <p:cNvPr id="288" name="" descr="{&quot;isTemplate&quot;:true,&quot;type&quot;:&quot;text&quot;}"/>
-          <p:cNvSpPr txBox="1"/>
-          <p:nvPr/>
-        </p:nvSpPr>
-        <p:spPr>
-          <a:xfrm rot="0" flipH="0" flipV="0">
-            <a:off x="381000" y="6191250"/>
-            <a:ext cx="3105150" cy="161925"/>
-          </a:xfrm>
-          <a:prstGeom prst="rect"/>
-        </p:spPr>
-        <p:txBody>
-          <a:bodyPr wrap="none" lIns="0" tIns="0" rIns="0" bIns="0"/>
-          <a:p>
-            <a:pPr>
-              <a:lnSpc>
-                <a:spcPct val="100000"/>
-              </a:lnSpc>
-            </a:pPr>
-            <a:r>
-              <a:rPr lang="en-US" sz="1050">
-                <a:solidFill>
-                  <a:srgbClr val="D9534F"/>
-                </a:solidFill>
-                <a:latin typeface="Microsoft YaHei"/>
-                <a:ea typeface="Microsoft YaHei"/>
-              </a:rPr>
-              <a:t>54 </a:t>
-            </a:r>
-            <a:r>
-              <a:rPr lang="zh-CN" sz="1050">
-                <a:solidFill>
-                  <a:srgbClr val="D9534F"/>
-                </a:solidFill>
-                <a:latin typeface="Microsoft YaHei"/>
-                <a:ea typeface="Microsoft YaHei"/>
-              </a:rPr>
-              <a:t>不是</a:t>
-            </a:r>
-            <a:r>
-              <a:rPr lang="en-US" sz="1050">
-                <a:solidFill>
-                  <a:srgbClr val="D9534F"/>
-                </a:solidFill>
-                <a:latin typeface="Microsoft YaHei"/>
-                <a:ea typeface="Microsoft YaHei"/>
-              </a:rPr>
-              <a:t> 54 </a:t>
-            </a:r>
-            <a:r>
-              <a:rPr lang="zh-CN" sz="1050">
-                <a:solidFill>
-                  <a:srgbClr val="D9534F"/>
-                </a:solidFill>
-                <a:latin typeface="Microsoft YaHei"/>
-                <a:ea typeface="Microsoft YaHei"/>
-              </a:rPr>
-              <a:t>个零分，而是没有有效证据支持数值判断</a:t>
-            </a:r>
-            <a:endParaRPr/>
-          </a:p>
-        </p:txBody>
-      </p:sp>
-      <p:sp>
-        <p:nvSpPr>
-          <p:cNvPr id="289" name="" descr="{&quot;isTemplate&quot;:true,&quot;type&quot;:&quot;text&quot;}"/>
-          <p:cNvSpPr txBox="1"/>
-          <p:nvPr/>
-        </p:nvSpPr>
-        <p:spPr>
-          <a:xfrm rot="0" flipH="0" flipV="0">
-            <a:off x="11353800" y="6191250"/>
-            <a:ext cx="457200" cy="161925"/>
-          </a:xfrm>
-          <a:prstGeom prst="rect"/>
-        </p:spPr>
-        <p:txBody>
-          <a:bodyPr wrap="none" lIns="0" tIns="0" rIns="0" bIns="0"/>
-          <a:p>
-            <a:pPr>
-              <a:lnSpc>
-                <a:spcPct val="100000"/>
-              </a:lnSpc>
-            </a:pPr>
-            <a:r>
-              <a:rPr lang="en-US" sz="1050">
-                <a:solidFill>
-                  <a:srgbClr val="0E3F8C"/>
-                </a:solidFill>
-                <a:latin typeface="Microsoft YaHei"/>
-                <a:ea typeface="Microsoft YaHei"/>
-              </a:rPr>
-              <a:t>04 / 10</a:t>
             </a:r>
             <a:endParaRPr/>
           </a:p>
